--- a/docs/pitch/Ghostwalk_pitch.pptx
+++ b/docs/pitch/Ghostwalk_pitch.pptx
@@ -118,14 +118,14 @@
   <p:extLst>
     <p:ext uri="{521415D9-36F7-43E2-AB2F-B90AF26B5E84}">
       <p14:sectionLst xmlns:p14="http://schemas.microsoft.com/office/powerpoint/2010/main">
-        <p14:section name="Problem" id="{48ce50ca-e377-c4ca-80e5-c968bc1ffdea}">
+        <p14:section name="Problem" id="{54f7f4bf-2504-dd7f-81ef-d7ee17f3c9f3}">
           <p14:sldIdLst>
             <p14:sldId id="256"/>
             <p14:sldId id="257"/>
             <p14:sldId id="258"/>
           </p14:sldIdLst>
         </p14:section>
-        <p14:section name="Solution" id="{4261cd3f-6168-bf42-c15d-de4bfa42e42b}">
+        <p14:section name="Solution" id="{2baf3c19-d19d-31da-0801-3bdf2346172d}">
           <p14:sldIdLst>
             <p14:sldId id="259"/>
             <p14:sldId id="260"/>
@@ -134,14 +134,14 @@
             <p14:sldId id="263"/>
           </p14:sldIdLst>
         </p14:section>
-        <p14:section name="Evidence" id="{5ef473b3-8ae1-8aff-0861-78e3057efd81}">
+        <p14:section name="Evidence" id="{6c2011a5-732b-9819-fc4b-b37209c61794}">
           <p14:sldIdLst>
             <p14:sldId id="264"/>
             <p14:sldId id="265"/>
             <p14:sldId id="266"/>
           </p14:sldIdLst>
         </p14:section>
-        <p14:section name="Close" id="{0f251a1d-5312-4585-610a-c5eda0fc1240}">
+        <p14:section name="Close" id="{4452cb72-1316-5064-cf60-720b0125ceb0}">
           <p14:sldIdLst>
             <p14:sldId id="267"/>
           </p14:sldIdLst>
@@ -153,6 +153,1662 @@
     </p:ext>
   </p:extLst>
 </p:presentation>
+</file>
+
+<file path=ppt/charts/chart1.xml><?xml version="1.0" encoding="utf-8"?>
+<c:chartSpace xmlns:c="http://schemas.openxmlformats.org/drawingml/2006/chart" xmlns:a="http://schemas.openxmlformats.org/drawingml/2006/main" xmlns:r="http://schemas.openxmlformats.org/officeDocument/2006/relationships">
+  <c:date1904 val="0"/>
+  <c:roundedCorners val="1"/>
+  <c:chart>
+    <c:title>
+      <c:tx>
+        <c:rich>
+          <a:bodyPr/>
+          <a:lstStyle/>
+          <a:p>
+            <a:pPr>
+              <a:defRPr sz="1400" b="0" i="0" u="none" strike="noStrike">
+                <a:solidFill>
+                  <a:srgbClr val="E6EDF7"/>
+                </a:solidFill>
+                <a:latin typeface="+mn-lt"/>
+              </a:defRPr>
+            </a:pPr>
+            <a:r>
+              <a:rPr sz="1400" b="0" i="0" u="none" strike="noStrike">
+                <a:solidFill>
+                  <a:srgbClr val="E6EDF7"/>
+                </a:solidFill>
+                <a:latin typeface="+mn-lt"/>
+              </a:rPr>
+              <a:t>Train km, seed 42, 30,000 iterations (from sa_seed42.json)</a:t>
+            </a:r>
+          </a:p>
+        </c:rich>
+      </c:tx>
+      <c:layout/>
+      <c:overlay val="0"/>
+    </c:title>
+    <c:autoTitleDeleted val="0"/>
+    <c:plotArea>
+      <c:layout/>
+      <c:lineChart>
+        <c:varyColors val="0"/>
+        <c:ser>
+          <c:idx val="0"/>
+          <c:order val="0"/>
+          <c:tx>
+            <c:strRef>
+              <c:f>Sheet1!$B$1</c:f>
+              <c:strCache>
+                <c:ptCount val="1"/>
+                <c:pt idx="0">
+                  <c:v>current</c:v>
+                </c:pt>
+              </c:strCache>
+            </c:strRef>
+          </c:tx>
+          <c:spPr>
+            <a:solidFill>
+              <a:srgbClr val="8A97AD"/>
+            </a:solidFill>
+            <a:ln w="25400" cap="flat">
+              <a:solidFill>
+                <a:srgbClr val="8A97AD"/>
+              </a:solidFill>
+              <a:prstDash val="solid"/>
+              <a:round/>
+            </a:ln>
+            <a:effectLst/>
+          </c:spPr>
+          <c:invertIfNegative val="0"/>
+          <c:dLbls>
+            <c:numFmt formatCode="#,##0" sourceLinked="0"/>
+            <c:txPr>
+              <a:bodyPr/>
+              <a:lstStyle/>
+              <a:p>
+                <a:pPr>
+                  <a:defRPr b="0" i="0" strike="noStrike" sz="1200" u="none">
+                    <a:solidFill>
+                      <a:srgbClr val="000000"/>
+                    </a:solidFill>
+                    <a:latin typeface="Arial"/>
+                  </a:defRPr>
+                </a:pPr>
+              </a:p>
+            </c:txPr>
+            <c:showLegendKey val="0"/>
+            <c:showVal val="0"/>
+            <c:showCatName val="0"/>
+            <c:showSerName val="0"/>
+            <c:showPercent val="0"/>
+            <c:showBubbleSize val="0"/>
+            <c:showLeaderLines val="0"/>
+          </c:dLbls>
+          <c:marker>
+            <c:symbol val="none"/>
+            <c:size val="6"/>
+            <c:spPr>
+              <a:solidFill>
+                <a:srgbClr val="8A97AD"/>
+              </a:solidFill>
+              <a:ln w="9525" cap="flat">
+                <a:solidFill>
+                  <a:srgbClr val="8A97AD"/>
+                </a:solidFill>
+                <a:prstDash val="solid"/>
+                <a:round/>
+              </a:ln>
+              <a:effectLst/>
+            </c:spPr>
+          </c:marker>
+          <c:cat>
+            <c:multiLvlStrRef>
+              <c:f>Sheet1!$A$2:$A$102</c:f>
+              <c:multiLvlStrCache>
+                <c:ptCount val="101"/>
+                <c:lvl>
+                  <c:pt idx="0">
+                    <c:v>0</c:v>
+                  </c:pt>
+                  <c:pt idx="1">
+                    <c:v>300</c:v>
+                  </c:pt>
+                  <c:pt idx="2">
+                    <c:v>600</c:v>
+                  </c:pt>
+                  <c:pt idx="3">
+                    <c:v>900</c:v>
+                  </c:pt>
+                  <c:pt idx="4">
+                    <c:v>1,200</c:v>
+                  </c:pt>
+                  <c:pt idx="5">
+                    <c:v>1,500</c:v>
+                  </c:pt>
+                  <c:pt idx="6">
+                    <c:v>1,800</c:v>
+                  </c:pt>
+                  <c:pt idx="7">
+                    <c:v>2,100</c:v>
+                  </c:pt>
+                  <c:pt idx="8">
+                    <c:v>2,400</c:v>
+                  </c:pt>
+                  <c:pt idx="9">
+                    <c:v>2,700</c:v>
+                  </c:pt>
+                  <c:pt idx="10">
+                    <c:v>3,000</c:v>
+                  </c:pt>
+                  <c:pt idx="11">
+                    <c:v>3,300</c:v>
+                  </c:pt>
+                  <c:pt idx="12">
+                    <c:v>3,600</c:v>
+                  </c:pt>
+                  <c:pt idx="13">
+                    <c:v>3,900</c:v>
+                  </c:pt>
+                  <c:pt idx="14">
+                    <c:v>4,200</c:v>
+                  </c:pt>
+                  <c:pt idx="15">
+                    <c:v>4,500</c:v>
+                  </c:pt>
+                  <c:pt idx="16">
+                    <c:v>4,800</c:v>
+                  </c:pt>
+                  <c:pt idx="17">
+                    <c:v>5,100</c:v>
+                  </c:pt>
+                  <c:pt idx="18">
+                    <c:v>5,400</c:v>
+                  </c:pt>
+                  <c:pt idx="19">
+                    <c:v>5,700</c:v>
+                  </c:pt>
+                  <c:pt idx="20">
+                    <c:v>6,000</c:v>
+                  </c:pt>
+                  <c:pt idx="21">
+                    <c:v>6,300</c:v>
+                  </c:pt>
+                  <c:pt idx="22">
+                    <c:v>6,600</c:v>
+                  </c:pt>
+                  <c:pt idx="23">
+                    <c:v>6,900</c:v>
+                  </c:pt>
+                  <c:pt idx="24">
+                    <c:v>7,200</c:v>
+                  </c:pt>
+                  <c:pt idx="25">
+                    <c:v>7,500</c:v>
+                  </c:pt>
+                  <c:pt idx="26">
+                    <c:v>7,800</c:v>
+                  </c:pt>
+                  <c:pt idx="27">
+                    <c:v>8,100</c:v>
+                  </c:pt>
+                  <c:pt idx="28">
+                    <c:v>8,400</c:v>
+                  </c:pt>
+                  <c:pt idx="29">
+                    <c:v>8,700</c:v>
+                  </c:pt>
+                  <c:pt idx="30">
+                    <c:v>9,000</c:v>
+                  </c:pt>
+                  <c:pt idx="31">
+                    <c:v>9,300</c:v>
+                  </c:pt>
+                  <c:pt idx="32">
+                    <c:v>9,600</c:v>
+                  </c:pt>
+                  <c:pt idx="33">
+                    <c:v>9,900</c:v>
+                  </c:pt>
+                  <c:pt idx="34">
+                    <c:v>10,200</c:v>
+                  </c:pt>
+                  <c:pt idx="35">
+                    <c:v>10,500</c:v>
+                  </c:pt>
+                  <c:pt idx="36">
+                    <c:v>10,800</c:v>
+                  </c:pt>
+                  <c:pt idx="37">
+                    <c:v>11,100</c:v>
+                  </c:pt>
+                  <c:pt idx="38">
+                    <c:v>11,400</c:v>
+                  </c:pt>
+                  <c:pt idx="39">
+                    <c:v>11,700</c:v>
+                  </c:pt>
+                  <c:pt idx="40">
+                    <c:v>12,000</c:v>
+                  </c:pt>
+                  <c:pt idx="41">
+                    <c:v>12,300</c:v>
+                  </c:pt>
+                  <c:pt idx="42">
+                    <c:v>12,600</c:v>
+                  </c:pt>
+                  <c:pt idx="43">
+                    <c:v>12,900</c:v>
+                  </c:pt>
+                  <c:pt idx="44">
+                    <c:v>13,200</c:v>
+                  </c:pt>
+                  <c:pt idx="45">
+                    <c:v>13,500</c:v>
+                  </c:pt>
+                  <c:pt idx="46">
+                    <c:v>13,800</c:v>
+                  </c:pt>
+                  <c:pt idx="47">
+                    <c:v>14,100</c:v>
+                  </c:pt>
+                  <c:pt idx="48">
+                    <c:v>14,400</c:v>
+                  </c:pt>
+                  <c:pt idx="49">
+                    <c:v>14,700</c:v>
+                  </c:pt>
+                  <c:pt idx="50">
+                    <c:v>15,000</c:v>
+                  </c:pt>
+                  <c:pt idx="51">
+                    <c:v>15,300</c:v>
+                  </c:pt>
+                  <c:pt idx="52">
+                    <c:v>15,600</c:v>
+                  </c:pt>
+                  <c:pt idx="53">
+                    <c:v>15,900</c:v>
+                  </c:pt>
+                  <c:pt idx="54">
+                    <c:v>16,200</c:v>
+                  </c:pt>
+                  <c:pt idx="55">
+                    <c:v>16,500</c:v>
+                  </c:pt>
+                  <c:pt idx="56">
+                    <c:v>16,800</c:v>
+                  </c:pt>
+                  <c:pt idx="57">
+                    <c:v>17,100</c:v>
+                  </c:pt>
+                  <c:pt idx="58">
+                    <c:v>17,400</c:v>
+                  </c:pt>
+                  <c:pt idx="59">
+                    <c:v>17,700</c:v>
+                  </c:pt>
+                  <c:pt idx="60">
+                    <c:v>18,000</c:v>
+                  </c:pt>
+                  <c:pt idx="61">
+                    <c:v>18,300</c:v>
+                  </c:pt>
+                  <c:pt idx="62">
+                    <c:v>18,600</c:v>
+                  </c:pt>
+                  <c:pt idx="63">
+                    <c:v>18,900</c:v>
+                  </c:pt>
+                  <c:pt idx="64">
+                    <c:v>19,200</c:v>
+                  </c:pt>
+                  <c:pt idx="65">
+                    <c:v>19,500</c:v>
+                  </c:pt>
+                  <c:pt idx="66">
+                    <c:v>19,800</c:v>
+                  </c:pt>
+                  <c:pt idx="67">
+                    <c:v>20,100</c:v>
+                  </c:pt>
+                  <c:pt idx="68">
+                    <c:v>20,400</c:v>
+                  </c:pt>
+                  <c:pt idx="69">
+                    <c:v>20,700</c:v>
+                  </c:pt>
+                  <c:pt idx="70">
+                    <c:v>21,000</c:v>
+                  </c:pt>
+                  <c:pt idx="71">
+                    <c:v>21,300</c:v>
+                  </c:pt>
+                  <c:pt idx="72">
+                    <c:v>21,600</c:v>
+                  </c:pt>
+                  <c:pt idx="73">
+                    <c:v>21,900</c:v>
+                  </c:pt>
+                  <c:pt idx="74">
+                    <c:v>22,200</c:v>
+                  </c:pt>
+                  <c:pt idx="75">
+                    <c:v>22,500</c:v>
+                  </c:pt>
+                  <c:pt idx="76">
+                    <c:v>22,800</c:v>
+                  </c:pt>
+                  <c:pt idx="77">
+                    <c:v>23,100</c:v>
+                  </c:pt>
+                  <c:pt idx="78">
+                    <c:v>23,400</c:v>
+                  </c:pt>
+                  <c:pt idx="79">
+                    <c:v>23,700</c:v>
+                  </c:pt>
+                  <c:pt idx="80">
+                    <c:v>24,000</c:v>
+                  </c:pt>
+                  <c:pt idx="81">
+                    <c:v>24,300</c:v>
+                  </c:pt>
+                  <c:pt idx="82">
+                    <c:v>24,600</c:v>
+                  </c:pt>
+                  <c:pt idx="83">
+                    <c:v>24,900</c:v>
+                  </c:pt>
+                  <c:pt idx="84">
+                    <c:v>25,200</c:v>
+                  </c:pt>
+                  <c:pt idx="85">
+                    <c:v>25,500</c:v>
+                  </c:pt>
+                  <c:pt idx="86">
+                    <c:v>25,800</c:v>
+                  </c:pt>
+                  <c:pt idx="87">
+                    <c:v>26,100</c:v>
+                  </c:pt>
+                  <c:pt idx="88">
+                    <c:v>26,400</c:v>
+                  </c:pt>
+                  <c:pt idx="89">
+                    <c:v>26,700</c:v>
+                  </c:pt>
+                  <c:pt idx="90">
+                    <c:v>27,000</c:v>
+                  </c:pt>
+                  <c:pt idx="91">
+                    <c:v>27,300</c:v>
+                  </c:pt>
+                  <c:pt idx="92">
+                    <c:v>27,600</c:v>
+                  </c:pt>
+                  <c:pt idx="93">
+                    <c:v>27,900</c:v>
+                  </c:pt>
+                  <c:pt idx="94">
+                    <c:v>28,200</c:v>
+                  </c:pt>
+                  <c:pt idx="95">
+                    <c:v>28,500</c:v>
+                  </c:pt>
+                  <c:pt idx="96">
+                    <c:v>28,800</c:v>
+                  </c:pt>
+                  <c:pt idx="97">
+                    <c:v>29,100</c:v>
+                  </c:pt>
+                  <c:pt idx="98">
+                    <c:v>29,400</c:v>
+                  </c:pt>
+                  <c:pt idx="99">
+                    <c:v>29,700</c:v>
+                  </c:pt>
+                  <c:pt idx="100">
+                    <c:v>30,000</c:v>
+                  </c:pt>
+                </c:lvl>
+              </c:multiLvlStrCache>
+            </c:multiLvlStrRef>
+          </c:cat>
+          <c:val>
+            <c:numRef>
+              <c:f>Sheet1!$B$2:$B$102</c:f>
+              <c:numCache>
+                <c:formatCode>General</c:formatCode>
+                <c:ptCount val="101"/>
+                <c:pt idx="0">
+                  <c:v>92.518</c:v>
+                </c:pt>
+                <c:pt idx="1">
+                  <c:v>91.107</c:v>
+                </c:pt>
+                <c:pt idx="2">
+                  <c:v>91.971</c:v>
+                </c:pt>
+                <c:pt idx="3">
+                  <c:v>90.788</c:v>
+                </c:pt>
+                <c:pt idx="4">
+                  <c:v>90.876</c:v>
+                </c:pt>
+                <c:pt idx="5">
+                  <c:v>90.306</c:v>
+                </c:pt>
+                <c:pt idx="6">
+                  <c:v>89.059</c:v>
+                </c:pt>
+                <c:pt idx="7">
+                  <c:v>89.502</c:v>
+                </c:pt>
+                <c:pt idx="8">
+                  <c:v>89.776</c:v>
+                </c:pt>
+                <c:pt idx="9">
+                  <c:v>87.851</c:v>
+                </c:pt>
+                <c:pt idx="10">
+                  <c:v>88.265</c:v>
+                </c:pt>
+                <c:pt idx="11">
+                  <c:v>87.291</c:v>
+                </c:pt>
+                <c:pt idx="12">
+                  <c:v>86.903</c:v>
+                </c:pt>
+                <c:pt idx="13">
+                  <c:v>86.828</c:v>
+                </c:pt>
+                <c:pt idx="14">
+                  <c:v>87.036</c:v>
+                </c:pt>
+                <c:pt idx="15">
+                  <c:v>86.892</c:v>
+                </c:pt>
+                <c:pt idx="16">
+                  <c:v>85.638</c:v>
+                </c:pt>
+                <c:pt idx="17">
+                  <c:v>85.182</c:v>
+                </c:pt>
+                <c:pt idx="18">
+                  <c:v>84.719</c:v>
+                </c:pt>
+                <c:pt idx="19">
+                  <c:v>84.276</c:v>
+                </c:pt>
+                <c:pt idx="20">
+                  <c:v>83.994</c:v>
+                </c:pt>
+                <c:pt idx="21">
+                  <c:v>83.434</c:v>
+                </c:pt>
+                <c:pt idx="22">
+                  <c:v>83.244</c:v>
+                </c:pt>
+                <c:pt idx="23">
+                  <c:v>82.869</c:v>
+                </c:pt>
+                <c:pt idx="24">
+                  <c:v>82.62</c:v>
+                </c:pt>
+                <c:pt idx="25">
+                  <c:v>82.535</c:v>
+                </c:pt>
+                <c:pt idx="26">
+                  <c:v>82.188</c:v>
+                </c:pt>
+                <c:pt idx="27">
+                  <c:v>82.251</c:v>
+                </c:pt>
+                <c:pt idx="28">
+                  <c:v>81.888</c:v>
+                </c:pt>
+                <c:pt idx="29">
+                  <c:v>81.678</c:v>
+                </c:pt>
+                <c:pt idx="30">
+                  <c:v>81.541</c:v>
+                </c:pt>
+                <c:pt idx="31">
+                  <c:v>81.372</c:v>
+                </c:pt>
+                <c:pt idx="32">
+                  <c:v>81.25</c:v>
+                </c:pt>
+                <c:pt idx="33">
+                  <c:v>81.362</c:v>
+                </c:pt>
+                <c:pt idx="34">
+                  <c:v>81.224</c:v>
+                </c:pt>
+                <c:pt idx="35">
+                  <c:v>81.173</c:v>
+                </c:pt>
+                <c:pt idx="36">
+                  <c:v>81.188</c:v>
+                </c:pt>
+                <c:pt idx="37">
+                  <c:v>81.105</c:v>
+                </c:pt>
+                <c:pt idx="38">
+                  <c:v>80.926</c:v>
+                </c:pt>
+                <c:pt idx="39">
+                  <c:v>80.9</c:v>
+                </c:pt>
+                <c:pt idx="40">
+                  <c:v>80.783</c:v>
+                </c:pt>
+                <c:pt idx="41">
+                  <c:v>80.694</c:v>
+                </c:pt>
+                <c:pt idx="42">
+                  <c:v>80.65</c:v>
+                </c:pt>
+                <c:pt idx="43">
+                  <c:v>80.456</c:v>
+                </c:pt>
+                <c:pt idx="44">
+                  <c:v>80.403</c:v>
+                </c:pt>
+                <c:pt idx="45">
+                  <c:v>80.42</c:v>
+                </c:pt>
+                <c:pt idx="46">
+                  <c:v>80.393</c:v>
+                </c:pt>
+                <c:pt idx="47">
+                  <c:v>80.369</c:v>
+                </c:pt>
+                <c:pt idx="48">
+                  <c:v>80.374</c:v>
+                </c:pt>
+                <c:pt idx="49">
+                  <c:v>80.364</c:v>
+                </c:pt>
+                <c:pt idx="50">
+                  <c:v>80.356</c:v>
+                </c:pt>
+                <c:pt idx="51">
+                  <c:v>80.318</c:v>
+                </c:pt>
+                <c:pt idx="52">
+                  <c:v>80.28</c:v>
+                </c:pt>
+                <c:pt idx="53">
+                  <c:v>80.262</c:v>
+                </c:pt>
+                <c:pt idx="54">
+                  <c:v>80.244</c:v>
+                </c:pt>
+                <c:pt idx="55">
+                  <c:v>80.225</c:v>
+                </c:pt>
+                <c:pt idx="56">
+                  <c:v>80.2</c:v>
+                </c:pt>
+                <c:pt idx="57">
+                  <c:v>80.139</c:v>
+                </c:pt>
+                <c:pt idx="58">
+                  <c:v>80.141</c:v>
+                </c:pt>
+                <c:pt idx="59">
+                  <c:v>80.141</c:v>
+                </c:pt>
+                <c:pt idx="60">
+                  <c:v>80.13</c:v>
+                </c:pt>
+                <c:pt idx="61">
+                  <c:v>80.125</c:v>
+                </c:pt>
+                <c:pt idx="62">
+                  <c:v>80.099</c:v>
+                </c:pt>
+                <c:pt idx="63">
+                  <c:v>80.064</c:v>
+                </c:pt>
+                <c:pt idx="64">
+                  <c:v>80.064</c:v>
+                </c:pt>
+                <c:pt idx="65">
+                  <c:v>80.064</c:v>
+                </c:pt>
+                <c:pt idx="66">
+                  <c:v>80.06</c:v>
+                </c:pt>
+                <c:pt idx="67">
+                  <c:v>80.059</c:v>
+                </c:pt>
+                <c:pt idx="68">
+                  <c:v>80.041</c:v>
+                </c:pt>
+                <c:pt idx="69">
+                  <c:v>80.031</c:v>
+                </c:pt>
+                <c:pt idx="70">
+                  <c:v>80.034</c:v>
+                </c:pt>
+                <c:pt idx="71">
+                  <c:v>80.017</c:v>
+                </c:pt>
+                <c:pt idx="72">
+                  <c:v>80.008</c:v>
+                </c:pt>
+                <c:pt idx="73">
+                  <c:v>80.008</c:v>
+                </c:pt>
+                <c:pt idx="74">
+                  <c:v>79.989</c:v>
+                </c:pt>
+                <c:pt idx="75">
+                  <c:v>79.989</c:v>
+                </c:pt>
+                <c:pt idx="76">
+                  <c:v>79.986</c:v>
+                </c:pt>
+                <c:pt idx="77">
+                  <c:v>79.979</c:v>
+                </c:pt>
+                <c:pt idx="78">
+                  <c:v>79.969</c:v>
+                </c:pt>
+                <c:pt idx="79">
+                  <c:v>79.966</c:v>
+                </c:pt>
+                <c:pt idx="80">
+                  <c:v>79.966</c:v>
+                </c:pt>
+                <c:pt idx="81">
+                  <c:v>79.959</c:v>
+                </c:pt>
+                <c:pt idx="82">
+                  <c:v>79.959</c:v>
+                </c:pt>
+                <c:pt idx="83">
+                  <c:v>79.948</c:v>
+                </c:pt>
+                <c:pt idx="84">
+                  <c:v>79.94</c:v>
+                </c:pt>
+                <c:pt idx="85">
+                  <c:v>79.94</c:v>
+                </c:pt>
+                <c:pt idx="86">
+                  <c:v>79.94</c:v>
+                </c:pt>
+                <c:pt idx="87">
+                  <c:v>79.937</c:v>
+                </c:pt>
+                <c:pt idx="88">
+                  <c:v>79.937</c:v>
+                </c:pt>
+                <c:pt idx="89">
+                  <c:v>79.937</c:v>
+                </c:pt>
+                <c:pt idx="90">
+                  <c:v>79.937</c:v>
+                </c:pt>
+                <c:pt idx="91">
+                  <c:v>79.937</c:v>
+                </c:pt>
+                <c:pt idx="92">
+                  <c:v>79.937</c:v>
+                </c:pt>
+                <c:pt idx="93">
+                  <c:v>79.937</c:v>
+                </c:pt>
+                <c:pt idx="94">
+                  <c:v>79.937</c:v>
+                </c:pt>
+                <c:pt idx="95">
+                  <c:v>79.937</c:v>
+                </c:pt>
+                <c:pt idx="96">
+                  <c:v>79.937</c:v>
+                </c:pt>
+                <c:pt idx="97">
+                  <c:v>79.937</c:v>
+                </c:pt>
+                <c:pt idx="98">
+                  <c:v>79.937</c:v>
+                </c:pt>
+                <c:pt idx="99">
+                  <c:v>79.937</c:v>
+                </c:pt>
+                <c:pt idx="100">
+                  <c:v>79.937</c:v>
+                </c:pt>
+              </c:numCache>
+            </c:numRef>
+          </c:val>
+          <c:smooth val="0"/>
+        </c:ser>
+        <c:ser>
+          <c:idx val="1"/>
+          <c:order val="1"/>
+          <c:tx>
+            <c:strRef>
+              <c:f>Sheet1!$C$1</c:f>
+              <c:strCache>
+                <c:ptCount val="1"/>
+                <c:pt idx="0">
+                  <c:v>best so far</c:v>
+                </c:pt>
+              </c:strCache>
+            </c:strRef>
+          </c:tx>
+          <c:spPr>
+            <a:solidFill>
+              <a:srgbClr val="FF7A1A"/>
+            </a:solidFill>
+            <a:ln w="25400" cap="flat">
+              <a:solidFill>
+                <a:srgbClr val="FF7A1A"/>
+              </a:solidFill>
+              <a:prstDash val="solid"/>
+              <a:round/>
+            </a:ln>
+            <a:effectLst/>
+          </c:spPr>
+          <c:invertIfNegative val="0"/>
+          <c:dLbls>
+            <c:numFmt formatCode="#,##0" sourceLinked="0"/>
+            <c:txPr>
+              <a:bodyPr/>
+              <a:lstStyle/>
+              <a:p>
+                <a:pPr>
+                  <a:defRPr b="0" i="0" strike="noStrike" sz="1200" u="none">
+                    <a:solidFill>
+                      <a:srgbClr val="000000"/>
+                    </a:solidFill>
+                    <a:latin typeface="Arial"/>
+                  </a:defRPr>
+                </a:pPr>
+              </a:p>
+            </c:txPr>
+            <c:showLegendKey val="0"/>
+            <c:showVal val="0"/>
+            <c:showCatName val="0"/>
+            <c:showSerName val="0"/>
+            <c:showPercent val="0"/>
+            <c:showBubbleSize val="0"/>
+            <c:showLeaderLines val="0"/>
+          </c:dLbls>
+          <c:marker>
+            <c:symbol val="none"/>
+            <c:size val="6"/>
+            <c:spPr>
+              <a:solidFill>
+                <a:srgbClr val="FF7A1A"/>
+              </a:solidFill>
+              <a:ln w="9525" cap="flat">
+                <a:solidFill>
+                  <a:srgbClr val="FF7A1A"/>
+                </a:solidFill>
+                <a:prstDash val="solid"/>
+                <a:round/>
+              </a:ln>
+              <a:effectLst/>
+            </c:spPr>
+          </c:marker>
+          <c:cat>
+            <c:multiLvlStrRef>
+              <c:f>Sheet1!$A$2:$A$102</c:f>
+              <c:multiLvlStrCache>
+                <c:ptCount val="101"/>
+                <c:lvl>
+                  <c:pt idx="0">
+                    <c:v>0</c:v>
+                  </c:pt>
+                  <c:pt idx="1">
+                    <c:v>300</c:v>
+                  </c:pt>
+                  <c:pt idx="2">
+                    <c:v>600</c:v>
+                  </c:pt>
+                  <c:pt idx="3">
+                    <c:v>900</c:v>
+                  </c:pt>
+                  <c:pt idx="4">
+                    <c:v>1,200</c:v>
+                  </c:pt>
+                  <c:pt idx="5">
+                    <c:v>1,500</c:v>
+                  </c:pt>
+                  <c:pt idx="6">
+                    <c:v>1,800</c:v>
+                  </c:pt>
+                  <c:pt idx="7">
+                    <c:v>2,100</c:v>
+                  </c:pt>
+                  <c:pt idx="8">
+                    <c:v>2,400</c:v>
+                  </c:pt>
+                  <c:pt idx="9">
+                    <c:v>2,700</c:v>
+                  </c:pt>
+                  <c:pt idx="10">
+                    <c:v>3,000</c:v>
+                  </c:pt>
+                  <c:pt idx="11">
+                    <c:v>3,300</c:v>
+                  </c:pt>
+                  <c:pt idx="12">
+                    <c:v>3,600</c:v>
+                  </c:pt>
+                  <c:pt idx="13">
+                    <c:v>3,900</c:v>
+                  </c:pt>
+                  <c:pt idx="14">
+                    <c:v>4,200</c:v>
+                  </c:pt>
+                  <c:pt idx="15">
+                    <c:v>4,500</c:v>
+                  </c:pt>
+                  <c:pt idx="16">
+                    <c:v>4,800</c:v>
+                  </c:pt>
+                  <c:pt idx="17">
+                    <c:v>5,100</c:v>
+                  </c:pt>
+                  <c:pt idx="18">
+                    <c:v>5,400</c:v>
+                  </c:pt>
+                  <c:pt idx="19">
+                    <c:v>5,700</c:v>
+                  </c:pt>
+                  <c:pt idx="20">
+                    <c:v>6,000</c:v>
+                  </c:pt>
+                  <c:pt idx="21">
+                    <c:v>6,300</c:v>
+                  </c:pt>
+                  <c:pt idx="22">
+                    <c:v>6,600</c:v>
+                  </c:pt>
+                  <c:pt idx="23">
+                    <c:v>6,900</c:v>
+                  </c:pt>
+                  <c:pt idx="24">
+                    <c:v>7,200</c:v>
+                  </c:pt>
+                  <c:pt idx="25">
+                    <c:v>7,500</c:v>
+                  </c:pt>
+                  <c:pt idx="26">
+                    <c:v>7,800</c:v>
+                  </c:pt>
+                  <c:pt idx="27">
+                    <c:v>8,100</c:v>
+                  </c:pt>
+                  <c:pt idx="28">
+                    <c:v>8,400</c:v>
+                  </c:pt>
+                  <c:pt idx="29">
+                    <c:v>8,700</c:v>
+                  </c:pt>
+                  <c:pt idx="30">
+                    <c:v>9,000</c:v>
+                  </c:pt>
+                  <c:pt idx="31">
+                    <c:v>9,300</c:v>
+                  </c:pt>
+                  <c:pt idx="32">
+                    <c:v>9,600</c:v>
+                  </c:pt>
+                  <c:pt idx="33">
+                    <c:v>9,900</c:v>
+                  </c:pt>
+                  <c:pt idx="34">
+                    <c:v>10,200</c:v>
+                  </c:pt>
+                  <c:pt idx="35">
+                    <c:v>10,500</c:v>
+                  </c:pt>
+                  <c:pt idx="36">
+                    <c:v>10,800</c:v>
+                  </c:pt>
+                  <c:pt idx="37">
+                    <c:v>11,100</c:v>
+                  </c:pt>
+                  <c:pt idx="38">
+                    <c:v>11,400</c:v>
+                  </c:pt>
+                  <c:pt idx="39">
+                    <c:v>11,700</c:v>
+                  </c:pt>
+                  <c:pt idx="40">
+                    <c:v>12,000</c:v>
+                  </c:pt>
+                  <c:pt idx="41">
+                    <c:v>12,300</c:v>
+                  </c:pt>
+                  <c:pt idx="42">
+                    <c:v>12,600</c:v>
+                  </c:pt>
+                  <c:pt idx="43">
+                    <c:v>12,900</c:v>
+                  </c:pt>
+                  <c:pt idx="44">
+                    <c:v>13,200</c:v>
+                  </c:pt>
+                  <c:pt idx="45">
+                    <c:v>13,500</c:v>
+                  </c:pt>
+                  <c:pt idx="46">
+                    <c:v>13,800</c:v>
+                  </c:pt>
+                  <c:pt idx="47">
+                    <c:v>14,100</c:v>
+                  </c:pt>
+                  <c:pt idx="48">
+                    <c:v>14,400</c:v>
+                  </c:pt>
+                  <c:pt idx="49">
+                    <c:v>14,700</c:v>
+                  </c:pt>
+                  <c:pt idx="50">
+                    <c:v>15,000</c:v>
+                  </c:pt>
+                  <c:pt idx="51">
+                    <c:v>15,300</c:v>
+                  </c:pt>
+                  <c:pt idx="52">
+                    <c:v>15,600</c:v>
+                  </c:pt>
+                  <c:pt idx="53">
+                    <c:v>15,900</c:v>
+                  </c:pt>
+                  <c:pt idx="54">
+                    <c:v>16,200</c:v>
+                  </c:pt>
+                  <c:pt idx="55">
+                    <c:v>16,500</c:v>
+                  </c:pt>
+                  <c:pt idx="56">
+                    <c:v>16,800</c:v>
+                  </c:pt>
+                  <c:pt idx="57">
+                    <c:v>17,100</c:v>
+                  </c:pt>
+                  <c:pt idx="58">
+                    <c:v>17,400</c:v>
+                  </c:pt>
+                  <c:pt idx="59">
+                    <c:v>17,700</c:v>
+                  </c:pt>
+                  <c:pt idx="60">
+                    <c:v>18,000</c:v>
+                  </c:pt>
+                  <c:pt idx="61">
+                    <c:v>18,300</c:v>
+                  </c:pt>
+                  <c:pt idx="62">
+                    <c:v>18,600</c:v>
+                  </c:pt>
+                  <c:pt idx="63">
+                    <c:v>18,900</c:v>
+                  </c:pt>
+                  <c:pt idx="64">
+                    <c:v>19,200</c:v>
+                  </c:pt>
+                  <c:pt idx="65">
+                    <c:v>19,500</c:v>
+                  </c:pt>
+                  <c:pt idx="66">
+                    <c:v>19,800</c:v>
+                  </c:pt>
+                  <c:pt idx="67">
+                    <c:v>20,100</c:v>
+                  </c:pt>
+                  <c:pt idx="68">
+                    <c:v>20,400</c:v>
+                  </c:pt>
+                  <c:pt idx="69">
+                    <c:v>20,700</c:v>
+                  </c:pt>
+                  <c:pt idx="70">
+                    <c:v>21,000</c:v>
+                  </c:pt>
+                  <c:pt idx="71">
+                    <c:v>21,300</c:v>
+                  </c:pt>
+                  <c:pt idx="72">
+                    <c:v>21,600</c:v>
+                  </c:pt>
+                  <c:pt idx="73">
+                    <c:v>21,900</c:v>
+                  </c:pt>
+                  <c:pt idx="74">
+                    <c:v>22,200</c:v>
+                  </c:pt>
+                  <c:pt idx="75">
+                    <c:v>22,500</c:v>
+                  </c:pt>
+                  <c:pt idx="76">
+                    <c:v>22,800</c:v>
+                  </c:pt>
+                  <c:pt idx="77">
+                    <c:v>23,100</c:v>
+                  </c:pt>
+                  <c:pt idx="78">
+                    <c:v>23,400</c:v>
+                  </c:pt>
+                  <c:pt idx="79">
+                    <c:v>23,700</c:v>
+                  </c:pt>
+                  <c:pt idx="80">
+                    <c:v>24,000</c:v>
+                  </c:pt>
+                  <c:pt idx="81">
+                    <c:v>24,300</c:v>
+                  </c:pt>
+                  <c:pt idx="82">
+                    <c:v>24,600</c:v>
+                  </c:pt>
+                  <c:pt idx="83">
+                    <c:v>24,900</c:v>
+                  </c:pt>
+                  <c:pt idx="84">
+                    <c:v>25,200</c:v>
+                  </c:pt>
+                  <c:pt idx="85">
+                    <c:v>25,500</c:v>
+                  </c:pt>
+                  <c:pt idx="86">
+                    <c:v>25,800</c:v>
+                  </c:pt>
+                  <c:pt idx="87">
+                    <c:v>26,100</c:v>
+                  </c:pt>
+                  <c:pt idx="88">
+                    <c:v>26,400</c:v>
+                  </c:pt>
+                  <c:pt idx="89">
+                    <c:v>26,700</c:v>
+                  </c:pt>
+                  <c:pt idx="90">
+                    <c:v>27,000</c:v>
+                  </c:pt>
+                  <c:pt idx="91">
+                    <c:v>27,300</c:v>
+                  </c:pt>
+                  <c:pt idx="92">
+                    <c:v>27,600</c:v>
+                  </c:pt>
+                  <c:pt idx="93">
+                    <c:v>27,900</c:v>
+                  </c:pt>
+                  <c:pt idx="94">
+                    <c:v>28,200</c:v>
+                  </c:pt>
+                  <c:pt idx="95">
+                    <c:v>28,500</c:v>
+                  </c:pt>
+                  <c:pt idx="96">
+                    <c:v>28,800</c:v>
+                  </c:pt>
+                  <c:pt idx="97">
+                    <c:v>29,100</c:v>
+                  </c:pt>
+                  <c:pt idx="98">
+                    <c:v>29,400</c:v>
+                  </c:pt>
+                  <c:pt idx="99">
+                    <c:v>29,700</c:v>
+                  </c:pt>
+                  <c:pt idx="100">
+                    <c:v>30,000</c:v>
+                  </c:pt>
+                </c:lvl>
+              </c:multiLvlStrCache>
+            </c:multiLvlStrRef>
+          </c:cat>
+          <c:val>
+            <c:numRef>
+              <c:f>Sheet1!$C$2:$C$102</c:f>
+              <c:numCache>
+                <c:formatCode>General</c:formatCode>
+                <c:ptCount val="101"/>
+                <c:pt idx="0">
+                  <c:v>92.518</c:v>
+                </c:pt>
+                <c:pt idx="1">
+                  <c:v>90.494</c:v>
+                </c:pt>
+                <c:pt idx="2">
+                  <c:v>90.494</c:v>
+                </c:pt>
+                <c:pt idx="3">
+                  <c:v>90.494</c:v>
+                </c:pt>
+                <c:pt idx="4">
+                  <c:v>89.37</c:v>
+                </c:pt>
+                <c:pt idx="5">
+                  <c:v>89.37</c:v>
+                </c:pt>
+                <c:pt idx="6">
+                  <c:v>88.408</c:v>
+                </c:pt>
+                <c:pt idx="7">
+                  <c:v>87.784</c:v>
+                </c:pt>
+                <c:pt idx="8">
+                  <c:v>87.784</c:v>
+                </c:pt>
+                <c:pt idx="9">
+                  <c:v>87.784</c:v>
+                </c:pt>
+                <c:pt idx="10">
+                  <c:v>87.574</c:v>
+                </c:pt>
+                <c:pt idx="11">
+                  <c:v>87.22</c:v>
+                </c:pt>
+                <c:pt idx="12">
+                  <c:v>86.815</c:v>
+                </c:pt>
+                <c:pt idx="13">
+                  <c:v>86.603</c:v>
+                </c:pt>
+                <c:pt idx="14">
+                  <c:v>86.603</c:v>
+                </c:pt>
+                <c:pt idx="15">
+                  <c:v>86.603</c:v>
+                </c:pt>
+                <c:pt idx="16">
+                  <c:v>85.567</c:v>
+                </c:pt>
+                <c:pt idx="17">
+                  <c:v>85.154</c:v>
+                </c:pt>
+                <c:pt idx="18">
+                  <c:v>84.591</c:v>
+                </c:pt>
+                <c:pt idx="19">
+                  <c:v>84.273</c:v>
+                </c:pt>
+                <c:pt idx="20">
+                  <c:v>83.981</c:v>
+                </c:pt>
+                <c:pt idx="21">
+                  <c:v>83.337</c:v>
+                </c:pt>
+                <c:pt idx="22">
+                  <c:v>83.136</c:v>
+                </c:pt>
+                <c:pt idx="23">
+                  <c:v>82.869</c:v>
+                </c:pt>
+                <c:pt idx="24">
+                  <c:v>82.606</c:v>
+                </c:pt>
+                <c:pt idx="25">
+                  <c:v>82.47</c:v>
+                </c:pt>
+                <c:pt idx="26">
+                  <c:v>82.188</c:v>
+                </c:pt>
+                <c:pt idx="27">
+                  <c:v>82.13</c:v>
+                </c:pt>
+                <c:pt idx="28">
+                  <c:v>81.888</c:v>
+                </c:pt>
+                <c:pt idx="29">
+                  <c:v>81.678</c:v>
+                </c:pt>
+                <c:pt idx="30">
+                  <c:v>81.541</c:v>
+                </c:pt>
+                <c:pt idx="31">
+                  <c:v>81.372</c:v>
+                </c:pt>
+                <c:pt idx="32">
+                  <c:v>81.22</c:v>
+                </c:pt>
+                <c:pt idx="33">
+                  <c:v>81.22</c:v>
+                </c:pt>
+                <c:pt idx="34">
+                  <c:v>81.215</c:v>
+                </c:pt>
+                <c:pt idx="35">
+                  <c:v>81.164</c:v>
+                </c:pt>
+                <c:pt idx="36">
+                  <c:v>81.164</c:v>
+                </c:pt>
+                <c:pt idx="37">
+                  <c:v>81.088</c:v>
+                </c:pt>
+                <c:pt idx="38">
+                  <c:v>80.901</c:v>
+                </c:pt>
+                <c:pt idx="39">
+                  <c:v>80.9</c:v>
+                </c:pt>
+                <c:pt idx="40">
+                  <c:v>80.783</c:v>
+                </c:pt>
+                <c:pt idx="41">
+                  <c:v>80.682</c:v>
+                </c:pt>
+                <c:pt idx="42">
+                  <c:v>80.65</c:v>
+                </c:pt>
+                <c:pt idx="43">
+                  <c:v>80.456</c:v>
+                </c:pt>
+                <c:pt idx="44">
+                  <c:v>80.403</c:v>
+                </c:pt>
+                <c:pt idx="45">
+                  <c:v>80.403</c:v>
+                </c:pt>
+                <c:pt idx="46">
+                  <c:v>80.393</c:v>
+                </c:pt>
+                <c:pt idx="47">
+                  <c:v>80.357</c:v>
+                </c:pt>
+                <c:pt idx="48">
+                  <c:v>80.357</c:v>
+                </c:pt>
+                <c:pt idx="49">
+                  <c:v>80.357</c:v>
+                </c:pt>
+                <c:pt idx="50">
+                  <c:v>80.356</c:v>
+                </c:pt>
+                <c:pt idx="51">
+                  <c:v>80.304</c:v>
+                </c:pt>
+                <c:pt idx="52">
+                  <c:v>80.28</c:v>
+                </c:pt>
+                <c:pt idx="53">
+                  <c:v>80.252</c:v>
+                </c:pt>
+                <c:pt idx="54">
+                  <c:v>80.244</c:v>
+                </c:pt>
+                <c:pt idx="55">
+                  <c:v>80.225</c:v>
+                </c:pt>
+                <c:pt idx="56">
+                  <c:v>80.2</c:v>
+                </c:pt>
+                <c:pt idx="57">
+                  <c:v>80.139</c:v>
+                </c:pt>
+                <c:pt idx="58">
+                  <c:v>80.139</c:v>
+                </c:pt>
+                <c:pt idx="59">
+                  <c:v>80.139</c:v>
+                </c:pt>
+                <c:pt idx="60">
+                  <c:v>80.13</c:v>
+                </c:pt>
+                <c:pt idx="61">
+                  <c:v>80.125</c:v>
+                </c:pt>
+                <c:pt idx="62">
+                  <c:v>80.096</c:v>
+                </c:pt>
+                <c:pt idx="63">
+                  <c:v>80.064</c:v>
+                </c:pt>
+                <c:pt idx="64">
+                  <c:v>80.064</c:v>
+                </c:pt>
+                <c:pt idx="65">
+                  <c:v>80.064</c:v>
+                </c:pt>
+                <c:pt idx="66">
+                  <c:v>80.06</c:v>
+                </c:pt>
+                <c:pt idx="67">
+                  <c:v>80.059</c:v>
+                </c:pt>
+                <c:pt idx="68">
+                  <c:v>80.041</c:v>
+                </c:pt>
+                <c:pt idx="69">
+                  <c:v>80.031</c:v>
+                </c:pt>
+                <c:pt idx="70">
+                  <c:v>80.029</c:v>
+                </c:pt>
+                <c:pt idx="71">
+                  <c:v>80.017</c:v>
+                </c:pt>
+                <c:pt idx="72">
+                  <c:v>80.008</c:v>
+                </c:pt>
+                <c:pt idx="73">
+                  <c:v>80.008</c:v>
+                </c:pt>
+                <c:pt idx="74">
+                  <c:v>79.989</c:v>
+                </c:pt>
+                <c:pt idx="75">
+                  <c:v>79.989</c:v>
+                </c:pt>
+                <c:pt idx="76">
+                  <c:v>79.986</c:v>
+                </c:pt>
+                <c:pt idx="77">
+                  <c:v>79.979</c:v>
+                </c:pt>
+                <c:pt idx="78">
+                  <c:v>79.969</c:v>
+                </c:pt>
+                <c:pt idx="79">
+                  <c:v>79.966</c:v>
+                </c:pt>
+                <c:pt idx="80">
+                  <c:v>79.966</c:v>
+                </c:pt>
+                <c:pt idx="81">
+                  <c:v>79.959</c:v>
+                </c:pt>
+                <c:pt idx="82">
+                  <c:v>79.959</c:v>
+                </c:pt>
+                <c:pt idx="83">
+                  <c:v>79.948</c:v>
+                </c:pt>
+                <c:pt idx="84">
+                  <c:v>79.94</c:v>
+                </c:pt>
+                <c:pt idx="85">
+                  <c:v>79.94</c:v>
+                </c:pt>
+                <c:pt idx="86">
+                  <c:v>79.94</c:v>
+                </c:pt>
+                <c:pt idx="87">
+                  <c:v>79.937</c:v>
+                </c:pt>
+                <c:pt idx="88">
+                  <c:v>79.937</c:v>
+                </c:pt>
+                <c:pt idx="89">
+                  <c:v>79.937</c:v>
+                </c:pt>
+                <c:pt idx="90">
+                  <c:v>79.937</c:v>
+                </c:pt>
+                <c:pt idx="91">
+                  <c:v>79.937</c:v>
+                </c:pt>
+                <c:pt idx="92">
+                  <c:v>79.937</c:v>
+                </c:pt>
+                <c:pt idx="93">
+                  <c:v>79.937</c:v>
+                </c:pt>
+                <c:pt idx="94">
+                  <c:v>79.937</c:v>
+                </c:pt>
+                <c:pt idx="95">
+                  <c:v>79.937</c:v>
+                </c:pt>
+                <c:pt idx="96">
+                  <c:v>79.937</c:v>
+                </c:pt>
+                <c:pt idx="97">
+                  <c:v>79.937</c:v>
+                </c:pt>
+                <c:pt idx="98">
+                  <c:v>79.937</c:v>
+                </c:pt>
+                <c:pt idx="99">
+                  <c:v>79.937</c:v>
+                </c:pt>
+                <c:pt idx="100">
+                  <c:v>79.937</c:v>
+                </c:pt>
+              </c:numCache>
+            </c:numRef>
+          </c:val>
+          <c:smooth val="0"/>
+        </c:ser>
+        <c:dLbls>
+          <c:numFmt formatCode="#,##0" sourceLinked="0"/>
+          <c:txPr>
+            <a:bodyPr/>
+            <a:lstStyle/>
+            <a:p>
+              <a:pPr>
+                <a:defRPr b="0" i="0" strike="noStrike" sz="1200" u="none">
+                  <a:solidFill>
+                    <a:srgbClr val="000000"/>
+                  </a:solidFill>
+                  <a:latin typeface="Arial"/>
+                </a:defRPr>
+              </a:pPr>
+            </a:p>
+          </c:txPr>
+          <c:showLegendKey val="0"/>
+          <c:showVal val="0"/>
+          <c:showCatName val="0"/>
+          <c:showSerName val="0"/>
+          <c:showPercent val="0"/>
+          <c:showBubbleSize val="0"/>
+          <c:showLeaderLines val="0"/>
+        </c:dLbls>
+        <c:marker val="1"/>
+        <c:axId val="2094734554"/>
+        <c:axId val="2094734552"/>
+        <c:axId val="2094734556"/>
+      </c:lineChart>
+      <c:catAx>
+        <c:axId val="2094734554"/>
+        <c:scaling>
+          <c:orientation val="minMax"/>
+        </c:scaling>
+        <c:delete val="0"/>
+        <c:axPos val="b"/>
+        <c:title>
+          <c:tx>
+            <c:rich>
+              <a:bodyPr/>
+              <a:lstStyle/>
+              <a:p>
+                <a:pPr>
+                  <a:defRPr sz="1100" b="0" i="0" u="none" strike="noStrike">
+                    <a:solidFill>
+                      <a:srgbClr val="8A97AD"/>
+                    </a:solidFill>
+                    <a:latin typeface="+mn-lt"/>
+                  </a:defRPr>
+                </a:pPr>
+                <a:r>
+                  <a:rPr sz="1100" b="0" i="0" u="none" strike="noStrike">
+                    <a:solidFill>
+                      <a:srgbClr val="8A97AD"/>
+                    </a:solidFill>
+                    <a:latin typeface="+mn-lt"/>
+                  </a:rPr>
+                  <a:t>iteration</a:t>
+                </a:r>
+              </a:p>
+            </c:rich>
+          </c:tx>
+          <c:layout/>
+          <c:overlay val="0"/>
+        </c:title>
+        <c:numFmt formatCode="General" sourceLinked="1"/>
+        <c:majorTickMark val="out"/>
+        <c:minorTickMark val="none"/>
+        <c:tickLblPos val="low"/>
+        <c:spPr>
+          <a:ln w="12700" cap="flat">
+            <a:solidFill>
+              <a:srgbClr val="888888"/>
+            </a:solidFill>
+            <a:prstDash val="solid"/>
+            <a:round/>
+          </a:ln>
+        </c:spPr>
+        <c:txPr>
+          <a:bodyPr/>
+          <a:lstStyle/>
+          <a:p>
+            <a:pPr>
+              <a:defRPr sz="1100" b="0" i="0" u="none" strike="noStrike">
+                <a:solidFill>
+                  <a:srgbClr val="8A97AD"/>
+                </a:solidFill>
+                <a:latin typeface="+mn-lt"/>
+              </a:defRPr>
+            </a:pPr>
+            <a:endParaRPr lang="en-US"/>
+          </a:p>
+        </c:txPr>
+        <c:crossAx val="2094734552"/>
+        <c:crosses val="autoZero"/>
+        <c:auto val="1"/>
+        <c:lblAlgn val="ctr"/>
+        <c:noMultiLvlLbl val="1"/>
+        <c:tickLblSkip val="16"/>
+      </c:catAx>
+      <c:valAx>
+        <c:axId val="2094734552"/>
+        <c:scaling>
+          <c:orientation val="minMax"/>
+        </c:scaling>
+        <c:delete val="0"/>
+        <c:axPos val="l"/>
+        <c:majorGridlines>
+          <c:spPr>
+            <a:ln w="6350" cap="flat">
+              <a:solidFill>
+                <a:srgbClr val="1A2233"/>
+              </a:solidFill>
+              <a:prstDash val="solid"/>
+              <a:round/>
+            </a:ln>
+          </c:spPr>
+        </c:majorGridlines>
+        <c:title>
+          <c:tx>
+            <c:rich>
+              <a:bodyPr/>
+              <a:lstStyle/>
+              <a:p>
+                <a:pPr>
+                  <a:defRPr sz="1100" b="0" i="0" u="none" strike="noStrike">
+                    <a:solidFill>
+                      <a:srgbClr val="8A97AD"/>
+                    </a:solidFill>
+                    <a:latin typeface="+mn-lt"/>
+                  </a:defRPr>
+                </a:pPr>
+                <a:r>
+                  <a:rPr sz="1100" b="0" i="0" u="none" strike="noStrike">
+                    <a:solidFill>
+                      <a:srgbClr val="8A97AD"/>
+                    </a:solidFill>
+                    <a:latin typeface="+mn-lt"/>
+                  </a:rPr>
+                  <a:t>train km</a:t>
+                </a:r>
+              </a:p>
+            </c:rich>
+          </c:tx>
+          <c:layout/>
+          <c:overlay val="0"/>
+        </c:title>
+        <c:numFmt formatCode="General" sourceLinked="0"/>
+        <c:majorTickMark val="out"/>
+        <c:minorTickMark val="none"/>
+        <c:tickLblPos val="nextTo"/>
+        <c:spPr>
+          <a:ln w="12700" cap="flat">
+            <a:solidFill>
+              <a:srgbClr val="888888"/>
+            </a:solidFill>
+            <a:prstDash val="solid"/>
+            <a:round/>
+          </a:ln>
+        </c:spPr>
+        <c:txPr>
+          <a:bodyPr/>
+          <a:lstStyle/>
+          <a:p>
+            <a:pPr>
+              <a:defRPr sz="1100" b="0" i="0" u="none" strike="noStrike">
+                <a:solidFill>
+                  <a:srgbClr val="8A97AD"/>
+                </a:solidFill>
+                <a:latin typeface="+mn-lt"/>
+              </a:defRPr>
+            </a:pPr>
+            <a:endParaRPr lang="en-US"/>
+          </a:p>
+        </c:txPr>
+        <c:crossAx val="2094734554"/>
+        <c:crosses val="autoZero"/>
+        <c:crossBetween val="between"/>
+      </c:valAx>
+      <c:spPr>
+        <a:solidFill>
+          <a:srgbClr val="0B0F17"/>
+        </a:solidFill>
+        <a:ln>
+          <a:noFill/>
+        </a:ln>
+        <a:effectLst/>
+      </c:spPr>
+    </c:plotArea>
+    <c:legend>
+      <c:legendPos val="b"/>
+      <c:overlay val="0"/>
+      <c:txPr>
+        <a:bodyPr/>
+        <a:lstStyle/>
+        <a:p>
+          <a:pPr>
+            <a:defRPr sz="1200">
+              <a:solidFill>
+                <a:srgbClr val="8A97AD"/>
+              </a:solidFill>
+              <a:latin typeface="+mn-lt"/>
+              <a:cs typeface="+mn-lt"/>
+            </a:defRPr>
+          </a:pPr>
+          <a:endParaRPr lang="en-US"/>
+        </a:p>
+      </c:txPr>
+    </c:legend>
+    <c:plotVisOnly val="1"/>
+    <c:dispBlanksAs val="span"/>
+  </c:chart>
+  <c:spPr>
+    <a:noFill/>
+    <a:ln>
+      <a:noFill/>
+    </a:ln>
+    <a:effectLst/>
+  </c:spPr>
+  <c:externalData r:id="rId1">
+    <c:autoUpdate val="0"/>
+  </c:externalData>
+</c:chartSpace>
 </file>
 
 <file path=ppt/notesMasters/notesMaster1.xml><?xml version="1.0" encoding="utf-8"?>
@@ -550,7 +2206,7 @@
           <a:p>
             <a:r>
               <a:rPr lang="en-US" dirty="0"/>
-              <a:t>Hook line: same orders, two layouts, and the ghost is our old warehouse. Ghostwalk is a browser 3D twin of a picking floor driven by real November 2011 orders from UCI Online Retail II. The rest of the deck backs up one claim: the walking we save is measured on orders the layout never saw.</a:t>
+              <a:t>Hook line: same orders, two layouts. The ghost walks the baseline the brief told us to beat, the solid picker walks the layout our optimiser found. Ghostwalk is a browser 3D twin of a picking floor driven by real November 2011 orders from UCI Online Retail II. The rest of the deck backs up one claim: the walking we save is measured on orders the layout never saw.</a:t>
             </a:r>
             <a:endParaRPr lang="en-US" dirty="0"/>
           </a:p>
@@ -1254,7 +2910,7 @@
           <a:p>
             <a:r>
               <a:rPr lang="en-US" dirty="0"/>
-              <a:t>The game loop. Replay one invoice in 3D. Slot: press Baseline, then make your own swaps. Race your layout against the ghost of the one you started from. Anneal: watch the optimiser play. Evidence: the numbers behind it all. The three must-haves of PS 4.2 are on the bottom line. Heatmap and leaderboard are the stretch goals we built.</a:t>
+              <a:t>The game loop. Replay one invoice in 3D. Slot: press Baseline, then make your own swaps. Race: the Baseline ghost against the SA layout, or against your own. Anneal: watch the optimiser play. Evidence: the numbers behind it all. The three must-haves of PS 4.2 are on the bottom line. Heatmap and leaderboard are the stretch goals we built.</a:t>
             </a:r>
             <a:endParaRPr lang="en-US" dirty="0"/>
           </a:p>
@@ -1430,7 +3086,7 @@
           <a:p>
             <a:r>
               <a:rPr lang="en-US" dirty="0"/>
-              <a:t>One simulator everywhere. The engine is plain TypeScript with no DOM. In the browser it runs in a Web Worker so the 3D stays at 60 fps. The scene only plays back paths the simulator produced. The same files run in Node for npm run eval, which writes the results this deck and the README quote, plus the shipped SA layout.</a:t>
+              <a:t>One simulator everywhere. The engine is plain TypeScript with no DOM. In the browser it runs in a Web Worker, so the 3D keeps animating while layouts are scored. The scene only plays back paths the simulator produced. The same files run in Node for npm run eval, which writes the results this deck and the README quote, plus the shipped SA layout.</a:t>
             </a:r>
             <a:endParaRPr lang="en-US" dirty="0"/>
           </a:p>
@@ -1518,7 +3174,7 @@
           <a:p>
             <a:r>
               <a:rPr lang="en-US" dirty="0"/>
-              <a:t>Read the headline as the held-out gain versus Baseline, the layout the problem statement told us to beat. Original and Random are there so nobody can say we picked a weak starting point. SA is reported over several seeds in eval/results.md, so the spread is visible.</a:t>
+              <a:t>Read the headline as the held-out gain versus Baseline, the layout the problem statement told us to beat. Original and Random are there so nobody can say we picked a weak starting point. SA is reported over five seeds in eval/results.md, so the spread is visible. Why Baseline barely beats catalogue order: most of the top co-picked pairs are product families with neighbouring StockCodes, so catalogue order keeps them close by accident, while Baseline ranks products one at a time and scatters them. The annealer scores whole orders and puts them back together.</a:t>
             </a:r>
             <a:endParaRPr lang="en-US" dirty="0"/>
           </a:p>
@@ -2321,7 +3977,7 @@
                 <a:ea typeface="Calibri" pitchFamily="34" charset="-122"/>
                 <a:cs typeface="Calibri" pitchFamily="34" charset="-120"/>
               </a:rPr>
-              <a:t>A 3D digital twin of a picking floor, driven by one real month of orders. Re-slot the cartons, race the ghost of your old layout, and beat the optimiser, with every gain measured on held-out orders.</a:t>
+              <a:t>A 3D digital twin of a picking floor, driven by one real month of orders. A ghost picker walks the fast-movers baseline, a solid picker walks our optimised layout or yours, and every gain is measured on held-out orders.</a:t>
             </a:r>
             <a:endParaRPr lang="en-US" sz="1800" dirty="0"/>
           </a:p>
@@ -7857,7 +9513,7 @@
                 <a:ea typeface="Calibri" pitchFamily="34" charset="-122"/>
                 <a:cs typeface="Calibri" pitchFamily="34" charset="-120"/>
               </a:rPr>
-              <a:t>dp[mask][j] is the shortest walk from the dock through exactly the stops in mask, ending at j. That is O(2ⁿ·n²): about 250k steps at n = 11, under a millisecond. The share of metres routed exactly is reported.</a:t>
+              <a:t>dp[mask][j] is the shortest walk from the dock through exactly the stops in mask, ending at j. That is O(2ⁿ·n²): about 250k steps at n = 11, solved once per stop set and cached. The share of metres routed exactly is reported.</a:t>
             </a:r>
             <a:endParaRPr lang="en-US" sz="1500" dirty="0"/>
           </a:p>
@@ -8143,43 +9799,39 @@
           </a:p>
         </p:txBody>
       </p:sp>
-      <p:sp>
-        <p:nvSpPr>
-          <p:cNvPr id="3" name="pending-race.png"/>
-          <p:cNvSpPr/>
-          <p:nvPr/>
-        </p:nvSpPr>
+      <p:pic>
+        <p:nvPicPr>
+          <p:cNvPr id="3" name="shot-race" descr="Race: ghost = Baseline, solid = the SA layout or yours, over the same held-out orders">    </p:cNvPr>
+          <p:cNvPicPr>
+            <a:picLocks noChangeAspect="1"/>
+          </p:cNvPicPr>
+          <p:nvPr/>
+        </p:nvPicPr>
+        <p:blipFill>
+          <a:blip r:embed="rId1"/>
+          <a:srcRect l="0" r="0" t="0" b="0"/>
+          <a:stretch/>
+        </p:blipFill>
         <p:spPr>
           <a:xfrm>
             <a:off x="548640" y="1463040"/>
             <a:ext cx="3454298" cy="1943043"/>
           </a:xfrm>
-          <a:prstGeom prst="roundRect">
-            <a:avLst>
-              <a:gd name="adj" fmla="val 4706"/>
-            </a:avLst>
-          </a:prstGeom>
-          <a:solidFill>
-            <a:schemeClr val="accent5"/>
-          </a:solidFill>
-          <a:ln w="12700">
-            <a:solidFill>
-              <a:schemeClr val="accent6"/>
-            </a:solidFill>
-            <a:prstDash val="dash"/>
-          </a:ln>
-        </p:spPr>
-      </p:sp>
-      <p:sp>
-        <p:nvSpPr>
-          <p:cNvPr id="4" name="Text 2"/>
+          <a:prstGeom prst="rect">
+            <a:avLst/>
+          </a:prstGeom>
+        </p:spPr>
+      </p:pic>
+      <p:sp>
+        <p:nvSpPr>
+          <p:cNvPr id="4" name="Text 1"/>
           <p:cNvSpPr txBox="1"/>
           <p:nvPr/>
         </p:nvSpPr>
         <p:spPr>
           <a:xfrm>
-            <a:off x="822960" y="1463040"/>
-            <a:ext cx="2905658" cy="1943043"/>
+            <a:off x="548640" y="3543243"/>
+            <a:ext cx="3454298" cy="777240"/>
           </a:xfrm>
           <a:prstGeom prst="rect">
             <a:avLst/>
@@ -8188,135 +9840,53 @@
           <a:ln/>
         </p:spPr>
         <p:txBody>
-          <a:bodyPr wrap="square" lIns="0" tIns="0" rIns="0" bIns="0" rtlCol="0" anchor="ctr"/>
-          <a:lstStyle/>
-          <a:p>
-            <a:pPr algn="ctr" indent="0" marL="0">
+          <a:bodyPr wrap="square" lIns="0" tIns="0" rIns="0" bIns="0" rtlCol="0" anchor="t"/>
+          <a:lstStyle/>
+          <a:p>
+            <a:pPr indent="0" marL="0">
               <a:buNone/>
             </a:pPr>
             <a:r>
-              <a:rPr lang="en-US" sz="1400" i="1" dirty="0">
-                <a:solidFill>
-                  <a:schemeClr val="bg2"/>
+              <a:rPr lang="en-US" sz="1400" dirty="0">
+                <a:solidFill>
+                  <a:schemeClr val="bg1"/>
                 </a:solidFill>
                 <a:latin typeface="Calibri" pitchFamily="34" charset="0"/>
                 <a:ea typeface="Calibri" pitchFamily="34" charset="-122"/>
                 <a:cs typeface="Calibri" pitchFamily="34" charset="-120"/>
               </a:rPr>
-              <a:t>Pending: race.png</a:t>
+              <a:t>Race: ghost = Baseline, solid = the SA layout or yours, over the same held-out orders</a:t>
             </a:r>
             <a:endParaRPr lang="en-US" sz="1400" dirty="0"/>
           </a:p>
         </p:txBody>
       </p:sp>
-      <p:sp>
-        <p:nvSpPr>
-          <p:cNvPr id="5" name="Text 3"/>
-          <p:cNvSpPr txBox="1"/>
-          <p:nvPr/>
-        </p:nvSpPr>
-        <p:spPr>
-          <a:xfrm>
-            <a:off x="548640" y="3543243"/>
-            <a:ext cx="3454298" cy="777240"/>
-          </a:xfrm>
-          <a:prstGeom prst="rect">
-            <a:avLst/>
-          </a:prstGeom>
-          <a:noFill/>
-          <a:ln/>
-        </p:spPr>
-        <p:txBody>
-          <a:bodyPr wrap="square" lIns="0" tIns="0" rIns="0" bIns="0" rtlCol="0" anchor="t"/>
-          <a:lstStyle/>
-          <a:p>
-            <a:pPr indent="0" marL="0">
-              <a:buNone/>
-            </a:pPr>
-            <a:r>
-              <a:rPr lang="en-US" sz="1400" dirty="0">
-                <a:solidFill>
-                  <a:schemeClr val="bg1"/>
-                </a:solidFill>
-                <a:latin typeface="Calibri" pitchFamily="34" charset="0"/>
-                <a:ea typeface="Calibri" pitchFamily="34" charset="-122"/>
-                <a:cs typeface="Calibri" pitchFamily="34" charset="-120"/>
-              </a:rPr>
-              <a:t>Race: ghost = the layout you started from, solid = yours, same held-out orders</a:t>
-            </a:r>
-            <a:endParaRPr lang="en-US" sz="1400" dirty="0"/>
-          </a:p>
-        </p:txBody>
-      </p:sp>
-      <p:sp>
-        <p:nvSpPr>
-          <p:cNvPr id="6" name="pending-slot.png"/>
-          <p:cNvSpPr/>
-          <p:nvPr/>
-        </p:nvSpPr>
+      <p:pic>
+        <p:nvPicPr>
+          <p:cNvPr id="5" name="shot-slot" descr="Slot: click a carton, click another to swap, in 3D or on the 2D map; train and held-out re-score">    </p:cNvPr>
+          <p:cNvPicPr>
+            <a:picLocks noChangeAspect="1"/>
+          </p:cNvPicPr>
+          <p:nvPr/>
+        </p:nvPicPr>
+        <p:blipFill>
+          <a:blip r:embed="rId2"/>
+          <a:srcRect l="0" r="0" t="0" b="0"/>
+          <a:stretch/>
+        </p:blipFill>
         <p:spPr>
           <a:xfrm>
             <a:off x="4368698" y="1463040"/>
             <a:ext cx="3454298" cy="1943043"/>
           </a:xfrm>
-          <a:prstGeom prst="roundRect">
-            <a:avLst>
-              <a:gd name="adj" fmla="val 4706"/>
-            </a:avLst>
-          </a:prstGeom>
-          <a:solidFill>
-            <a:schemeClr val="accent5"/>
-          </a:solidFill>
-          <a:ln w="12700">
-            <a:solidFill>
-              <a:schemeClr val="accent6"/>
-            </a:solidFill>
-            <a:prstDash val="dash"/>
-          </a:ln>
-        </p:spPr>
-      </p:sp>
-      <p:sp>
-        <p:nvSpPr>
-          <p:cNvPr id="7" name="Text 5"/>
-          <p:cNvSpPr txBox="1"/>
-          <p:nvPr/>
-        </p:nvSpPr>
-        <p:spPr>
-          <a:xfrm>
-            <a:off x="4643018" y="1463040"/>
-            <a:ext cx="2905658" cy="1943043"/>
-          </a:xfrm>
-          <a:prstGeom prst="rect">
-            <a:avLst/>
-          </a:prstGeom>
-          <a:noFill/>
-          <a:ln/>
-        </p:spPr>
-        <p:txBody>
-          <a:bodyPr wrap="square" lIns="0" tIns="0" rIns="0" bIns="0" rtlCol="0" anchor="ctr"/>
-          <a:lstStyle/>
-          <a:p>
-            <a:pPr algn="ctr" indent="0" marL="0">
-              <a:buNone/>
-            </a:pPr>
-            <a:r>
-              <a:rPr lang="en-US" sz="1400" i="1" dirty="0">
-                <a:solidFill>
-                  <a:schemeClr val="bg2"/>
-                </a:solidFill>
-                <a:latin typeface="Calibri" pitchFamily="34" charset="0"/>
-                <a:ea typeface="Calibri" pitchFamily="34" charset="-122"/>
-                <a:cs typeface="Calibri" pitchFamily="34" charset="-120"/>
-              </a:rPr>
-              <a:t>Pending: slot.png</a:t>
-            </a:r>
-            <a:endParaRPr lang="en-US" sz="1400" dirty="0"/>
-          </a:p>
-        </p:txBody>
-      </p:sp>
-      <p:sp>
-        <p:nvSpPr>
-          <p:cNvPr id="8" name="Text 6"/>
+          <a:prstGeom prst="rect">
+            <a:avLst/>
+          </a:prstGeom>
+        </p:spPr>
+      </p:pic>
+      <p:sp>
+        <p:nvSpPr>
+          <p:cNvPr id="6" name="Text 2"/>
           <p:cNvSpPr txBox="1"/>
           <p:nvPr/>
         </p:nvSpPr>
@@ -8353,75 +9923,32 @@
           </a:p>
         </p:txBody>
       </p:sp>
-      <p:sp>
-        <p:nvSpPr>
-          <p:cNvPr id="9" name="pending-anneal.png"/>
-          <p:cNvSpPr/>
-          <p:nvPr/>
-        </p:nvSpPr>
+      <p:pic>
+        <p:nvPicPr>
+          <p:cNvPr id="7" name="shot-anneal" descr="Anneal: the optimiser runs live in a worker, and cartons fly as swaps are accepted">    </p:cNvPr>
+          <p:cNvPicPr>
+            <a:picLocks noChangeAspect="1"/>
+          </p:cNvPicPr>
+          <p:nvPr/>
+        </p:nvPicPr>
+        <p:blipFill>
+          <a:blip r:embed="rId3"/>
+          <a:srcRect l="0" r="0" t="0" b="0"/>
+          <a:stretch/>
+        </p:blipFill>
         <p:spPr>
           <a:xfrm>
             <a:off x="8188757" y="1463040"/>
             <a:ext cx="3454298" cy="1943043"/>
           </a:xfrm>
-          <a:prstGeom prst="roundRect">
-            <a:avLst>
-              <a:gd name="adj" fmla="val 4706"/>
-            </a:avLst>
-          </a:prstGeom>
-          <a:solidFill>
-            <a:schemeClr val="accent5"/>
-          </a:solidFill>
-          <a:ln w="12700">
-            <a:solidFill>
-              <a:schemeClr val="accent6"/>
-            </a:solidFill>
-            <a:prstDash val="dash"/>
-          </a:ln>
-        </p:spPr>
-      </p:sp>
-      <p:sp>
-        <p:nvSpPr>
-          <p:cNvPr id="10" name="Text 8"/>
-          <p:cNvSpPr txBox="1"/>
-          <p:nvPr/>
-        </p:nvSpPr>
-        <p:spPr>
-          <a:xfrm>
-            <a:off x="8463077" y="1463040"/>
-            <a:ext cx="2905658" cy="1943043"/>
-          </a:xfrm>
-          <a:prstGeom prst="rect">
-            <a:avLst/>
-          </a:prstGeom>
-          <a:noFill/>
-          <a:ln/>
-        </p:spPr>
-        <p:txBody>
-          <a:bodyPr wrap="square" lIns="0" tIns="0" rIns="0" bIns="0" rtlCol="0" anchor="ctr"/>
-          <a:lstStyle/>
-          <a:p>
-            <a:pPr algn="ctr" indent="0" marL="0">
-              <a:buNone/>
-            </a:pPr>
-            <a:r>
-              <a:rPr lang="en-US" sz="1400" i="1" dirty="0">
-                <a:solidFill>
-                  <a:schemeClr val="bg2"/>
-                </a:solidFill>
-                <a:latin typeface="Calibri" pitchFamily="34" charset="0"/>
-                <a:ea typeface="Calibri" pitchFamily="34" charset="-122"/>
-                <a:cs typeface="Calibri" pitchFamily="34" charset="-120"/>
-              </a:rPr>
-              <a:t>Pending: anneal.png</a:t>
-            </a:r>
-            <a:endParaRPr lang="en-US" sz="1400" dirty="0"/>
-          </a:p>
-        </p:txBody>
-      </p:sp>
-      <p:sp>
-        <p:nvSpPr>
-          <p:cNvPr id="11" name="Text 9"/>
+          <a:prstGeom prst="rect">
+            <a:avLst/>
+          </a:prstGeom>
+        </p:spPr>
+      </p:pic>
+      <p:sp>
+        <p:nvSpPr>
+          <p:cNvPr id="8" name="Text 3"/>
           <p:cNvSpPr txBox="1"/>
           <p:nvPr/>
         </p:nvSpPr>
@@ -8460,7 +9987,7 @@
       </p:sp>
       <p:sp>
         <p:nvSpPr>
-          <p:cNvPr id="12" name="mode-Replay"/>
+          <p:cNvPr id="9" name="mode-Replay"/>
           <p:cNvSpPr/>
           <p:nvPr/>
         </p:nvSpPr>
@@ -8487,7 +10014,7 @@
       </p:sp>
       <p:sp>
         <p:nvSpPr>
-          <p:cNvPr id="13" name="Text 11"/>
+          <p:cNvPr id="10" name="Text 5"/>
           <p:cNvSpPr txBox="1"/>
           <p:nvPr/>
         </p:nvSpPr>
@@ -8526,7 +10053,7 @@
       </p:sp>
       <p:sp>
         <p:nvSpPr>
-          <p:cNvPr id="14" name="Shape 12"/>
+          <p:cNvPr id="11" name="Shape 6"/>
           <p:cNvSpPr/>
           <p:nvPr/>
         </p:nvSpPr>
@@ -8550,7 +10077,7 @@
       </p:sp>
       <p:sp>
         <p:nvSpPr>
-          <p:cNvPr id="15" name="mode-Slot"/>
+          <p:cNvPr id="12" name="mode-Slot"/>
           <p:cNvSpPr/>
           <p:nvPr/>
         </p:nvSpPr>
@@ -8577,7 +10104,7 @@
       </p:sp>
       <p:sp>
         <p:nvSpPr>
-          <p:cNvPr id="16" name="Text 14"/>
+          <p:cNvPr id="13" name="Text 8"/>
           <p:cNvSpPr txBox="1"/>
           <p:nvPr/>
         </p:nvSpPr>
@@ -8616,7 +10143,7 @@
       </p:sp>
       <p:sp>
         <p:nvSpPr>
-          <p:cNvPr id="17" name="Shape 15"/>
+          <p:cNvPr id="14" name="Shape 9"/>
           <p:cNvSpPr/>
           <p:nvPr/>
         </p:nvSpPr>
@@ -8640,7 +10167,7 @@
       </p:sp>
       <p:sp>
         <p:nvSpPr>
-          <p:cNvPr id="18" name="mode-Race"/>
+          <p:cNvPr id="15" name="mode-Race"/>
           <p:cNvSpPr/>
           <p:nvPr/>
         </p:nvSpPr>
@@ -8667,7 +10194,7 @@
       </p:sp>
       <p:sp>
         <p:nvSpPr>
-          <p:cNvPr id="19" name="Text 17"/>
+          <p:cNvPr id="16" name="Text 11"/>
           <p:cNvSpPr txBox="1"/>
           <p:nvPr/>
         </p:nvSpPr>
@@ -8706,7 +10233,7 @@
       </p:sp>
       <p:sp>
         <p:nvSpPr>
-          <p:cNvPr id="20" name="Shape 18"/>
+          <p:cNvPr id="17" name="Shape 12"/>
           <p:cNvSpPr/>
           <p:nvPr/>
         </p:nvSpPr>
@@ -8730,7 +10257,7 @@
       </p:sp>
       <p:sp>
         <p:nvSpPr>
-          <p:cNvPr id="21" name="mode-Anneal"/>
+          <p:cNvPr id="18" name="mode-Anneal"/>
           <p:cNvSpPr/>
           <p:nvPr/>
         </p:nvSpPr>
@@ -8757,7 +10284,7 @@
       </p:sp>
       <p:sp>
         <p:nvSpPr>
-          <p:cNvPr id="22" name="Text 20"/>
+          <p:cNvPr id="19" name="Text 14"/>
           <p:cNvSpPr txBox="1"/>
           <p:nvPr/>
         </p:nvSpPr>
@@ -8796,7 +10323,7 @@
       </p:sp>
       <p:sp>
         <p:nvSpPr>
-          <p:cNvPr id="23" name="Shape 21"/>
+          <p:cNvPr id="20" name="Shape 15"/>
           <p:cNvSpPr/>
           <p:nvPr/>
         </p:nvSpPr>
@@ -8820,7 +10347,7 @@
       </p:sp>
       <p:sp>
         <p:nvSpPr>
-          <p:cNvPr id="24" name="mode-Evidence"/>
+          <p:cNvPr id="21" name="mode-Evidence"/>
           <p:cNvSpPr/>
           <p:nvPr/>
         </p:nvSpPr>
@@ -8847,7 +10374,7 @@
       </p:sp>
       <p:sp>
         <p:nvSpPr>
-          <p:cNvPr id="25" name="Text 23"/>
+          <p:cNvPr id="22" name="Text 17"/>
           <p:cNvSpPr txBox="1"/>
           <p:nvPr/>
         </p:nvSpPr>
@@ -8886,7 +10413,7 @@
       </p:sp>
       <p:sp>
         <p:nvSpPr>
-          <p:cNvPr id="26" name="Text 24"/>
+          <p:cNvPr id="23" name="Text 18"/>
           <p:cNvSpPr txBox="1"/>
           <p:nvPr/>
         </p:nvSpPr>
@@ -9649,72 +11176,22 @@
           </a:p>
         </p:txBody>
       </p:sp>
-      <p:sp>
-        <p:nvSpPr>
-          <p:cNvPr id="20" name="pending-convergence curve from web/public/layouts/sa_seed42.json (npm run eval)"/>
-          <p:cNvSpPr/>
-          <p:nvPr/>
-        </p:nvSpPr>
-        <p:spPr>
-          <a:xfrm>
-            <a:off x="5120640" y="1463040"/>
-            <a:ext cx="6522415" cy="4572000"/>
-          </a:xfrm>
-          <a:prstGeom prst="roundRect">
-            <a:avLst>
-              <a:gd name="adj" fmla="val 2000"/>
-            </a:avLst>
-          </a:prstGeom>
-          <a:solidFill>
-            <a:schemeClr val="accent5"/>
-          </a:solidFill>
-          <a:ln w="12700">
-            <a:solidFill>
-              <a:schemeClr val="accent6"/>
-            </a:solidFill>
-            <a:prstDash val="dash"/>
-          </a:ln>
-        </p:spPr>
-      </p:sp>
-      <p:sp>
-        <p:nvSpPr>
-          <p:cNvPr id="21" name="Text 19"/>
-          <p:cNvSpPr txBox="1"/>
-          <p:nvPr/>
-        </p:nvSpPr>
-        <p:spPr>
-          <a:xfrm>
-            <a:off x="5394960" y="1463040"/>
-            <a:ext cx="5973775" cy="4572000"/>
-          </a:xfrm>
-          <a:prstGeom prst="rect">
-            <a:avLst/>
-          </a:prstGeom>
-          <a:noFill/>
-          <a:ln/>
-        </p:spPr>
-        <p:txBody>
-          <a:bodyPr wrap="square" lIns="0" tIns="0" rIns="0" bIns="0" rtlCol="0" anchor="ctr"/>
-          <a:lstStyle/>
-          <a:p>
-            <a:pPr algn="ctr" indent="0" marL="0">
-              <a:buNone/>
-            </a:pPr>
-            <a:r>
-              <a:rPr lang="en-US" sz="1400" i="1" dirty="0">
-                <a:solidFill>
-                  <a:schemeClr val="bg2"/>
-                </a:solidFill>
-                <a:latin typeface="Calibri" pitchFamily="34" charset="0"/>
-                <a:ea typeface="Calibri" pitchFamily="34" charset="-122"/>
-                <a:cs typeface="Calibri" pitchFamily="34" charset="-120"/>
-              </a:rPr>
-              <a:t>Pending: convergence curve from web/public/layouts/sa_seed42.json (npm run eval)</a:t>
-            </a:r>
-            <a:endParaRPr lang="en-US" sz="1400" dirty="0"/>
-          </a:p>
-        </p:txBody>
-      </p:sp>
+      <p:graphicFrame>
+        <p:nvGraphicFramePr>
+          <p:cNvPr id="20" name="Chart 0" descr=""/>
+          <p:cNvGraphicFramePr/>
+          <p:nvPr/>
+        </p:nvGraphicFramePr>
+        <p:xfrm>
+          <a:off x="5120640" y="1371600"/>
+          <a:ext cx="6522415" cy="4846320"/>
+        </p:xfrm>
+        <a:graphic xmlns:a="http://schemas.openxmlformats.org/drawingml/2006/main">
+          <a:graphicData uri="http://schemas.openxmlformats.org/drawingml/2006/chart">
+            <c:chart xmlns:c="http://schemas.openxmlformats.org/drawingml/2006/chart" r:id="rId1"/>
+          </a:graphicData>
+        </a:graphic>
+      </p:graphicFrame>
       <p:sp>
         <p:nvSpPr>
           <p:cNvPr id="25" name="Slide Number Placeholder 0"/>
@@ -11211,28 +12688,28 @@
       </p:sp>
       <p:sp>
         <p:nvSpPr>
-          <p:cNvPr id="3" name="pending-held-out results table from eval/results.md (run npm run eval in web/, then rebuild this deck)"/>
+          <p:cNvPr id="3" name="headline"/>
           <p:cNvSpPr/>
           <p:nvPr/>
         </p:nvSpPr>
         <p:spPr>
           <a:xfrm>
             <a:off x="548640" y="1463040"/>
-            <a:ext cx="11094415" cy="4480560"/>
+            <a:ext cx="3291840" cy="2743200"/>
           </a:xfrm>
           <a:prstGeom prst="roundRect">
             <a:avLst>
-              <a:gd name="adj" fmla="val 2041"/>
+              <a:gd name="adj" fmla="val 4000"/>
             </a:avLst>
           </a:prstGeom>
           <a:solidFill>
             <a:schemeClr val="accent5"/>
           </a:solidFill>
-          <a:ln w="12700">
+          <a:ln w="9525">
             <a:solidFill>
               <a:schemeClr val="accent6"/>
             </a:solidFill>
-            <a:prstDash val="dash"/>
+            <a:prstDash val="solid"/>
           </a:ln>
         </p:spPr>
       </p:sp>
@@ -11244,8 +12721,8 @@
         </p:nvSpPr>
         <p:spPr>
           <a:xfrm>
-            <a:off x="822960" y="1463040"/>
-            <a:ext cx="10545775" cy="4480560"/>
+            <a:off x="822960" y="1691640"/>
+            <a:ext cx="2743200" cy="1097280"/>
           </a:xfrm>
           <a:prstGeom prst="rect">
             <a:avLst/>
@@ -11254,24 +12731,2672 @@
           <a:ln/>
         </p:spPr>
         <p:txBody>
-          <a:bodyPr wrap="square" lIns="0" tIns="0" rIns="0" bIns="0" rtlCol="0" anchor="ctr"/>
-          <a:lstStyle/>
-          <a:p>
-            <a:pPr algn="ctr" indent="0" marL="0">
+          <a:bodyPr wrap="square" lIns="0" tIns="0" rIns="0" bIns="0" rtlCol="0" anchor="t"/>
+          <a:lstStyle/>
+          <a:p>
+            <a:pPr indent="0" marL="0">
               <a:buNone/>
             </a:pPr>
             <a:r>
-              <a:rPr lang="en-US" sz="1400" i="1" dirty="0">
-                <a:solidFill>
-                  <a:schemeClr val="bg2"/>
+              <a:rPr lang="en-US" sz="5400" b="1" dirty="0">
+                <a:solidFill>
+                  <a:schemeClr val="accent3"/>
+                </a:solidFill>
+                <a:latin typeface="Arial" pitchFamily="34" charset="0"/>
+                <a:ea typeface="Arial" pitchFamily="34" charset="-122"/>
+                <a:cs typeface="Arial" pitchFamily="34" charset="-120"/>
+              </a:rPr>
+              <a:t>−11.1 %</a:t>
+            </a:r>
+            <a:endParaRPr lang="en-US" sz="5400" dirty="0"/>
+          </a:p>
+        </p:txBody>
+      </p:sp>
+      <p:sp>
+        <p:nvSpPr>
+          <p:cNvPr id="5" name="Text 3"/>
+          <p:cNvSpPr txBox="1"/>
+          <p:nvPr/>
+        </p:nvSpPr>
+        <p:spPr>
+          <a:xfrm>
+            <a:off x="822960" y="2834640"/>
+            <a:ext cx="2743200" cy="457200"/>
+          </a:xfrm>
+          <a:prstGeom prst="rect">
+            <a:avLst/>
+          </a:prstGeom>
+          <a:noFill/>
+          <a:ln/>
+        </p:spPr>
+        <p:txBody>
+          <a:bodyPr wrap="square" lIns="0" tIns="0" rIns="0" bIns="0" rtlCol="0" anchor="t"/>
+          <a:lstStyle/>
+          <a:p>
+            <a:pPr indent="0" marL="0">
+              <a:buNone/>
+            </a:pPr>
+            <a:r>
+              <a:rPr lang="en-US" sz="1500" b="1" dirty="0">
+                <a:solidFill>
+                  <a:schemeClr val="bg1"/>
                 </a:solidFill>
                 <a:latin typeface="Calibri" pitchFamily="34" charset="0"/>
                 <a:ea typeface="Calibri" pitchFamily="34" charset="-122"/>
                 <a:cs typeface="Calibri" pitchFamily="34" charset="-120"/>
               </a:rPr>
-              <a:t>Pending: held-out results table from eval/results.md (run npm run eval in web/, then rebuild this deck)</a:t>
+              <a:t>SA vs Baseline, Held-out km</a:t>
+            </a:r>
+            <a:endParaRPr lang="en-US" sz="1500" dirty="0"/>
+          </a:p>
+        </p:txBody>
+      </p:sp>
+      <p:sp>
+        <p:nvSpPr>
+          <p:cNvPr id="6" name="Text 4"/>
+          <p:cNvSpPr txBox="1"/>
+          <p:nvPr/>
+        </p:nvSpPr>
+        <p:spPr>
+          <a:xfrm>
+            <a:off x="822960" y="3291840"/>
+            <a:ext cx="2743200" cy="731520"/>
+          </a:xfrm>
+          <a:prstGeom prst="rect">
+            <a:avLst/>
+          </a:prstGeom>
+          <a:noFill/>
+          <a:ln/>
+        </p:spPr>
+        <p:txBody>
+          <a:bodyPr wrap="square" lIns="0" tIns="0" rIns="0" bIns="0" rtlCol="0" anchor="t"/>
+          <a:lstStyle/>
+          <a:p>
+            <a:pPr indent="0" marL="0">
+              <a:buNone/>
+            </a:pPr>
+            <a:r>
+              <a:rPr lang="en-US" sz="1300" dirty="0">
+                <a:solidFill>
+                  <a:schemeClr val="bg2"/>
+                </a:solidFill>
+                <a:latin typeface="Calibri" pitchFamily="34" charset="0"/>
+                <a:ea typeface="Calibri" pitchFamily="34" charset="-122"/>
+                <a:cs typeface="Calibri" pitchFamily="34" charset="-120"/>
+              </a:rPr>
+              <a:t>walking distance on orders neither layout was built from</a:t>
+            </a:r>
+            <a:endParaRPr lang="en-US" sz="1300" dirty="0"/>
+          </a:p>
+        </p:txBody>
+      </p:sp>
+      <p:graphicFrame>
+        <p:nvGraphicFramePr>
+          <p:cNvPr id="10" name="Table 0"/>
+          <p:cNvGraphicFramePr>
+            <a:graphicFrameLocks noGrp="1"/>
+          </p:cNvGraphicFramePr>
+          <p:nvPr>
+            <p:extLst>
+              <p:ext uri="{D42A27DB-BD31-4B8C-83A1-F6EECF244321}">
+                <p14:modId xmlns:p14="http://schemas.microsoft.com/office/powerpoint/2010/main" val="1579011935"/>
+              </p:ext>
+            </p:extLst>
+          </p:nvPr>
+        </p:nvGraphicFramePr>
+        <p:xfrm>
+          <a:off x="4206240" y="1463040"/>
+          <a:ext cx="7436815" cy="914400"/>
+        </p:xfrm>
+        <a:graphic>
+          <a:graphicData uri="http://schemas.openxmlformats.org/drawingml/2006/table">
+            <a:tbl>
+              <a:tblPr/>
+              <a:tblGrid>
+                <a:gridCol w="2231045"/>
+                <a:gridCol w="867628"/>
+                <a:gridCol w="867628"/>
+                <a:gridCol w="867628"/>
+                <a:gridCol w="867628"/>
+                <a:gridCol w="867628"/>
+                <a:gridCol w="867628"/>
+              </a:tblGrid>
+              <a:tr h="365760">
+                <a:tc>
+                  <a:txBody>
+                    <a:bodyPr/>
+                    <a:lstStyle/>
+                    <a:p>
+                      <a:pPr algn="l" indent="0" marL="0">
+                        <a:buNone/>
+                      </a:pPr>
+                      <a:r>
+                        <a:rPr lang="en-US" sz="1300" b="1" dirty="0">
+                          <a:solidFill>
+                            <a:srgbClr val="8A97AD"/>
+                          </a:solidFill>
+                          <a:latin typeface="Calibri" pitchFamily="34" charset="0"/>
+                          <a:ea typeface="Calibri" pitchFamily="34" charset="-122"/>
+                          <a:cs typeface="Calibri" pitchFamily="34" charset="-120"/>
+                        </a:rPr>
+                        <a:t>Layout</a:t>
+                      </a:r>
+                      <a:endParaRPr lang="en-US" sz="1300" dirty="0">
+                        <a:latin typeface="Calibri" charset="0"/>
+                        <a:ea typeface="Calibri" charset="0"/>
+                        <a:cs typeface="Calibri" charset="0"/>
+                      </a:endParaRPr>
+                    </a:p>
+                  </a:txBody>
+                  <a:tcPr marL="73152" marR="73152" marT="36576" marB="36576">
+                    <a:lnL w="6350" cap="flat" cmpd="sng" algn="ctr">
+                      <a:solidFill>
+                        <a:srgbClr val="1A2233"/>
+                      </a:solidFill>
+                      <a:prstDash val="solid"/>
+                      <a:round/>
+                      <a:headEnd type="none" w="med" len="med"/>
+                      <a:tailEnd type="none" w="med" len="med"/>
+                    </a:lnL>
+                    <a:lnR w="6350" cap="flat" cmpd="sng" algn="ctr">
+                      <a:solidFill>
+                        <a:srgbClr val="1A2233"/>
+                      </a:solidFill>
+                      <a:prstDash val="solid"/>
+                      <a:round/>
+                      <a:headEnd type="none" w="med" len="med"/>
+                      <a:tailEnd type="none" w="med" len="med"/>
+                    </a:lnR>
+                    <a:lnT w="6350" cap="flat" cmpd="sng" algn="ctr">
+                      <a:solidFill>
+                        <a:srgbClr val="1A2233"/>
+                      </a:solidFill>
+                      <a:prstDash val="solid"/>
+                      <a:round/>
+                      <a:headEnd type="none" w="med" len="med"/>
+                      <a:tailEnd type="none" w="med" len="med"/>
+                    </a:lnT>
+                    <a:lnB w="6350" cap="flat" cmpd="sng" algn="ctr">
+                      <a:solidFill>
+                        <a:srgbClr val="1A2233"/>
+                      </a:solidFill>
+                      <a:prstDash val="solid"/>
+                      <a:round/>
+                      <a:headEnd type="none" w="med" len="med"/>
+                      <a:tailEnd type="none" w="med" len="med"/>
+                    </a:lnB>
+                    <a:solidFill>
+                      <a:srgbClr val="121826"/>
+                    </a:solidFill>
+                  </a:tcPr>
+                </a:tc>
+                <a:tc>
+                  <a:txBody>
+                    <a:bodyPr/>
+                    <a:lstStyle/>
+                    <a:p>
+                      <a:pPr algn="r" indent="0" marL="0">
+                        <a:buNone/>
+                      </a:pPr>
+                      <a:r>
+                        <a:rPr lang="en-US" sz="1300" b="1" dirty="0">
+                          <a:solidFill>
+                            <a:srgbClr val="8A97AD"/>
+                          </a:solidFill>
+                          <a:latin typeface="Calibri" pitchFamily="34" charset="0"/>
+                          <a:ea typeface="Calibri" pitchFamily="34" charset="-122"/>
+                          <a:cs typeface="Calibri" pitchFamily="34" charset="-120"/>
+                        </a:rPr>
+                        <a:t>Train km</a:t>
+                      </a:r>
+                      <a:endParaRPr lang="en-US" sz="1300" dirty="0">
+                        <a:latin typeface="Calibri" charset="0"/>
+                        <a:ea typeface="Calibri" charset="0"/>
+                        <a:cs typeface="Calibri" charset="0"/>
+                      </a:endParaRPr>
+                    </a:p>
+                  </a:txBody>
+                  <a:tcPr marL="73152" marR="73152" marT="36576" marB="36576">
+                    <a:lnL w="6350" cap="flat" cmpd="sng" algn="ctr">
+                      <a:solidFill>
+                        <a:srgbClr val="1A2233"/>
+                      </a:solidFill>
+                      <a:prstDash val="solid"/>
+                      <a:round/>
+                      <a:headEnd type="none" w="med" len="med"/>
+                      <a:tailEnd type="none" w="med" len="med"/>
+                    </a:lnL>
+                    <a:lnR w="6350" cap="flat" cmpd="sng" algn="ctr">
+                      <a:solidFill>
+                        <a:srgbClr val="1A2233"/>
+                      </a:solidFill>
+                      <a:prstDash val="solid"/>
+                      <a:round/>
+                      <a:headEnd type="none" w="med" len="med"/>
+                      <a:tailEnd type="none" w="med" len="med"/>
+                    </a:lnR>
+                    <a:lnT w="6350" cap="flat" cmpd="sng" algn="ctr">
+                      <a:solidFill>
+                        <a:srgbClr val="1A2233"/>
+                      </a:solidFill>
+                      <a:prstDash val="solid"/>
+                      <a:round/>
+                      <a:headEnd type="none" w="med" len="med"/>
+                      <a:tailEnd type="none" w="med" len="med"/>
+                    </a:lnT>
+                    <a:lnB w="6350" cap="flat" cmpd="sng" algn="ctr">
+                      <a:solidFill>
+                        <a:srgbClr val="1A2233"/>
+                      </a:solidFill>
+                      <a:prstDash val="solid"/>
+                      <a:round/>
+                      <a:headEnd type="none" w="med" len="med"/>
+                      <a:tailEnd type="none" w="med" len="med"/>
+                    </a:lnB>
+                    <a:solidFill>
+                      <a:srgbClr val="121826"/>
+                    </a:solidFill>
+                  </a:tcPr>
+                </a:tc>
+                <a:tc>
+                  <a:txBody>
+                    <a:bodyPr/>
+                    <a:lstStyle/>
+                    <a:p>
+                      <a:pPr algn="r" indent="0" marL="0">
+                        <a:buNone/>
+                      </a:pPr>
+                      <a:r>
+                        <a:rPr lang="en-US" sz="1300" b="1" dirty="0">
+                          <a:solidFill>
+                            <a:srgbClr val="8A97AD"/>
+                          </a:solidFill>
+                          <a:latin typeface="Calibri" pitchFamily="34" charset="0"/>
+                          <a:ea typeface="Calibri" pitchFamily="34" charset="-122"/>
+                          <a:cs typeface="Calibri" pitchFamily="34" charset="-120"/>
+                        </a:rPr>
+                        <a:t>Held-out km</a:t>
+                      </a:r>
+                      <a:endParaRPr lang="en-US" sz="1300" dirty="0">
+                        <a:latin typeface="Calibri" charset="0"/>
+                        <a:ea typeface="Calibri" charset="0"/>
+                        <a:cs typeface="Calibri" charset="0"/>
+                      </a:endParaRPr>
+                    </a:p>
+                  </a:txBody>
+                  <a:tcPr marL="73152" marR="73152" marT="36576" marB="36576">
+                    <a:lnL w="6350" cap="flat" cmpd="sng" algn="ctr">
+                      <a:solidFill>
+                        <a:srgbClr val="1A2233"/>
+                      </a:solidFill>
+                      <a:prstDash val="solid"/>
+                      <a:round/>
+                      <a:headEnd type="none" w="med" len="med"/>
+                      <a:tailEnd type="none" w="med" len="med"/>
+                    </a:lnL>
+                    <a:lnR w="6350" cap="flat" cmpd="sng" algn="ctr">
+                      <a:solidFill>
+                        <a:srgbClr val="1A2233"/>
+                      </a:solidFill>
+                      <a:prstDash val="solid"/>
+                      <a:round/>
+                      <a:headEnd type="none" w="med" len="med"/>
+                      <a:tailEnd type="none" w="med" len="med"/>
+                    </a:lnR>
+                    <a:lnT w="6350" cap="flat" cmpd="sng" algn="ctr">
+                      <a:solidFill>
+                        <a:srgbClr val="1A2233"/>
+                      </a:solidFill>
+                      <a:prstDash val="solid"/>
+                      <a:round/>
+                      <a:headEnd type="none" w="med" len="med"/>
+                      <a:tailEnd type="none" w="med" len="med"/>
+                    </a:lnT>
+                    <a:lnB w="6350" cap="flat" cmpd="sng" algn="ctr">
+                      <a:solidFill>
+                        <a:srgbClr val="1A2233"/>
+                      </a:solidFill>
+                      <a:prstDash val="solid"/>
+                      <a:round/>
+                      <a:headEnd type="none" w="med" len="med"/>
+                      <a:tailEnd type="none" w="med" len="med"/>
+                    </a:lnB>
+                    <a:solidFill>
+                      <a:srgbClr val="121826"/>
+                    </a:solidFill>
+                  </a:tcPr>
+                </a:tc>
+                <a:tc>
+                  <a:txBody>
+                    <a:bodyPr/>
+                    <a:lstStyle/>
+                    <a:p>
+                      <a:pPr algn="r" indent="0" marL="0">
+                        <a:buNone/>
+                      </a:pPr>
+                      <a:r>
+                        <a:rPr lang="en-US" sz="1300" b="1" dirty="0">
+                          <a:solidFill>
+                            <a:srgbClr val="8A97AD"/>
+                          </a:solidFill>
+                          <a:latin typeface="Calibri" pitchFamily="34" charset="0"/>
+                          <a:ea typeface="Calibri" pitchFamily="34" charset="-122"/>
+                          <a:cs typeface="Calibri" pitchFamily="34" charset="-120"/>
+                        </a:rPr>
+                        <a:t>Train s/order</a:t>
+                      </a:r>
+                      <a:endParaRPr lang="en-US" sz="1300" dirty="0">
+                        <a:latin typeface="Calibri" charset="0"/>
+                        <a:ea typeface="Calibri" charset="0"/>
+                        <a:cs typeface="Calibri" charset="0"/>
+                      </a:endParaRPr>
+                    </a:p>
+                  </a:txBody>
+                  <a:tcPr marL="73152" marR="73152" marT="36576" marB="36576">
+                    <a:lnL w="6350" cap="flat" cmpd="sng" algn="ctr">
+                      <a:solidFill>
+                        <a:srgbClr val="1A2233"/>
+                      </a:solidFill>
+                      <a:prstDash val="solid"/>
+                      <a:round/>
+                      <a:headEnd type="none" w="med" len="med"/>
+                      <a:tailEnd type="none" w="med" len="med"/>
+                    </a:lnL>
+                    <a:lnR w="6350" cap="flat" cmpd="sng" algn="ctr">
+                      <a:solidFill>
+                        <a:srgbClr val="1A2233"/>
+                      </a:solidFill>
+                      <a:prstDash val="solid"/>
+                      <a:round/>
+                      <a:headEnd type="none" w="med" len="med"/>
+                      <a:tailEnd type="none" w="med" len="med"/>
+                    </a:lnR>
+                    <a:lnT w="6350" cap="flat" cmpd="sng" algn="ctr">
+                      <a:solidFill>
+                        <a:srgbClr val="1A2233"/>
+                      </a:solidFill>
+                      <a:prstDash val="solid"/>
+                      <a:round/>
+                      <a:headEnd type="none" w="med" len="med"/>
+                      <a:tailEnd type="none" w="med" len="med"/>
+                    </a:lnT>
+                    <a:lnB w="6350" cap="flat" cmpd="sng" algn="ctr">
+                      <a:solidFill>
+                        <a:srgbClr val="1A2233"/>
+                      </a:solidFill>
+                      <a:prstDash val="solid"/>
+                      <a:round/>
+                      <a:headEnd type="none" w="med" len="med"/>
+                      <a:tailEnd type="none" w="med" len="med"/>
+                    </a:lnB>
+                    <a:solidFill>
+                      <a:srgbClr val="121826"/>
+                    </a:solidFill>
+                  </a:tcPr>
+                </a:tc>
+                <a:tc>
+                  <a:txBody>
+                    <a:bodyPr/>
+                    <a:lstStyle/>
+                    <a:p>
+                      <a:pPr algn="r" indent="0" marL="0">
+                        <a:buNone/>
+                      </a:pPr>
+                      <a:r>
+                        <a:rPr lang="en-US" sz="1300" b="1" dirty="0">
+                          <a:solidFill>
+                            <a:srgbClr val="8A97AD"/>
+                          </a:solidFill>
+                          <a:latin typeface="Calibri" pitchFamily="34" charset="0"/>
+                          <a:ea typeface="Calibri" pitchFamily="34" charset="-122"/>
+                          <a:cs typeface="Calibri" pitchFamily="34" charset="-120"/>
+                        </a:rPr>
+                        <a:t>Held-out s/order</a:t>
+                      </a:r>
+                      <a:endParaRPr lang="en-US" sz="1300" dirty="0">
+                        <a:latin typeface="Calibri" charset="0"/>
+                        <a:ea typeface="Calibri" charset="0"/>
+                        <a:cs typeface="Calibri" charset="0"/>
+                      </a:endParaRPr>
+                    </a:p>
+                  </a:txBody>
+                  <a:tcPr marL="73152" marR="73152" marT="36576" marB="36576">
+                    <a:lnL w="6350" cap="flat" cmpd="sng" algn="ctr">
+                      <a:solidFill>
+                        <a:srgbClr val="1A2233"/>
+                      </a:solidFill>
+                      <a:prstDash val="solid"/>
+                      <a:round/>
+                      <a:headEnd type="none" w="med" len="med"/>
+                      <a:tailEnd type="none" w="med" len="med"/>
+                    </a:lnL>
+                    <a:lnR w="6350" cap="flat" cmpd="sng" algn="ctr">
+                      <a:solidFill>
+                        <a:srgbClr val="1A2233"/>
+                      </a:solidFill>
+                      <a:prstDash val="solid"/>
+                      <a:round/>
+                      <a:headEnd type="none" w="med" len="med"/>
+                      <a:tailEnd type="none" w="med" len="med"/>
+                    </a:lnR>
+                    <a:lnT w="6350" cap="flat" cmpd="sng" algn="ctr">
+                      <a:solidFill>
+                        <a:srgbClr val="1A2233"/>
+                      </a:solidFill>
+                      <a:prstDash val="solid"/>
+                      <a:round/>
+                      <a:headEnd type="none" w="med" len="med"/>
+                      <a:tailEnd type="none" w="med" len="med"/>
+                    </a:lnT>
+                    <a:lnB w="6350" cap="flat" cmpd="sng" algn="ctr">
+                      <a:solidFill>
+                        <a:srgbClr val="1A2233"/>
+                      </a:solidFill>
+                      <a:prstDash val="solid"/>
+                      <a:round/>
+                      <a:headEnd type="none" w="med" len="med"/>
+                      <a:tailEnd type="none" w="med" len="med"/>
+                    </a:lnB>
+                    <a:solidFill>
+                      <a:srgbClr val="121826"/>
+                    </a:solidFill>
+                  </a:tcPr>
+                </a:tc>
+                <a:tc>
+                  <a:txBody>
+                    <a:bodyPr/>
+                    <a:lstStyle/>
+                    <a:p>
+                      <a:pPr algn="r" indent="0" marL="0">
+                        <a:buNone/>
+                      </a:pPr>
+                      <a:r>
+                        <a:rPr lang="en-US" sz="1300" b="1" dirty="0">
+                          <a:solidFill>
+                            <a:srgbClr val="8A97AD"/>
+                          </a:solidFill>
+                          <a:latin typeface="Calibri" pitchFamily="34" charset="0"/>
+                          <a:ea typeface="Calibri" pitchFamily="34" charset="-122"/>
+                          <a:cs typeface="Calibri" pitchFamily="34" charset="-120"/>
+                        </a:rPr>
+                        <a:t>Δ held-out vs Baseline</a:t>
+                      </a:r>
+                      <a:endParaRPr lang="en-US" sz="1300" dirty="0">
+                        <a:latin typeface="Calibri" charset="0"/>
+                        <a:ea typeface="Calibri" charset="0"/>
+                        <a:cs typeface="Calibri" charset="0"/>
+                      </a:endParaRPr>
+                    </a:p>
+                  </a:txBody>
+                  <a:tcPr marL="73152" marR="73152" marT="36576" marB="36576">
+                    <a:lnL w="6350" cap="flat" cmpd="sng" algn="ctr">
+                      <a:solidFill>
+                        <a:srgbClr val="1A2233"/>
+                      </a:solidFill>
+                      <a:prstDash val="solid"/>
+                      <a:round/>
+                      <a:headEnd type="none" w="med" len="med"/>
+                      <a:tailEnd type="none" w="med" len="med"/>
+                    </a:lnL>
+                    <a:lnR w="6350" cap="flat" cmpd="sng" algn="ctr">
+                      <a:solidFill>
+                        <a:srgbClr val="1A2233"/>
+                      </a:solidFill>
+                      <a:prstDash val="solid"/>
+                      <a:round/>
+                      <a:headEnd type="none" w="med" len="med"/>
+                      <a:tailEnd type="none" w="med" len="med"/>
+                    </a:lnR>
+                    <a:lnT w="6350" cap="flat" cmpd="sng" algn="ctr">
+                      <a:solidFill>
+                        <a:srgbClr val="1A2233"/>
+                      </a:solidFill>
+                      <a:prstDash val="solid"/>
+                      <a:round/>
+                      <a:headEnd type="none" w="med" len="med"/>
+                      <a:tailEnd type="none" w="med" len="med"/>
+                    </a:lnT>
+                    <a:lnB w="6350" cap="flat" cmpd="sng" algn="ctr">
+                      <a:solidFill>
+                        <a:srgbClr val="1A2233"/>
+                      </a:solidFill>
+                      <a:prstDash val="solid"/>
+                      <a:round/>
+                      <a:headEnd type="none" w="med" len="med"/>
+                      <a:tailEnd type="none" w="med" len="med"/>
+                    </a:lnB>
+                    <a:solidFill>
+                      <a:srgbClr val="121826"/>
+                    </a:solidFill>
+                  </a:tcPr>
+                </a:tc>
+                <a:tc>
+                  <a:txBody>
+                    <a:bodyPr/>
+                    <a:lstStyle/>
+                    <a:p>
+                      <a:pPr algn="r" indent="0" marL="0">
+                        <a:buNone/>
+                      </a:pPr>
+                      <a:r>
+                        <a:rPr lang="en-US" sz="1300" b="1" dirty="0">
+                          <a:solidFill>
+                            <a:srgbClr val="8A97AD"/>
+                          </a:solidFill>
+                          <a:latin typeface="Calibri" pitchFamily="34" charset="0"/>
+                          <a:ea typeface="Calibri" pitchFamily="34" charset="-122"/>
+                          <a:cs typeface="Calibri" pitchFamily="34" charset="-120"/>
+                        </a:rPr>
+                        <a:t>Δ train vs Baseline</a:t>
+                      </a:r>
+                      <a:endParaRPr lang="en-US" sz="1300" dirty="0">
+                        <a:latin typeface="Calibri" charset="0"/>
+                        <a:ea typeface="Calibri" charset="0"/>
+                        <a:cs typeface="Calibri" charset="0"/>
+                      </a:endParaRPr>
+                    </a:p>
+                  </a:txBody>
+                  <a:tcPr marL="73152" marR="73152" marT="36576" marB="36576">
+                    <a:lnL w="6350" cap="flat" cmpd="sng" algn="ctr">
+                      <a:solidFill>
+                        <a:srgbClr val="1A2233"/>
+                      </a:solidFill>
+                      <a:prstDash val="solid"/>
+                      <a:round/>
+                      <a:headEnd type="none" w="med" len="med"/>
+                      <a:tailEnd type="none" w="med" len="med"/>
+                    </a:lnL>
+                    <a:lnR w="6350" cap="flat" cmpd="sng" algn="ctr">
+                      <a:solidFill>
+                        <a:srgbClr val="1A2233"/>
+                      </a:solidFill>
+                      <a:prstDash val="solid"/>
+                      <a:round/>
+                      <a:headEnd type="none" w="med" len="med"/>
+                      <a:tailEnd type="none" w="med" len="med"/>
+                    </a:lnR>
+                    <a:lnT w="6350" cap="flat" cmpd="sng" algn="ctr">
+                      <a:solidFill>
+                        <a:srgbClr val="1A2233"/>
+                      </a:solidFill>
+                      <a:prstDash val="solid"/>
+                      <a:round/>
+                      <a:headEnd type="none" w="med" len="med"/>
+                      <a:tailEnd type="none" w="med" len="med"/>
+                    </a:lnT>
+                    <a:lnB w="6350" cap="flat" cmpd="sng" algn="ctr">
+                      <a:solidFill>
+                        <a:srgbClr val="1A2233"/>
+                      </a:solidFill>
+                      <a:prstDash val="solid"/>
+                      <a:round/>
+                      <a:headEnd type="none" w="med" len="med"/>
+                      <a:tailEnd type="none" w="med" len="med"/>
+                    </a:lnB>
+                    <a:solidFill>
+                      <a:srgbClr val="121826"/>
+                    </a:solidFill>
+                  </a:tcPr>
+                </a:tc>
+              </a:tr>
+              <a:tr h="365760">
+                <a:tc>
+                  <a:txBody>
+                    <a:bodyPr/>
+                    <a:lstStyle/>
+                    <a:p>
+                      <a:pPr algn="l" indent="0" marL="0">
+                        <a:buNone/>
+                      </a:pPr>
+                      <a:r>
+                        <a:rPr lang="en-US" sz="1300" b="1" dirty="0">
+                          <a:solidFill>
+                            <a:srgbClr val="E6EDF7"/>
+                          </a:solidFill>
+                          <a:latin typeface="Calibri" pitchFamily="34" charset="0"/>
+                          <a:ea typeface="Calibri" pitchFamily="34" charset="-122"/>
+                          <a:cs typeface="Calibri" pitchFamily="34" charset="-120"/>
+                        </a:rPr>
+                        <a:t>Original (catalogue order)</a:t>
+                      </a:r>
+                      <a:endParaRPr lang="en-US" sz="1300" dirty="0">
+                        <a:latin typeface="Calibri" charset="0"/>
+                        <a:ea typeface="Calibri" charset="0"/>
+                        <a:cs typeface="Calibri" charset="0"/>
+                      </a:endParaRPr>
+                    </a:p>
+                  </a:txBody>
+                  <a:tcPr marL="73152" marR="73152" marT="36576" marB="36576">
+                    <a:lnL w="6350" cap="flat" cmpd="sng" algn="ctr">
+                      <a:solidFill>
+                        <a:srgbClr val="1A2233"/>
+                      </a:solidFill>
+                      <a:prstDash val="solid"/>
+                      <a:round/>
+                      <a:headEnd type="none" w="med" len="med"/>
+                      <a:tailEnd type="none" w="med" len="med"/>
+                    </a:lnL>
+                    <a:lnR w="6350" cap="flat" cmpd="sng" algn="ctr">
+                      <a:solidFill>
+                        <a:srgbClr val="1A2233"/>
+                      </a:solidFill>
+                      <a:prstDash val="solid"/>
+                      <a:round/>
+                      <a:headEnd type="none" w="med" len="med"/>
+                      <a:tailEnd type="none" w="med" len="med"/>
+                    </a:lnR>
+                    <a:lnT w="6350" cap="flat" cmpd="sng" algn="ctr">
+                      <a:solidFill>
+                        <a:srgbClr val="1A2233"/>
+                      </a:solidFill>
+                      <a:prstDash val="solid"/>
+                      <a:round/>
+                      <a:headEnd type="none" w="med" len="med"/>
+                      <a:tailEnd type="none" w="med" len="med"/>
+                    </a:lnT>
+                    <a:lnB w="6350" cap="flat" cmpd="sng" algn="ctr">
+                      <a:solidFill>
+                        <a:srgbClr val="1A2233"/>
+                      </a:solidFill>
+                      <a:prstDash val="solid"/>
+                      <a:round/>
+                      <a:headEnd type="none" w="med" len="med"/>
+                      <a:tailEnd type="none" w="med" len="med"/>
+                    </a:lnB>
+                    <a:solidFill>
+                      <a:srgbClr val="0B0F17"/>
+                    </a:solidFill>
+                  </a:tcPr>
+                </a:tc>
+                <a:tc>
+                  <a:txBody>
+                    <a:bodyPr/>
+                    <a:lstStyle/>
+                    <a:p>
+                      <a:pPr algn="r" indent="0" marL="0">
+                        <a:buNone/>
+                      </a:pPr>
+                      <a:r>
+                        <a:rPr lang="en-US" sz="1300" dirty="0">
+                          <a:solidFill>
+                            <a:srgbClr val="E6EDF7"/>
+                          </a:solidFill>
+                          <a:latin typeface="Calibri" pitchFamily="34" charset="0"/>
+                          <a:ea typeface="Calibri" pitchFamily="34" charset="-122"/>
+                          <a:cs typeface="Calibri" pitchFamily="34" charset="-120"/>
+                        </a:rPr>
+                        <a:t>96.18</a:t>
+                      </a:r>
+                      <a:endParaRPr lang="en-US" sz="1300" dirty="0">
+                        <a:latin typeface="Calibri" charset="0"/>
+                        <a:ea typeface="Calibri" charset="0"/>
+                        <a:cs typeface="Calibri" charset="0"/>
+                      </a:endParaRPr>
+                    </a:p>
+                  </a:txBody>
+                  <a:tcPr marL="73152" marR="73152" marT="36576" marB="36576">
+                    <a:lnL w="6350" cap="flat" cmpd="sng" algn="ctr">
+                      <a:solidFill>
+                        <a:srgbClr val="1A2233"/>
+                      </a:solidFill>
+                      <a:prstDash val="solid"/>
+                      <a:round/>
+                      <a:headEnd type="none" w="med" len="med"/>
+                      <a:tailEnd type="none" w="med" len="med"/>
+                    </a:lnL>
+                    <a:lnR w="6350" cap="flat" cmpd="sng" algn="ctr">
+                      <a:solidFill>
+                        <a:srgbClr val="1A2233"/>
+                      </a:solidFill>
+                      <a:prstDash val="solid"/>
+                      <a:round/>
+                      <a:headEnd type="none" w="med" len="med"/>
+                      <a:tailEnd type="none" w="med" len="med"/>
+                    </a:lnR>
+                    <a:lnT w="6350" cap="flat" cmpd="sng" algn="ctr">
+                      <a:solidFill>
+                        <a:srgbClr val="1A2233"/>
+                      </a:solidFill>
+                      <a:prstDash val="solid"/>
+                      <a:round/>
+                      <a:headEnd type="none" w="med" len="med"/>
+                      <a:tailEnd type="none" w="med" len="med"/>
+                    </a:lnT>
+                    <a:lnB w="6350" cap="flat" cmpd="sng" algn="ctr">
+                      <a:solidFill>
+                        <a:srgbClr val="1A2233"/>
+                      </a:solidFill>
+                      <a:prstDash val="solid"/>
+                      <a:round/>
+                      <a:headEnd type="none" w="med" len="med"/>
+                      <a:tailEnd type="none" w="med" len="med"/>
+                    </a:lnB>
+                    <a:solidFill>
+                      <a:srgbClr val="0B0F17"/>
+                    </a:solidFill>
+                  </a:tcPr>
+                </a:tc>
+                <a:tc>
+                  <a:txBody>
+                    <a:bodyPr/>
+                    <a:lstStyle/>
+                    <a:p>
+                      <a:pPr algn="r" indent="0" marL="0">
+                        <a:buNone/>
+                      </a:pPr>
+                      <a:r>
+                        <a:rPr lang="en-US" sz="1300" dirty="0">
+                          <a:solidFill>
+                            <a:srgbClr val="E6EDF7"/>
+                          </a:solidFill>
+                          <a:latin typeface="Calibri" pitchFamily="34" charset="0"/>
+                          <a:ea typeface="Calibri" pitchFamily="34" charset="-122"/>
+                          <a:cs typeface="Calibri" pitchFamily="34" charset="-120"/>
+                        </a:rPr>
+                        <a:t>105.75</a:t>
+                      </a:r>
+                      <a:endParaRPr lang="en-US" sz="1300" dirty="0">
+                        <a:latin typeface="Calibri" charset="0"/>
+                        <a:ea typeface="Calibri" charset="0"/>
+                        <a:cs typeface="Calibri" charset="0"/>
+                      </a:endParaRPr>
+                    </a:p>
+                  </a:txBody>
+                  <a:tcPr marL="73152" marR="73152" marT="36576" marB="36576">
+                    <a:lnL w="6350" cap="flat" cmpd="sng" algn="ctr">
+                      <a:solidFill>
+                        <a:srgbClr val="1A2233"/>
+                      </a:solidFill>
+                      <a:prstDash val="solid"/>
+                      <a:round/>
+                      <a:headEnd type="none" w="med" len="med"/>
+                      <a:tailEnd type="none" w="med" len="med"/>
+                    </a:lnL>
+                    <a:lnR w="6350" cap="flat" cmpd="sng" algn="ctr">
+                      <a:solidFill>
+                        <a:srgbClr val="1A2233"/>
+                      </a:solidFill>
+                      <a:prstDash val="solid"/>
+                      <a:round/>
+                      <a:headEnd type="none" w="med" len="med"/>
+                      <a:tailEnd type="none" w="med" len="med"/>
+                    </a:lnR>
+                    <a:lnT w="6350" cap="flat" cmpd="sng" algn="ctr">
+                      <a:solidFill>
+                        <a:srgbClr val="1A2233"/>
+                      </a:solidFill>
+                      <a:prstDash val="solid"/>
+                      <a:round/>
+                      <a:headEnd type="none" w="med" len="med"/>
+                      <a:tailEnd type="none" w="med" len="med"/>
+                    </a:lnT>
+                    <a:lnB w="6350" cap="flat" cmpd="sng" algn="ctr">
+                      <a:solidFill>
+                        <a:srgbClr val="1A2233"/>
+                      </a:solidFill>
+                      <a:prstDash val="solid"/>
+                      <a:round/>
+                      <a:headEnd type="none" w="med" len="med"/>
+                      <a:tailEnd type="none" w="med" len="med"/>
+                    </a:lnB>
+                    <a:solidFill>
+                      <a:srgbClr val="0B0F17"/>
+                    </a:solidFill>
+                  </a:tcPr>
+                </a:tc>
+                <a:tc>
+                  <a:txBody>
+                    <a:bodyPr/>
+                    <a:lstStyle/>
+                    <a:p>
+                      <a:pPr algn="r" indent="0" marL="0">
+                        <a:buNone/>
+                      </a:pPr>
+                      <a:r>
+                        <a:rPr lang="en-US" sz="1300" dirty="0">
+                          <a:solidFill>
+                            <a:srgbClr val="E6EDF7"/>
+                          </a:solidFill>
+                          <a:latin typeface="Calibri" pitchFamily="34" charset="0"/>
+                          <a:ea typeface="Calibri" pitchFamily="34" charset="-122"/>
+                          <a:cs typeface="Calibri" pitchFamily="34" charset="-120"/>
+                        </a:rPr>
+                        <a:t>127.9</a:t>
+                      </a:r>
+                      <a:endParaRPr lang="en-US" sz="1300" dirty="0">
+                        <a:latin typeface="Calibri" charset="0"/>
+                        <a:ea typeface="Calibri" charset="0"/>
+                        <a:cs typeface="Calibri" charset="0"/>
+                      </a:endParaRPr>
+                    </a:p>
+                  </a:txBody>
+                  <a:tcPr marL="73152" marR="73152" marT="36576" marB="36576">
+                    <a:lnL w="6350" cap="flat" cmpd="sng" algn="ctr">
+                      <a:solidFill>
+                        <a:srgbClr val="1A2233"/>
+                      </a:solidFill>
+                      <a:prstDash val="solid"/>
+                      <a:round/>
+                      <a:headEnd type="none" w="med" len="med"/>
+                      <a:tailEnd type="none" w="med" len="med"/>
+                    </a:lnL>
+                    <a:lnR w="6350" cap="flat" cmpd="sng" algn="ctr">
+                      <a:solidFill>
+                        <a:srgbClr val="1A2233"/>
+                      </a:solidFill>
+                      <a:prstDash val="solid"/>
+                      <a:round/>
+                      <a:headEnd type="none" w="med" len="med"/>
+                      <a:tailEnd type="none" w="med" len="med"/>
+                    </a:lnR>
+                    <a:lnT w="6350" cap="flat" cmpd="sng" algn="ctr">
+                      <a:solidFill>
+                        <a:srgbClr val="1A2233"/>
+                      </a:solidFill>
+                      <a:prstDash val="solid"/>
+                      <a:round/>
+                      <a:headEnd type="none" w="med" len="med"/>
+                      <a:tailEnd type="none" w="med" len="med"/>
+                    </a:lnT>
+                    <a:lnB w="6350" cap="flat" cmpd="sng" algn="ctr">
+                      <a:solidFill>
+                        <a:srgbClr val="1A2233"/>
+                      </a:solidFill>
+                      <a:prstDash val="solid"/>
+                      <a:round/>
+                      <a:headEnd type="none" w="med" len="med"/>
+                      <a:tailEnd type="none" w="med" len="med"/>
+                    </a:lnB>
+                    <a:solidFill>
+                      <a:srgbClr val="0B0F17"/>
+                    </a:solidFill>
+                  </a:tcPr>
+                </a:tc>
+                <a:tc>
+                  <a:txBody>
+                    <a:bodyPr/>
+                    <a:lstStyle/>
+                    <a:p>
+                      <a:pPr algn="r" indent="0" marL="0">
+                        <a:buNone/>
+                      </a:pPr>
+                      <a:r>
+                        <a:rPr lang="en-US" sz="1300" dirty="0">
+                          <a:solidFill>
+                            <a:srgbClr val="E6EDF7"/>
+                          </a:solidFill>
+                          <a:latin typeface="Calibri" pitchFamily="34" charset="0"/>
+                          <a:ea typeface="Calibri" pitchFamily="34" charset="-122"/>
+                          <a:cs typeface="Calibri" pitchFamily="34" charset="-120"/>
+                        </a:rPr>
+                        <a:t>130.0</a:t>
+                      </a:r>
+                      <a:endParaRPr lang="en-US" sz="1300" dirty="0">
+                        <a:latin typeface="Calibri" charset="0"/>
+                        <a:ea typeface="Calibri" charset="0"/>
+                        <a:cs typeface="Calibri" charset="0"/>
+                      </a:endParaRPr>
+                    </a:p>
+                  </a:txBody>
+                  <a:tcPr marL="73152" marR="73152" marT="36576" marB="36576">
+                    <a:lnL w="6350" cap="flat" cmpd="sng" algn="ctr">
+                      <a:solidFill>
+                        <a:srgbClr val="1A2233"/>
+                      </a:solidFill>
+                      <a:prstDash val="solid"/>
+                      <a:round/>
+                      <a:headEnd type="none" w="med" len="med"/>
+                      <a:tailEnd type="none" w="med" len="med"/>
+                    </a:lnL>
+                    <a:lnR w="6350" cap="flat" cmpd="sng" algn="ctr">
+                      <a:solidFill>
+                        <a:srgbClr val="1A2233"/>
+                      </a:solidFill>
+                      <a:prstDash val="solid"/>
+                      <a:round/>
+                      <a:headEnd type="none" w="med" len="med"/>
+                      <a:tailEnd type="none" w="med" len="med"/>
+                    </a:lnR>
+                    <a:lnT w="6350" cap="flat" cmpd="sng" algn="ctr">
+                      <a:solidFill>
+                        <a:srgbClr val="1A2233"/>
+                      </a:solidFill>
+                      <a:prstDash val="solid"/>
+                      <a:round/>
+                      <a:headEnd type="none" w="med" len="med"/>
+                      <a:tailEnd type="none" w="med" len="med"/>
+                    </a:lnT>
+                    <a:lnB w="6350" cap="flat" cmpd="sng" algn="ctr">
+                      <a:solidFill>
+                        <a:srgbClr val="1A2233"/>
+                      </a:solidFill>
+                      <a:prstDash val="solid"/>
+                      <a:round/>
+                      <a:headEnd type="none" w="med" len="med"/>
+                      <a:tailEnd type="none" w="med" len="med"/>
+                    </a:lnB>
+                    <a:solidFill>
+                      <a:srgbClr val="0B0F17"/>
+                    </a:solidFill>
+                  </a:tcPr>
+                </a:tc>
+                <a:tc>
+                  <a:txBody>
+                    <a:bodyPr/>
+                    <a:lstStyle/>
+                    <a:p>
+                      <a:pPr algn="r" indent="0" marL="0">
+                        <a:buNone/>
+                      </a:pPr>
+                      <a:r>
+                        <a:rPr lang="en-US" sz="1300" dirty="0">
+                          <a:solidFill>
+                            <a:srgbClr val="E6EDF7"/>
+                          </a:solidFill>
+                          <a:latin typeface="Calibri" pitchFamily="34" charset="0"/>
+                          <a:ea typeface="Calibri" pitchFamily="34" charset="-122"/>
+                          <a:cs typeface="Calibri" pitchFamily="34" charset="-120"/>
+                        </a:rPr>
+                        <a:t>+4.0%</a:t>
+                      </a:r>
+                      <a:endParaRPr lang="en-US" sz="1300" dirty="0">
+                        <a:latin typeface="Calibri" charset="0"/>
+                        <a:ea typeface="Calibri" charset="0"/>
+                        <a:cs typeface="Calibri" charset="0"/>
+                      </a:endParaRPr>
+                    </a:p>
+                  </a:txBody>
+                  <a:tcPr marL="73152" marR="73152" marT="36576" marB="36576">
+                    <a:lnL w="6350" cap="flat" cmpd="sng" algn="ctr">
+                      <a:solidFill>
+                        <a:srgbClr val="1A2233"/>
+                      </a:solidFill>
+                      <a:prstDash val="solid"/>
+                      <a:round/>
+                      <a:headEnd type="none" w="med" len="med"/>
+                      <a:tailEnd type="none" w="med" len="med"/>
+                    </a:lnL>
+                    <a:lnR w="6350" cap="flat" cmpd="sng" algn="ctr">
+                      <a:solidFill>
+                        <a:srgbClr val="1A2233"/>
+                      </a:solidFill>
+                      <a:prstDash val="solid"/>
+                      <a:round/>
+                      <a:headEnd type="none" w="med" len="med"/>
+                      <a:tailEnd type="none" w="med" len="med"/>
+                    </a:lnR>
+                    <a:lnT w="6350" cap="flat" cmpd="sng" algn="ctr">
+                      <a:solidFill>
+                        <a:srgbClr val="1A2233"/>
+                      </a:solidFill>
+                      <a:prstDash val="solid"/>
+                      <a:round/>
+                      <a:headEnd type="none" w="med" len="med"/>
+                      <a:tailEnd type="none" w="med" len="med"/>
+                    </a:lnT>
+                    <a:lnB w="6350" cap="flat" cmpd="sng" algn="ctr">
+                      <a:solidFill>
+                        <a:srgbClr val="1A2233"/>
+                      </a:solidFill>
+                      <a:prstDash val="solid"/>
+                      <a:round/>
+                      <a:headEnd type="none" w="med" len="med"/>
+                      <a:tailEnd type="none" w="med" len="med"/>
+                    </a:lnB>
+                    <a:solidFill>
+                      <a:srgbClr val="0B0F17"/>
+                    </a:solidFill>
+                  </a:tcPr>
+                </a:tc>
+                <a:tc>
+                  <a:txBody>
+                    <a:bodyPr/>
+                    <a:lstStyle/>
+                    <a:p>
+                      <a:pPr algn="r" indent="0" marL="0">
+                        <a:buNone/>
+                      </a:pPr>
+                      <a:r>
+                        <a:rPr lang="en-US" sz="1300" dirty="0">
+                          <a:solidFill>
+                            <a:srgbClr val="E6EDF7"/>
+                          </a:solidFill>
+                          <a:latin typeface="Calibri" pitchFamily="34" charset="0"/>
+                          <a:ea typeface="Calibri" pitchFamily="34" charset="-122"/>
+                          <a:cs typeface="Calibri" pitchFamily="34" charset="-120"/>
+                        </a:rPr>
+                        <a:t>+4.0%</a:t>
+                      </a:r>
+                      <a:endParaRPr lang="en-US" sz="1300" dirty="0">
+                        <a:latin typeface="Calibri" charset="0"/>
+                        <a:ea typeface="Calibri" charset="0"/>
+                        <a:cs typeface="Calibri" charset="0"/>
+                      </a:endParaRPr>
+                    </a:p>
+                  </a:txBody>
+                  <a:tcPr marL="73152" marR="73152" marT="36576" marB="36576">
+                    <a:lnL w="6350" cap="flat" cmpd="sng" algn="ctr">
+                      <a:solidFill>
+                        <a:srgbClr val="1A2233"/>
+                      </a:solidFill>
+                      <a:prstDash val="solid"/>
+                      <a:round/>
+                      <a:headEnd type="none" w="med" len="med"/>
+                      <a:tailEnd type="none" w="med" len="med"/>
+                    </a:lnL>
+                    <a:lnR w="6350" cap="flat" cmpd="sng" algn="ctr">
+                      <a:solidFill>
+                        <a:srgbClr val="1A2233"/>
+                      </a:solidFill>
+                      <a:prstDash val="solid"/>
+                      <a:round/>
+                      <a:headEnd type="none" w="med" len="med"/>
+                      <a:tailEnd type="none" w="med" len="med"/>
+                    </a:lnR>
+                    <a:lnT w="6350" cap="flat" cmpd="sng" algn="ctr">
+                      <a:solidFill>
+                        <a:srgbClr val="1A2233"/>
+                      </a:solidFill>
+                      <a:prstDash val="solid"/>
+                      <a:round/>
+                      <a:headEnd type="none" w="med" len="med"/>
+                      <a:tailEnd type="none" w="med" len="med"/>
+                    </a:lnT>
+                    <a:lnB w="6350" cap="flat" cmpd="sng" algn="ctr">
+                      <a:solidFill>
+                        <a:srgbClr val="1A2233"/>
+                      </a:solidFill>
+                      <a:prstDash val="solid"/>
+                      <a:round/>
+                      <a:headEnd type="none" w="med" len="med"/>
+                      <a:tailEnd type="none" w="med" len="med"/>
+                    </a:lnB>
+                    <a:solidFill>
+                      <a:srgbClr val="0B0F17"/>
+                    </a:solidFill>
+                  </a:tcPr>
+                </a:tc>
+              </a:tr>
+              <a:tr h="365760">
+                <a:tc>
+                  <a:txBody>
+                    <a:bodyPr/>
+                    <a:lstStyle/>
+                    <a:p>
+                      <a:pPr algn="l" indent="0" marL="0">
+                        <a:buNone/>
+                      </a:pPr>
+                      <a:r>
+                        <a:rPr lang="en-US" sz="1300" b="1" dirty="0">
+                          <a:solidFill>
+                            <a:srgbClr val="E6EDF7"/>
+                          </a:solidFill>
+                          <a:latin typeface="Calibri" pitchFamily="34" charset="0"/>
+                          <a:ea typeface="Calibri" pitchFamily="34" charset="-122"/>
+                          <a:cs typeface="Calibri" pitchFamily="34" charset="-120"/>
+                        </a:rPr>
+                        <a:t>Random (seed 42)</a:t>
+                      </a:r>
+                      <a:endParaRPr lang="en-US" sz="1300" dirty="0">
+                        <a:latin typeface="Calibri" charset="0"/>
+                        <a:ea typeface="Calibri" charset="0"/>
+                        <a:cs typeface="Calibri" charset="0"/>
+                      </a:endParaRPr>
+                    </a:p>
+                  </a:txBody>
+                  <a:tcPr marL="73152" marR="73152" marT="36576" marB="36576">
+                    <a:lnL w="6350" cap="flat" cmpd="sng" algn="ctr">
+                      <a:solidFill>
+                        <a:srgbClr val="1A2233"/>
+                      </a:solidFill>
+                      <a:prstDash val="solid"/>
+                      <a:round/>
+                      <a:headEnd type="none" w="med" len="med"/>
+                      <a:tailEnd type="none" w="med" len="med"/>
+                    </a:lnL>
+                    <a:lnR w="6350" cap="flat" cmpd="sng" algn="ctr">
+                      <a:solidFill>
+                        <a:srgbClr val="1A2233"/>
+                      </a:solidFill>
+                      <a:prstDash val="solid"/>
+                      <a:round/>
+                      <a:headEnd type="none" w="med" len="med"/>
+                      <a:tailEnd type="none" w="med" len="med"/>
+                    </a:lnR>
+                    <a:lnT w="6350" cap="flat" cmpd="sng" algn="ctr">
+                      <a:solidFill>
+                        <a:srgbClr val="1A2233"/>
+                      </a:solidFill>
+                      <a:prstDash val="solid"/>
+                      <a:round/>
+                      <a:headEnd type="none" w="med" len="med"/>
+                      <a:tailEnd type="none" w="med" len="med"/>
+                    </a:lnT>
+                    <a:lnB w="6350" cap="flat" cmpd="sng" algn="ctr">
+                      <a:solidFill>
+                        <a:srgbClr val="1A2233"/>
+                      </a:solidFill>
+                      <a:prstDash val="solid"/>
+                      <a:round/>
+                      <a:headEnd type="none" w="med" len="med"/>
+                      <a:tailEnd type="none" w="med" len="med"/>
+                    </a:lnB>
+                    <a:solidFill>
+                      <a:srgbClr val="0B0F17"/>
+                    </a:solidFill>
+                  </a:tcPr>
+                </a:tc>
+                <a:tc>
+                  <a:txBody>
+                    <a:bodyPr/>
+                    <a:lstStyle/>
+                    <a:p>
+                      <a:pPr algn="r" indent="0" marL="0">
+                        <a:buNone/>
+                      </a:pPr>
+                      <a:r>
+                        <a:rPr lang="en-US" sz="1300" dirty="0">
+                          <a:solidFill>
+                            <a:srgbClr val="E6EDF7"/>
+                          </a:solidFill>
+                          <a:latin typeface="Calibri" pitchFamily="34" charset="0"/>
+                          <a:ea typeface="Calibri" pitchFamily="34" charset="-122"/>
+                          <a:cs typeface="Calibri" pitchFamily="34" charset="-120"/>
+                        </a:rPr>
+                        <a:t>99.90</a:t>
+                      </a:r>
+                      <a:endParaRPr lang="en-US" sz="1300" dirty="0">
+                        <a:latin typeface="Calibri" charset="0"/>
+                        <a:ea typeface="Calibri" charset="0"/>
+                        <a:cs typeface="Calibri" charset="0"/>
+                      </a:endParaRPr>
+                    </a:p>
+                  </a:txBody>
+                  <a:tcPr marL="73152" marR="73152" marT="36576" marB="36576">
+                    <a:lnL w="6350" cap="flat" cmpd="sng" algn="ctr">
+                      <a:solidFill>
+                        <a:srgbClr val="1A2233"/>
+                      </a:solidFill>
+                      <a:prstDash val="solid"/>
+                      <a:round/>
+                      <a:headEnd type="none" w="med" len="med"/>
+                      <a:tailEnd type="none" w="med" len="med"/>
+                    </a:lnL>
+                    <a:lnR w="6350" cap="flat" cmpd="sng" algn="ctr">
+                      <a:solidFill>
+                        <a:srgbClr val="1A2233"/>
+                      </a:solidFill>
+                      <a:prstDash val="solid"/>
+                      <a:round/>
+                      <a:headEnd type="none" w="med" len="med"/>
+                      <a:tailEnd type="none" w="med" len="med"/>
+                    </a:lnR>
+                    <a:lnT w="6350" cap="flat" cmpd="sng" algn="ctr">
+                      <a:solidFill>
+                        <a:srgbClr val="1A2233"/>
+                      </a:solidFill>
+                      <a:prstDash val="solid"/>
+                      <a:round/>
+                      <a:headEnd type="none" w="med" len="med"/>
+                      <a:tailEnd type="none" w="med" len="med"/>
+                    </a:lnT>
+                    <a:lnB w="6350" cap="flat" cmpd="sng" algn="ctr">
+                      <a:solidFill>
+                        <a:srgbClr val="1A2233"/>
+                      </a:solidFill>
+                      <a:prstDash val="solid"/>
+                      <a:round/>
+                      <a:headEnd type="none" w="med" len="med"/>
+                      <a:tailEnd type="none" w="med" len="med"/>
+                    </a:lnB>
+                    <a:solidFill>
+                      <a:srgbClr val="0B0F17"/>
+                    </a:solidFill>
+                  </a:tcPr>
+                </a:tc>
+                <a:tc>
+                  <a:txBody>
+                    <a:bodyPr/>
+                    <a:lstStyle/>
+                    <a:p>
+                      <a:pPr algn="r" indent="0" marL="0">
+                        <a:buNone/>
+                      </a:pPr>
+                      <a:r>
+                        <a:rPr lang="en-US" sz="1300" dirty="0">
+                          <a:solidFill>
+                            <a:srgbClr val="E6EDF7"/>
+                          </a:solidFill>
+                          <a:latin typeface="Calibri" pitchFamily="34" charset="0"/>
+                          <a:ea typeface="Calibri" pitchFamily="34" charset="-122"/>
+                          <a:cs typeface="Calibri" pitchFamily="34" charset="-120"/>
+                        </a:rPr>
+                        <a:t>109.11</a:t>
+                      </a:r>
+                      <a:endParaRPr lang="en-US" sz="1300" dirty="0">
+                        <a:latin typeface="Calibri" charset="0"/>
+                        <a:ea typeface="Calibri" charset="0"/>
+                        <a:cs typeface="Calibri" charset="0"/>
+                      </a:endParaRPr>
+                    </a:p>
+                  </a:txBody>
+                  <a:tcPr marL="73152" marR="73152" marT="36576" marB="36576">
+                    <a:lnL w="6350" cap="flat" cmpd="sng" algn="ctr">
+                      <a:solidFill>
+                        <a:srgbClr val="1A2233"/>
+                      </a:solidFill>
+                      <a:prstDash val="solid"/>
+                      <a:round/>
+                      <a:headEnd type="none" w="med" len="med"/>
+                      <a:tailEnd type="none" w="med" len="med"/>
+                    </a:lnL>
+                    <a:lnR w="6350" cap="flat" cmpd="sng" algn="ctr">
+                      <a:solidFill>
+                        <a:srgbClr val="1A2233"/>
+                      </a:solidFill>
+                      <a:prstDash val="solid"/>
+                      <a:round/>
+                      <a:headEnd type="none" w="med" len="med"/>
+                      <a:tailEnd type="none" w="med" len="med"/>
+                    </a:lnR>
+                    <a:lnT w="6350" cap="flat" cmpd="sng" algn="ctr">
+                      <a:solidFill>
+                        <a:srgbClr val="1A2233"/>
+                      </a:solidFill>
+                      <a:prstDash val="solid"/>
+                      <a:round/>
+                      <a:headEnd type="none" w="med" len="med"/>
+                      <a:tailEnd type="none" w="med" len="med"/>
+                    </a:lnT>
+                    <a:lnB w="6350" cap="flat" cmpd="sng" algn="ctr">
+                      <a:solidFill>
+                        <a:srgbClr val="1A2233"/>
+                      </a:solidFill>
+                      <a:prstDash val="solid"/>
+                      <a:round/>
+                      <a:headEnd type="none" w="med" len="med"/>
+                      <a:tailEnd type="none" w="med" len="med"/>
+                    </a:lnB>
+                    <a:solidFill>
+                      <a:srgbClr val="0B0F17"/>
+                    </a:solidFill>
+                  </a:tcPr>
+                </a:tc>
+                <a:tc>
+                  <a:txBody>
+                    <a:bodyPr/>
+                    <a:lstStyle/>
+                    <a:p>
+                      <a:pPr algn="r" indent="0" marL="0">
+                        <a:buNone/>
+                      </a:pPr>
+                      <a:r>
+                        <a:rPr lang="en-US" sz="1300" dirty="0">
+                          <a:solidFill>
+                            <a:srgbClr val="E6EDF7"/>
+                          </a:solidFill>
+                          <a:latin typeface="Calibri" pitchFamily="34" charset="0"/>
+                          <a:ea typeface="Calibri" pitchFamily="34" charset="-122"/>
+                          <a:cs typeface="Calibri" pitchFamily="34" charset="-120"/>
+                        </a:rPr>
+                        <a:t>130.7</a:t>
+                      </a:r>
+                      <a:endParaRPr lang="en-US" sz="1300" dirty="0">
+                        <a:latin typeface="Calibri" charset="0"/>
+                        <a:ea typeface="Calibri" charset="0"/>
+                        <a:cs typeface="Calibri" charset="0"/>
+                      </a:endParaRPr>
+                    </a:p>
+                  </a:txBody>
+                  <a:tcPr marL="73152" marR="73152" marT="36576" marB="36576">
+                    <a:lnL w="6350" cap="flat" cmpd="sng" algn="ctr">
+                      <a:solidFill>
+                        <a:srgbClr val="1A2233"/>
+                      </a:solidFill>
+                      <a:prstDash val="solid"/>
+                      <a:round/>
+                      <a:headEnd type="none" w="med" len="med"/>
+                      <a:tailEnd type="none" w="med" len="med"/>
+                    </a:lnL>
+                    <a:lnR w="6350" cap="flat" cmpd="sng" algn="ctr">
+                      <a:solidFill>
+                        <a:srgbClr val="1A2233"/>
+                      </a:solidFill>
+                      <a:prstDash val="solid"/>
+                      <a:round/>
+                      <a:headEnd type="none" w="med" len="med"/>
+                      <a:tailEnd type="none" w="med" len="med"/>
+                    </a:lnR>
+                    <a:lnT w="6350" cap="flat" cmpd="sng" algn="ctr">
+                      <a:solidFill>
+                        <a:srgbClr val="1A2233"/>
+                      </a:solidFill>
+                      <a:prstDash val="solid"/>
+                      <a:round/>
+                      <a:headEnd type="none" w="med" len="med"/>
+                      <a:tailEnd type="none" w="med" len="med"/>
+                    </a:lnT>
+                    <a:lnB w="6350" cap="flat" cmpd="sng" algn="ctr">
+                      <a:solidFill>
+                        <a:srgbClr val="1A2233"/>
+                      </a:solidFill>
+                      <a:prstDash val="solid"/>
+                      <a:round/>
+                      <a:headEnd type="none" w="med" len="med"/>
+                      <a:tailEnd type="none" w="med" len="med"/>
+                    </a:lnB>
+                    <a:solidFill>
+                      <a:srgbClr val="0B0F17"/>
+                    </a:solidFill>
+                  </a:tcPr>
+                </a:tc>
+                <a:tc>
+                  <a:txBody>
+                    <a:bodyPr/>
+                    <a:lstStyle/>
+                    <a:p>
+                      <a:pPr algn="r" indent="0" marL="0">
+                        <a:buNone/>
+                      </a:pPr>
+                      <a:r>
+                        <a:rPr lang="en-US" sz="1300" dirty="0">
+                          <a:solidFill>
+                            <a:srgbClr val="E6EDF7"/>
+                          </a:solidFill>
+                          <a:latin typeface="Calibri" pitchFamily="34" charset="0"/>
+                          <a:ea typeface="Calibri" pitchFamily="34" charset="-122"/>
+                          <a:cs typeface="Calibri" pitchFamily="34" charset="-120"/>
+                        </a:rPr>
+                        <a:t>132.3</a:t>
+                      </a:r>
+                      <a:endParaRPr lang="en-US" sz="1300" dirty="0">
+                        <a:latin typeface="Calibri" charset="0"/>
+                        <a:ea typeface="Calibri" charset="0"/>
+                        <a:cs typeface="Calibri" charset="0"/>
+                      </a:endParaRPr>
+                    </a:p>
+                  </a:txBody>
+                  <a:tcPr marL="73152" marR="73152" marT="36576" marB="36576">
+                    <a:lnL w="6350" cap="flat" cmpd="sng" algn="ctr">
+                      <a:solidFill>
+                        <a:srgbClr val="1A2233"/>
+                      </a:solidFill>
+                      <a:prstDash val="solid"/>
+                      <a:round/>
+                      <a:headEnd type="none" w="med" len="med"/>
+                      <a:tailEnd type="none" w="med" len="med"/>
+                    </a:lnL>
+                    <a:lnR w="6350" cap="flat" cmpd="sng" algn="ctr">
+                      <a:solidFill>
+                        <a:srgbClr val="1A2233"/>
+                      </a:solidFill>
+                      <a:prstDash val="solid"/>
+                      <a:round/>
+                      <a:headEnd type="none" w="med" len="med"/>
+                      <a:tailEnd type="none" w="med" len="med"/>
+                    </a:lnR>
+                    <a:lnT w="6350" cap="flat" cmpd="sng" algn="ctr">
+                      <a:solidFill>
+                        <a:srgbClr val="1A2233"/>
+                      </a:solidFill>
+                      <a:prstDash val="solid"/>
+                      <a:round/>
+                      <a:headEnd type="none" w="med" len="med"/>
+                      <a:tailEnd type="none" w="med" len="med"/>
+                    </a:lnT>
+                    <a:lnB w="6350" cap="flat" cmpd="sng" algn="ctr">
+                      <a:solidFill>
+                        <a:srgbClr val="1A2233"/>
+                      </a:solidFill>
+                      <a:prstDash val="solid"/>
+                      <a:round/>
+                      <a:headEnd type="none" w="med" len="med"/>
+                      <a:tailEnd type="none" w="med" len="med"/>
+                    </a:lnB>
+                    <a:solidFill>
+                      <a:srgbClr val="0B0F17"/>
+                    </a:solidFill>
+                  </a:tcPr>
+                </a:tc>
+                <a:tc>
+                  <a:txBody>
+                    <a:bodyPr/>
+                    <a:lstStyle/>
+                    <a:p>
+                      <a:pPr algn="r" indent="0" marL="0">
+                        <a:buNone/>
+                      </a:pPr>
+                      <a:r>
+                        <a:rPr lang="en-US" sz="1300" dirty="0">
+                          <a:solidFill>
+                            <a:srgbClr val="E6EDF7"/>
+                          </a:solidFill>
+                          <a:latin typeface="Calibri" pitchFamily="34" charset="0"/>
+                          <a:ea typeface="Calibri" pitchFamily="34" charset="-122"/>
+                          <a:cs typeface="Calibri" pitchFamily="34" charset="-120"/>
+                        </a:rPr>
+                        <a:t>+7.3%</a:t>
+                      </a:r>
+                      <a:endParaRPr lang="en-US" sz="1300" dirty="0">
+                        <a:latin typeface="Calibri" charset="0"/>
+                        <a:ea typeface="Calibri" charset="0"/>
+                        <a:cs typeface="Calibri" charset="0"/>
+                      </a:endParaRPr>
+                    </a:p>
+                  </a:txBody>
+                  <a:tcPr marL="73152" marR="73152" marT="36576" marB="36576">
+                    <a:lnL w="6350" cap="flat" cmpd="sng" algn="ctr">
+                      <a:solidFill>
+                        <a:srgbClr val="1A2233"/>
+                      </a:solidFill>
+                      <a:prstDash val="solid"/>
+                      <a:round/>
+                      <a:headEnd type="none" w="med" len="med"/>
+                      <a:tailEnd type="none" w="med" len="med"/>
+                    </a:lnL>
+                    <a:lnR w="6350" cap="flat" cmpd="sng" algn="ctr">
+                      <a:solidFill>
+                        <a:srgbClr val="1A2233"/>
+                      </a:solidFill>
+                      <a:prstDash val="solid"/>
+                      <a:round/>
+                      <a:headEnd type="none" w="med" len="med"/>
+                      <a:tailEnd type="none" w="med" len="med"/>
+                    </a:lnR>
+                    <a:lnT w="6350" cap="flat" cmpd="sng" algn="ctr">
+                      <a:solidFill>
+                        <a:srgbClr val="1A2233"/>
+                      </a:solidFill>
+                      <a:prstDash val="solid"/>
+                      <a:round/>
+                      <a:headEnd type="none" w="med" len="med"/>
+                      <a:tailEnd type="none" w="med" len="med"/>
+                    </a:lnT>
+                    <a:lnB w="6350" cap="flat" cmpd="sng" algn="ctr">
+                      <a:solidFill>
+                        <a:srgbClr val="1A2233"/>
+                      </a:solidFill>
+                      <a:prstDash val="solid"/>
+                      <a:round/>
+                      <a:headEnd type="none" w="med" len="med"/>
+                      <a:tailEnd type="none" w="med" len="med"/>
+                    </a:lnB>
+                    <a:solidFill>
+                      <a:srgbClr val="0B0F17"/>
+                    </a:solidFill>
+                  </a:tcPr>
+                </a:tc>
+                <a:tc>
+                  <a:txBody>
+                    <a:bodyPr/>
+                    <a:lstStyle/>
+                    <a:p>
+                      <a:pPr algn="r" indent="0" marL="0">
+                        <a:buNone/>
+                      </a:pPr>
+                      <a:r>
+                        <a:rPr lang="en-US" sz="1300" dirty="0">
+                          <a:solidFill>
+                            <a:srgbClr val="E6EDF7"/>
+                          </a:solidFill>
+                          <a:latin typeface="Calibri" pitchFamily="34" charset="0"/>
+                          <a:ea typeface="Calibri" pitchFamily="34" charset="-122"/>
+                          <a:cs typeface="Calibri" pitchFamily="34" charset="-120"/>
+                        </a:rPr>
+                        <a:t>+8.0%</a:t>
+                      </a:r>
+                      <a:endParaRPr lang="en-US" sz="1300" dirty="0">
+                        <a:latin typeface="Calibri" charset="0"/>
+                        <a:ea typeface="Calibri" charset="0"/>
+                        <a:cs typeface="Calibri" charset="0"/>
+                      </a:endParaRPr>
+                    </a:p>
+                  </a:txBody>
+                  <a:tcPr marL="73152" marR="73152" marT="36576" marB="36576">
+                    <a:lnL w="6350" cap="flat" cmpd="sng" algn="ctr">
+                      <a:solidFill>
+                        <a:srgbClr val="1A2233"/>
+                      </a:solidFill>
+                      <a:prstDash val="solid"/>
+                      <a:round/>
+                      <a:headEnd type="none" w="med" len="med"/>
+                      <a:tailEnd type="none" w="med" len="med"/>
+                    </a:lnL>
+                    <a:lnR w="6350" cap="flat" cmpd="sng" algn="ctr">
+                      <a:solidFill>
+                        <a:srgbClr val="1A2233"/>
+                      </a:solidFill>
+                      <a:prstDash val="solid"/>
+                      <a:round/>
+                      <a:headEnd type="none" w="med" len="med"/>
+                      <a:tailEnd type="none" w="med" len="med"/>
+                    </a:lnR>
+                    <a:lnT w="6350" cap="flat" cmpd="sng" algn="ctr">
+                      <a:solidFill>
+                        <a:srgbClr val="1A2233"/>
+                      </a:solidFill>
+                      <a:prstDash val="solid"/>
+                      <a:round/>
+                      <a:headEnd type="none" w="med" len="med"/>
+                      <a:tailEnd type="none" w="med" len="med"/>
+                    </a:lnT>
+                    <a:lnB w="6350" cap="flat" cmpd="sng" algn="ctr">
+                      <a:solidFill>
+                        <a:srgbClr val="1A2233"/>
+                      </a:solidFill>
+                      <a:prstDash val="solid"/>
+                      <a:round/>
+                      <a:headEnd type="none" w="med" len="med"/>
+                      <a:tailEnd type="none" w="med" len="med"/>
+                    </a:lnB>
+                    <a:solidFill>
+                      <a:srgbClr val="0B0F17"/>
+                    </a:solidFill>
+                  </a:tcPr>
+                </a:tc>
+              </a:tr>
+              <a:tr h="365760">
+                <a:tc>
+                  <a:txBody>
+                    <a:bodyPr/>
+                    <a:lstStyle/>
+                    <a:p>
+                      <a:pPr algn="l" indent="0" marL="0">
+                        <a:buNone/>
+                      </a:pPr>
+                      <a:r>
+                        <a:rPr lang="en-US" sz="1300" b="1" dirty="0">
+                          <a:solidFill>
+                            <a:srgbClr val="39D0FF"/>
+                          </a:solidFill>
+                          <a:latin typeface="Calibri" pitchFamily="34" charset="0"/>
+                          <a:ea typeface="Calibri" pitchFamily="34" charset="-122"/>
+                          <a:cs typeface="Calibri" pitchFamily="34" charset="-120"/>
+                        </a:rPr>
+                        <a:t>Baseline (fast movers nearest dock)</a:t>
+                      </a:r>
+                      <a:endParaRPr lang="en-US" sz="1300" dirty="0">
+                        <a:latin typeface="Calibri" charset="0"/>
+                        <a:ea typeface="Calibri" charset="0"/>
+                        <a:cs typeface="Calibri" charset="0"/>
+                      </a:endParaRPr>
+                    </a:p>
+                  </a:txBody>
+                  <a:tcPr marL="73152" marR="73152" marT="36576" marB="36576">
+                    <a:lnL w="6350" cap="flat" cmpd="sng" algn="ctr">
+                      <a:solidFill>
+                        <a:srgbClr val="1A2233"/>
+                      </a:solidFill>
+                      <a:prstDash val="solid"/>
+                      <a:round/>
+                      <a:headEnd type="none" w="med" len="med"/>
+                      <a:tailEnd type="none" w="med" len="med"/>
+                    </a:lnL>
+                    <a:lnR w="6350" cap="flat" cmpd="sng" algn="ctr">
+                      <a:solidFill>
+                        <a:srgbClr val="1A2233"/>
+                      </a:solidFill>
+                      <a:prstDash val="solid"/>
+                      <a:round/>
+                      <a:headEnd type="none" w="med" len="med"/>
+                      <a:tailEnd type="none" w="med" len="med"/>
+                    </a:lnR>
+                    <a:lnT w="6350" cap="flat" cmpd="sng" algn="ctr">
+                      <a:solidFill>
+                        <a:srgbClr val="1A2233"/>
+                      </a:solidFill>
+                      <a:prstDash val="solid"/>
+                      <a:round/>
+                      <a:headEnd type="none" w="med" len="med"/>
+                      <a:tailEnd type="none" w="med" len="med"/>
+                    </a:lnT>
+                    <a:lnB w="6350" cap="flat" cmpd="sng" algn="ctr">
+                      <a:solidFill>
+                        <a:srgbClr val="1A2233"/>
+                      </a:solidFill>
+                      <a:prstDash val="solid"/>
+                      <a:round/>
+                      <a:headEnd type="none" w="med" len="med"/>
+                      <a:tailEnd type="none" w="med" len="med"/>
+                    </a:lnB>
+                    <a:solidFill>
+                      <a:srgbClr val="0B0F17"/>
+                    </a:solidFill>
+                  </a:tcPr>
+                </a:tc>
+                <a:tc>
+                  <a:txBody>
+                    <a:bodyPr/>
+                    <a:lstStyle/>
+                    <a:p>
+                      <a:pPr algn="r" indent="0" marL="0">
+                        <a:buNone/>
+                      </a:pPr>
+                      <a:r>
+                        <a:rPr lang="en-US" sz="1300" dirty="0">
+                          <a:solidFill>
+                            <a:srgbClr val="39D0FF"/>
+                          </a:solidFill>
+                          <a:latin typeface="Calibri" pitchFamily="34" charset="0"/>
+                          <a:ea typeface="Calibri" pitchFamily="34" charset="-122"/>
+                          <a:cs typeface="Calibri" pitchFamily="34" charset="-120"/>
+                        </a:rPr>
+                        <a:t>92.52</a:t>
+                      </a:r>
+                      <a:endParaRPr lang="en-US" sz="1300" dirty="0">
+                        <a:latin typeface="Calibri" charset="0"/>
+                        <a:ea typeface="Calibri" charset="0"/>
+                        <a:cs typeface="Calibri" charset="0"/>
+                      </a:endParaRPr>
+                    </a:p>
+                  </a:txBody>
+                  <a:tcPr marL="73152" marR="73152" marT="36576" marB="36576">
+                    <a:lnL w="6350" cap="flat" cmpd="sng" algn="ctr">
+                      <a:solidFill>
+                        <a:srgbClr val="1A2233"/>
+                      </a:solidFill>
+                      <a:prstDash val="solid"/>
+                      <a:round/>
+                      <a:headEnd type="none" w="med" len="med"/>
+                      <a:tailEnd type="none" w="med" len="med"/>
+                    </a:lnL>
+                    <a:lnR w="6350" cap="flat" cmpd="sng" algn="ctr">
+                      <a:solidFill>
+                        <a:srgbClr val="1A2233"/>
+                      </a:solidFill>
+                      <a:prstDash val="solid"/>
+                      <a:round/>
+                      <a:headEnd type="none" w="med" len="med"/>
+                      <a:tailEnd type="none" w="med" len="med"/>
+                    </a:lnR>
+                    <a:lnT w="6350" cap="flat" cmpd="sng" algn="ctr">
+                      <a:solidFill>
+                        <a:srgbClr val="1A2233"/>
+                      </a:solidFill>
+                      <a:prstDash val="solid"/>
+                      <a:round/>
+                      <a:headEnd type="none" w="med" len="med"/>
+                      <a:tailEnd type="none" w="med" len="med"/>
+                    </a:lnT>
+                    <a:lnB w="6350" cap="flat" cmpd="sng" algn="ctr">
+                      <a:solidFill>
+                        <a:srgbClr val="1A2233"/>
+                      </a:solidFill>
+                      <a:prstDash val="solid"/>
+                      <a:round/>
+                      <a:headEnd type="none" w="med" len="med"/>
+                      <a:tailEnd type="none" w="med" len="med"/>
+                    </a:lnB>
+                    <a:solidFill>
+                      <a:srgbClr val="0B0F17"/>
+                    </a:solidFill>
+                  </a:tcPr>
+                </a:tc>
+                <a:tc>
+                  <a:txBody>
+                    <a:bodyPr/>
+                    <a:lstStyle/>
+                    <a:p>
+                      <a:pPr algn="r" indent="0" marL="0">
+                        <a:buNone/>
+                      </a:pPr>
+                      <a:r>
+                        <a:rPr lang="en-US" sz="1300" dirty="0">
+                          <a:solidFill>
+                            <a:srgbClr val="39D0FF"/>
+                          </a:solidFill>
+                          <a:latin typeface="Calibri" pitchFamily="34" charset="0"/>
+                          <a:ea typeface="Calibri" pitchFamily="34" charset="-122"/>
+                          <a:cs typeface="Calibri" pitchFamily="34" charset="-120"/>
+                        </a:rPr>
+                        <a:t>101.67</a:t>
+                      </a:r>
+                      <a:endParaRPr lang="en-US" sz="1300" dirty="0">
+                        <a:latin typeface="Calibri" charset="0"/>
+                        <a:ea typeface="Calibri" charset="0"/>
+                        <a:cs typeface="Calibri" charset="0"/>
+                      </a:endParaRPr>
+                    </a:p>
+                  </a:txBody>
+                  <a:tcPr marL="73152" marR="73152" marT="36576" marB="36576">
+                    <a:lnL w="6350" cap="flat" cmpd="sng" algn="ctr">
+                      <a:solidFill>
+                        <a:srgbClr val="1A2233"/>
+                      </a:solidFill>
+                      <a:prstDash val="solid"/>
+                      <a:round/>
+                      <a:headEnd type="none" w="med" len="med"/>
+                      <a:tailEnd type="none" w="med" len="med"/>
+                    </a:lnL>
+                    <a:lnR w="6350" cap="flat" cmpd="sng" algn="ctr">
+                      <a:solidFill>
+                        <a:srgbClr val="1A2233"/>
+                      </a:solidFill>
+                      <a:prstDash val="solid"/>
+                      <a:round/>
+                      <a:headEnd type="none" w="med" len="med"/>
+                      <a:tailEnd type="none" w="med" len="med"/>
+                    </a:lnR>
+                    <a:lnT w="6350" cap="flat" cmpd="sng" algn="ctr">
+                      <a:solidFill>
+                        <a:srgbClr val="1A2233"/>
+                      </a:solidFill>
+                      <a:prstDash val="solid"/>
+                      <a:round/>
+                      <a:headEnd type="none" w="med" len="med"/>
+                      <a:tailEnd type="none" w="med" len="med"/>
+                    </a:lnT>
+                    <a:lnB w="6350" cap="flat" cmpd="sng" algn="ctr">
+                      <a:solidFill>
+                        <a:srgbClr val="1A2233"/>
+                      </a:solidFill>
+                      <a:prstDash val="solid"/>
+                      <a:round/>
+                      <a:headEnd type="none" w="med" len="med"/>
+                      <a:tailEnd type="none" w="med" len="med"/>
+                    </a:lnB>
+                    <a:solidFill>
+                      <a:srgbClr val="0B0F17"/>
+                    </a:solidFill>
+                  </a:tcPr>
+                </a:tc>
+                <a:tc>
+                  <a:txBody>
+                    <a:bodyPr/>
+                    <a:lstStyle/>
+                    <a:p>
+                      <a:pPr algn="r" indent="0" marL="0">
+                        <a:buNone/>
+                      </a:pPr>
+                      <a:r>
+                        <a:rPr lang="en-US" sz="1300" dirty="0">
+                          <a:solidFill>
+                            <a:srgbClr val="39D0FF"/>
+                          </a:solidFill>
+                          <a:latin typeface="Calibri" pitchFamily="34" charset="0"/>
+                          <a:ea typeface="Calibri" pitchFamily="34" charset="-122"/>
+                          <a:cs typeface="Calibri" pitchFamily="34" charset="-120"/>
+                        </a:rPr>
+                        <a:t>125.2</a:t>
+                      </a:r>
+                      <a:endParaRPr lang="en-US" sz="1300" dirty="0">
+                        <a:latin typeface="Calibri" charset="0"/>
+                        <a:ea typeface="Calibri" charset="0"/>
+                        <a:cs typeface="Calibri" charset="0"/>
+                      </a:endParaRPr>
+                    </a:p>
+                  </a:txBody>
+                  <a:tcPr marL="73152" marR="73152" marT="36576" marB="36576">
+                    <a:lnL w="6350" cap="flat" cmpd="sng" algn="ctr">
+                      <a:solidFill>
+                        <a:srgbClr val="1A2233"/>
+                      </a:solidFill>
+                      <a:prstDash val="solid"/>
+                      <a:round/>
+                      <a:headEnd type="none" w="med" len="med"/>
+                      <a:tailEnd type="none" w="med" len="med"/>
+                    </a:lnL>
+                    <a:lnR w="6350" cap="flat" cmpd="sng" algn="ctr">
+                      <a:solidFill>
+                        <a:srgbClr val="1A2233"/>
+                      </a:solidFill>
+                      <a:prstDash val="solid"/>
+                      <a:round/>
+                      <a:headEnd type="none" w="med" len="med"/>
+                      <a:tailEnd type="none" w="med" len="med"/>
+                    </a:lnR>
+                    <a:lnT w="6350" cap="flat" cmpd="sng" algn="ctr">
+                      <a:solidFill>
+                        <a:srgbClr val="1A2233"/>
+                      </a:solidFill>
+                      <a:prstDash val="solid"/>
+                      <a:round/>
+                      <a:headEnd type="none" w="med" len="med"/>
+                      <a:tailEnd type="none" w="med" len="med"/>
+                    </a:lnT>
+                    <a:lnB w="6350" cap="flat" cmpd="sng" algn="ctr">
+                      <a:solidFill>
+                        <a:srgbClr val="1A2233"/>
+                      </a:solidFill>
+                      <a:prstDash val="solid"/>
+                      <a:round/>
+                      <a:headEnd type="none" w="med" len="med"/>
+                      <a:tailEnd type="none" w="med" len="med"/>
+                    </a:lnB>
+                    <a:solidFill>
+                      <a:srgbClr val="0B0F17"/>
+                    </a:solidFill>
+                  </a:tcPr>
+                </a:tc>
+                <a:tc>
+                  <a:txBody>
+                    <a:bodyPr/>
+                    <a:lstStyle/>
+                    <a:p>
+                      <a:pPr algn="r" indent="0" marL="0">
+                        <a:buNone/>
+                      </a:pPr>
+                      <a:r>
+                        <a:rPr lang="en-US" sz="1300" dirty="0">
+                          <a:solidFill>
+                            <a:srgbClr val="39D0FF"/>
+                          </a:solidFill>
+                          <a:latin typeface="Calibri" pitchFamily="34" charset="0"/>
+                          <a:ea typeface="Calibri" pitchFamily="34" charset="-122"/>
+                          <a:cs typeface="Calibri" pitchFamily="34" charset="-120"/>
+                        </a:rPr>
+                        <a:t>127.2</a:t>
+                      </a:r>
+                      <a:endParaRPr lang="en-US" sz="1300" dirty="0">
+                        <a:latin typeface="Calibri" charset="0"/>
+                        <a:ea typeface="Calibri" charset="0"/>
+                        <a:cs typeface="Calibri" charset="0"/>
+                      </a:endParaRPr>
+                    </a:p>
+                  </a:txBody>
+                  <a:tcPr marL="73152" marR="73152" marT="36576" marB="36576">
+                    <a:lnL w="6350" cap="flat" cmpd="sng" algn="ctr">
+                      <a:solidFill>
+                        <a:srgbClr val="1A2233"/>
+                      </a:solidFill>
+                      <a:prstDash val="solid"/>
+                      <a:round/>
+                      <a:headEnd type="none" w="med" len="med"/>
+                      <a:tailEnd type="none" w="med" len="med"/>
+                    </a:lnL>
+                    <a:lnR w="6350" cap="flat" cmpd="sng" algn="ctr">
+                      <a:solidFill>
+                        <a:srgbClr val="1A2233"/>
+                      </a:solidFill>
+                      <a:prstDash val="solid"/>
+                      <a:round/>
+                      <a:headEnd type="none" w="med" len="med"/>
+                      <a:tailEnd type="none" w="med" len="med"/>
+                    </a:lnR>
+                    <a:lnT w="6350" cap="flat" cmpd="sng" algn="ctr">
+                      <a:solidFill>
+                        <a:srgbClr val="1A2233"/>
+                      </a:solidFill>
+                      <a:prstDash val="solid"/>
+                      <a:round/>
+                      <a:headEnd type="none" w="med" len="med"/>
+                      <a:tailEnd type="none" w="med" len="med"/>
+                    </a:lnT>
+                    <a:lnB w="6350" cap="flat" cmpd="sng" algn="ctr">
+                      <a:solidFill>
+                        <a:srgbClr val="1A2233"/>
+                      </a:solidFill>
+                      <a:prstDash val="solid"/>
+                      <a:round/>
+                      <a:headEnd type="none" w="med" len="med"/>
+                      <a:tailEnd type="none" w="med" len="med"/>
+                    </a:lnB>
+                    <a:solidFill>
+                      <a:srgbClr val="0B0F17"/>
+                    </a:solidFill>
+                  </a:tcPr>
+                </a:tc>
+                <a:tc>
+                  <a:txBody>
+                    <a:bodyPr/>
+                    <a:lstStyle/>
+                    <a:p>
+                      <a:pPr algn="r" indent="0" marL="0">
+                        <a:buNone/>
+                      </a:pPr>
+                      <a:r>
+                        <a:rPr lang="en-US" sz="1300" dirty="0">
+                          <a:solidFill>
+                            <a:srgbClr val="39D0FF"/>
+                          </a:solidFill>
+                          <a:latin typeface="Calibri" pitchFamily="34" charset="0"/>
+                          <a:ea typeface="Calibri" pitchFamily="34" charset="-122"/>
+                          <a:cs typeface="Calibri" pitchFamily="34" charset="-120"/>
+                        </a:rPr>
+                        <a:t>—</a:t>
+                      </a:r>
+                      <a:endParaRPr lang="en-US" sz="1300" dirty="0">
+                        <a:latin typeface="Calibri" charset="0"/>
+                        <a:ea typeface="Calibri" charset="0"/>
+                        <a:cs typeface="Calibri" charset="0"/>
+                      </a:endParaRPr>
+                    </a:p>
+                  </a:txBody>
+                  <a:tcPr marL="73152" marR="73152" marT="36576" marB="36576">
+                    <a:lnL w="6350" cap="flat" cmpd="sng" algn="ctr">
+                      <a:solidFill>
+                        <a:srgbClr val="1A2233"/>
+                      </a:solidFill>
+                      <a:prstDash val="solid"/>
+                      <a:round/>
+                      <a:headEnd type="none" w="med" len="med"/>
+                      <a:tailEnd type="none" w="med" len="med"/>
+                    </a:lnL>
+                    <a:lnR w="6350" cap="flat" cmpd="sng" algn="ctr">
+                      <a:solidFill>
+                        <a:srgbClr val="1A2233"/>
+                      </a:solidFill>
+                      <a:prstDash val="solid"/>
+                      <a:round/>
+                      <a:headEnd type="none" w="med" len="med"/>
+                      <a:tailEnd type="none" w="med" len="med"/>
+                    </a:lnR>
+                    <a:lnT w="6350" cap="flat" cmpd="sng" algn="ctr">
+                      <a:solidFill>
+                        <a:srgbClr val="1A2233"/>
+                      </a:solidFill>
+                      <a:prstDash val="solid"/>
+                      <a:round/>
+                      <a:headEnd type="none" w="med" len="med"/>
+                      <a:tailEnd type="none" w="med" len="med"/>
+                    </a:lnT>
+                    <a:lnB w="6350" cap="flat" cmpd="sng" algn="ctr">
+                      <a:solidFill>
+                        <a:srgbClr val="1A2233"/>
+                      </a:solidFill>
+                      <a:prstDash val="solid"/>
+                      <a:round/>
+                      <a:headEnd type="none" w="med" len="med"/>
+                      <a:tailEnd type="none" w="med" len="med"/>
+                    </a:lnB>
+                    <a:solidFill>
+                      <a:srgbClr val="0B0F17"/>
+                    </a:solidFill>
+                  </a:tcPr>
+                </a:tc>
+                <a:tc>
+                  <a:txBody>
+                    <a:bodyPr/>
+                    <a:lstStyle/>
+                    <a:p>
+                      <a:pPr algn="r" indent="0" marL="0">
+                        <a:buNone/>
+                      </a:pPr>
+                      <a:r>
+                        <a:rPr lang="en-US" sz="1300" dirty="0">
+                          <a:solidFill>
+                            <a:srgbClr val="39D0FF"/>
+                          </a:solidFill>
+                          <a:latin typeface="Calibri" pitchFamily="34" charset="0"/>
+                          <a:ea typeface="Calibri" pitchFamily="34" charset="-122"/>
+                          <a:cs typeface="Calibri" pitchFamily="34" charset="-120"/>
+                        </a:rPr>
+                        <a:t>—</a:t>
+                      </a:r>
+                      <a:endParaRPr lang="en-US" sz="1300" dirty="0">
+                        <a:latin typeface="Calibri" charset="0"/>
+                        <a:ea typeface="Calibri" charset="0"/>
+                        <a:cs typeface="Calibri" charset="0"/>
+                      </a:endParaRPr>
+                    </a:p>
+                  </a:txBody>
+                  <a:tcPr marL="73152" marR="73152" marT="36576" marB="36576">
+                    <a:lnL w="6350" cap="flat" cmpd="sng" algn="ctr">
+                      <a:solidFill>
+                        <a:srgbClr val="1A2233"/>
+                      </a:solidFill>
+                      <a:prstDash val="solid"/>
+                      <a:round/>
+                      <a:headEnd type="none" w="med" len="med"/>
+                      <a:tailEnd type="none" w="med" len="med"/>
+                    </a:lnL>
+                    <a:lnR w="6350" cap="flat" cmpd="sng" algn="ctr">
+                      <a:solidFill>
+                        <a:srgbClr val="1A2233"/>
+                      </a:solidFill>
+                      <a:prstDash val="solid"/>
+                      <a:round/>
+                      <a:headEnd type="none" w="med" len="med"/>
+                      <a:tailEnd type="none" w="med" len="med"/>
+                    </a:lnR>
+                    <a:lnT w="6350" cap="flat" cmpd="sng" algn="ctr">
+                      <a:solidFill>
+                        <a:srgbClr val="1A2233"/>
+                      </a:solidFill>
+                      <a:prstDash val="solid"/>
+                      <a:round/>
+                      <a:headEnd type="none" w="med" len="med"/>
+                      <a:tailEnd type="none" w="med" len="med"/>
+                    </a:lnT>
+                    <a:lnB w="6350" cap="flat" cmpd="sng" algn="ctr">
+                      <a:solidFill>
+                        <a:srgbClr val="1A2233"/>
+                      </a:solidFill>
+                      <a:prstDash val="solid"/>
+                      <a:round/>
+                      <a:headEnd type="none" w="med" len="med"/>
+                      <a:tailEnd type="none" w="med" len="med"/>
+                    </a:lnB>
+                    <a:solidFill>
+                      <a:srgbClr val="0B0F17"/>
+                    </a:solidFill>
+                  </a:tcPr>
+                </a:tc>
+              </a:tr>
+              <a:tr h="365760">
+                <a:tc>
+                  <a:txBody>
+                    <a:bodyPr/>
+                    <a:lstStyle/>
+                    <a:p>
+                      <a:pPr algn="l" indent="0" marL="0">
+                        <a:buNone/>
+                      </a:pPr>
+                      <a:r>
+                        <a:rPr lang="en-US" sz="1300" b="1" dirty="0">
+                          <a:solidFill>
+                            <a:srgbClr val="E6EDF7"/>
+                          </a:solidFill>
+                          <a:latin typeface="Calibri" pitchFamily="34" charset="0"/>
+                          <a:ea typeface="Calibri" pitchFamily="34" charset="-122"/>
+                          <a:cs typeface="Calibri" pitchFamily="34" charset="-120"/>
+                        </a:rPr>
+                        <a:t>SA (seed 42, 30,000 it, from Baseline, train only)</a:t>
+                      </a:r>
+                      <a:endParaRPr lang="en-US" sz="1300" dirty="0">
+                        <a:latin typeface="Calibri" charset="0"/>
+                        <a:ea typeface="Calibri" charset="0"/>
+                        <a:cs typeface="Calibri" charset="0"/>
+                      </a:endParaRPr>
+                    </a:p>
+                  </a:txBody>
+                  <a:tcPr marL="73152" marR="73152" marT="36576" marB="36576">
+                    <a:lnL w="6350" cap="flat" cmpd="sng" algn="ctr">
+                      <a:solidFill>
+                        <a:srgbClr val="1A2233"/>
+                      </a:solidFill>
+                      <a:prstDash val="solid"/>
+                      <a:round/>
+                      <a:headEnd type="none" w="med" len="med"/>
+                      <a:tailEnd type="none" w="med" len="med"/>
+                    </a:lnL>
+                    <a:lnR w="6350" cap="flat" cmpd="sng" algn="ctr">
+                      <a:solidFill>
+                        <a:srgbClr val="1A2233"/>
+                      </a:solidFill>
+                      <a:prstDash val="solid"/>
+                      <a:round/>
+                      <a:headEnd type="none" w="med" len="med"/>
+                      <a:tailEnd type="none" w="med" len="med"/>
+                    </a:lnR>
+                    <a:lnT w="6350" cap="flat" cmpd="sng" algn="ctr">
+                      <a:solidFill>
+                        <a:srgbClr val="1A2233"/>
+                      </a:solidFill>
+                      <a:prstDash val="solid"/>
+                      <a:round/>
+                      <a:headEnd type="none" w="med" len="med"/>
+                      <a:tailEnd type="none" w="med" len="med"/>
+                    </a:lnT>
+                    <a:lnB w="6350" cap="flat" cmpd="sng" algn="ctr">
+                      <a:solidFill>
+                        <a:srgbClr val="1A2233"/>
+                      </a:solidFill>
+                      <a:prstDash val="solid"/>
+                      <a:round/>
+                      <a:headEnd type="none" w="med" len="med"/>
+                      <a:tailEnd type="none" w="med" len="med"/>
+                    </a:lnB>
+                    <a:solidFill>
+                      <a:srgbClr val="0B0F17"/>
+                    </a:solidFill>
+                  </a:tcPr>
+                </a:tc>
+                <a:tc>
+                  <a:txBody>
+                    <a:bodyPr/>
+                    <a:lstStyle/>
+                    <a:p>
+                      <a:pPr algn="r" indent="0" marL="0">
+                        <a:buNone/>
+                      </a:pPr>
+                      <a:r>
+                        <a:rPr lang="en-US" sz="1300" dirty="0">
+                          <a:solidFill>
+                            <a:srgbClr val="E6EDF7"/>
+                          </a:solidFill>
+                          <a:latin typeface="Calibri" pitchFamily="34" charset="0"/>
+                          <a:ea typeface="Calibri" pitchFamily="34" charset="-122"/>
+                          <a:cs typeface="Calibri" pitchFamily="34" charset="-120"/>
+                        </a:rPr>
+                        <a:t>79.94</a:t>
+                      </a:r>
+                      <a:endParaRPr lang="en-US" sz="1300" dirty="0">
+                        <a:latin typeface="Calibri" charset="0"/>
+                        <a:ea typeface="Calibri" charset="0"/>
+                        <a:cs typeface="Calibri" charset="0"/>
+                      </a:endParaRPr>
+                    </a:p>
+                  </a:txBody>
+                  <a:tcPr marL="73152" marR="73152" marT="36576" marB="36576">
+                    <a:lnL w="6350" cap="flat" cmpd="sng" algn="ctr">
+                      <a:solidFill>
+                        <a:srgbClr val="1A2233"/>
+                      </a:solidFill>
+                      <a:prstDash val="solid"/>
+                      <a:round/>
+                      <a:headEnd type="none" w="med" len="med"/>
+                      <a:tailEnd type="none" w="med" len="med"/>
+                    </a:lnL>
+                    <a:lnR w="6350" cap="flat" cmpd="sng" algn="ctr">
+                      <a:solidFill>
+                        <a:srgbClr val="1A2233"/>
+                      </a:solidFill>
+                      <a:prstDash val="solid"/>
+                      <a:round/>
+                      <a:headEnd type="none" w="med" len="med"/>
+                      <a:tailEnd type="none" w="med" len="med"/>
+                    </a:lnR>
+                    <a:lnT w="6350" cap="flat" cmpd="sng" algn="ctr">
+                      <a:solidFill>
+                        <a:srgbClr val="1A2233"/>
+                      </a:solidFill>
+                      <a:prstDash val="solid"/>
+                      <a:round/>
+                      <a:headEnd type="none" w="med" len="med"/>
+                      <a:tailEnd type="none" w="med" len="med"/>
+                    </a:lnT>
+                    <a:lnB w="6350" cap="flat" cmpd="sng" algn="ctr">
+                      <a:solidFill>
+                        <a:srgbClr val="1A2233"/>
+                      </a:solidFill>
+                      <a:prstDash val="solid"/>
+                      <a:round/>
+                      <a:headEnd type="none" w="med" len="med"/>
+                      <a:tailEnd type="none" w="med" len="med"/>
+                    </a:lnB>
+                    <a:solidFill>
+                      <a:srgbClr val="0B0F17"/>
+                    </a:solidFill>
+                  </a:tcPr>
+                </a:tc>
+                <a:tc>
+                  <a:txBody>
+                    <a:bodyPr/>
+                    <a:lstStyle/>
+                    <a:p>
+                      <a:pPr algn="r" indent="0" marL="0">
+                        <a:buNone/>
+                      </a:pPr>
+                      <a:r>
+                        <a:rPr lang="en-US" sz="1300" dirty="0">
+                          <a:solidFill>
+                            <a:srgbClr val="E6EDF7"/>
+                          </a:solidFill>
+                          <a:latin typeface="Calibri" pitchFamily="34" charset="0"/>
+                          <a:ea typeface="Calibri" pitchFamily="34" charset="-122"/>
+                          <a:cs typeface="Calibri" pitchFamily="34" charset="-120"/>
+                        </a:rPr>
+                        <a:t>90.38</a:t>
+                      </a:r>
+                      <a:endParaRPr lang="en-US" sz="1300" dirty="0">
+                        <a:latin typeface="Calibri" charset="0"/>
+                        <a:ea typeface="Calibri" charset="0"/>
+                        <a:cs typeface="Calibri" charset="0"/>
+                      </a:endParaRPr>
+                    </a:p>
+                  </a:txBody>
+                  <a:tcPr marL="73152" marR="73152" marT="36576" marB="36576">
+                    <a:lnL w="6350" cap="flat" cmpd="sng" algn="ctr">
+                      <a:solidFill>
+                        <a:srgbClr val="1A2233"/>
+                      </a:solidFill>
+                      <a:prstDash val="solid"/>
+                      <a:round/>
+                      <a:headEnd type="none" w="med" len="med"/>
+                      <a:tailEnd type="none" w="med" len="med"/>
+                    </a:lnL>
+                    <a:lnR w="6350" cap="flat" cmpd="sng" algn="ctr">
+                      <a:solidFill>
+                        <a:srgbClr val="1A2233"/>
+                      </a:solidFill>
+                      <a:prstDash val="solid"/>
+                      <a:round/>
+                      <a:headEnd type="none" w="med" len="med"/>
+                      <a:tailEnd type="none" w="med" len="med"/>
+                    </a:lnR>
+                    <a:lnT w="6350" cap="flat" cmpd="sng" algn="ctr">
+                      <a:solidFill>
+                        <a:srgbClr val="1A2233"/>
+                      </a:solidFill>
+                      <a:prstDash val="solid"/>
+                      <a:round/>
+                      <a:headEnd type="none" w="med" len="med"/>
+                      <a:tailEnd type="none" w="med" len="med"/>
+                    </a:lnT>
+                    <a:lnB w="6350" cap="flat" cmpd="sng" algn="ctr">
+                      <a:solidFill>
+                        <a:srgbClr val="1A2233"/>
+                      </a:solidFill>
+                      <a:prstDash val="solid"/>
+                      <a:round/>
+                      <a:headEnd type="none" w="med" len="med"/>
+                      <a:tailEnd type="none" w="med" len="med"/>
+                    </a:lnB>
+                    <a:solidFill>
+                      <a:srgbClr val="0B0F17"/>
+                    </a:solidFill>
+                  </a:tcPr>
+                </a:tc>
+                <a:tc>
+                  <a:txBody>
+                    <a:bodyPr/>
+                    <a:lstStyle/>
+                    <a:p>
+                      <a:pPr algn="r" indent="0" marL="0">
+                        <a:buNone/>
+                      </a:pPr>
+                      <a:r>
+                        <a:rPr lang="en-US" sz="1300" dirty="0">
+                          <a:solidFill>
+                            <a:srgbClr val="E6EDF7"/>
+                          </a:solidFill>
+                          <a:latin typeface="Calibri" pitchFamily="34" charset="0"/>
+                          <a:ea typeface="Calibri" pitchFamily="34" charset="-122"/>
+                          <a:cs typeface="Calibri" pitchFamily="34" charset="-120"/>
+                        </a:rPr>
+                        <a:t>116.0</a:t>
+                      </a:r>
+                      <a:endParaRPr lang="en-US" sz="1300" dirty="0">
+                        <a:latin typeface="Calibri" charset="0"/>
+                        <a:ea typeface="Calibri" charset="0"/>
+                        <a:cs typeface="Calibri" charset="0"/>
+                      </a:endParaRPr>
+                    </a:p>
+                  </a:txBody>
+                  <a:tcPr marL="73152" marR="73152" marT="36576" marB="36576">
+                    <a:lnL w="6350" cap="flat" cmpd="sng" algn="ctr">
+                      <a:solidFill>
+                        <a:srgbClr val="1A2233"/>
+                      </a:solidFill>
+                      <a:prstDash val="solid"/>
+                      <a:round/>
+                      <a:headEnd type="none" w="med" len="med"/>
+                      <a:tailEnd type="none" w="med" len="med"/>
+                    </a:lnL>
+                    <a:lnR w="6350" cap="flat" cmpd="sng" algn="ctr">
+                      <a:solidFill>
+                        <a:srgbClr val="1A2233"/>
+                      </a:solidFill>
+                      <a:prstDash val="solid"/>
+                      <a:round/>
+                      <a:headEnd type="none" w="med" len="med"/>
+                      <a:tailEnd type="none" w="med" len="med"/>
+                    </a:lnR>
+                    <a:lnT w="6350" cap="flat" cmpd="sng" algn="ctr">
+                      <a:solidFill>
+                        <a:srgbClr val="1A2233"/>
+                      </a:solidFill>
+                      <a:prstDash val="solid"/>
+                      <a:round/>
+                      <a:headEnd type="none" w="med" len="med"/>
+                      <a:tailEnd type="none" w="med" len="med"/>
+                    </a:lnT>
+                    <a:lnB w="6350" cap="flat" cmpd="sng" algn="ctr">
+                      <a:solidFill>
+                        <a:srgbClr val="1A2233"/>
+                      </a:solidFill>
+                      <a:prstDash val="solid"/>
+                      <a:round/>
+                      <a:headEnd type="none" w="med" len="med"/>
+                      <a:tailEnd type="none" w="med" len="med"/>
+                    </a:lnB>
+                    <a:solidFill>
+                      <a:srgbClr val="0B0F17"/>
+                    </a:solidFill>
+                  </a:tcPr>
+                </a:tc>
+                <a:tc>
+                  <a:txBody>
+                    <a:bodyPr/>
+                    <a:lstStyle/>
+                    <a:p>
+                      <a:pPr algn="r" indent="0" marL="0">
+                        <a:buNone/>
+                      </a:pPr>
+                      <a:r>
+                        <a:rPr lang="en-US" sz="1300" dirty="0">
+                          <a:solidFill>
+                            <a:srgbClr val="E6EDF7"/>
+                          </a:solidFill>
+                          <a:latin typeface="Calibri" pitchFamily="34" charset="0"/>
+                          <a:ea typeface="Calibri" pitchFamily="34" charset="-122"/>
+                          <a:cs typeface="Calibri" pitchFamily="34" charset="-120"/>
+                        </a:rPr>
+                        <a:t>119.6</a:t>
+                      </a:r>
+                      <a:endParaRPr lang="en-US" sz="1300" dirty="0">
+                        <a:latin typeface="Calibri" charset="0"/>
+                        <a:ea typeface="Calibri" charset="0"/>
+                        <a:cs typeface="Calibri" charset="0"/>
+                      </a:endParaRPr>
+                    </a:p>
+                  </a:txBody>
+                  <a:tcPr marL="73152" marR="73152" marT="36576" marB="36576">
+                    <a:lnL w="6350" cap="flat" cmpd="sng" algn="ctr">
+                      <a:solidFill>
+                        <a:srgbClr val="1A2233"/>
+                      </a:solidFill>
+                      <a:prstDash val="solid"/>
+                      <a:round/>
+                      <a:headEnd type="none" w="med" len="med"/>
+                      <a:tailEnd type="none" w="med" len="med"/>
+                    </a:lnL>
+                    <a:lnR w="6350" cap="flat" cmpd="sng" algn="ctr">
+                      <a:solidFill>
+                        <a:srgbClr val="1A2233"/>
+                      </a:solidFill>
+                      <a:prstDash val="solid"/>
+                      <a:round/>
+                      <a:headEnd type="none" w="med" len="med"/>
+                      <a:tailEnd type="none" w="med" len="med"/>
+                    </a:lnR>
+                    <a:lnT w="6350" cap="flat" cmpd="sng" algn="ctr">
+                      <a:solidFill>
+                        <a:srgbClr val="1A2233"/>
+                      </a:solidFill>
+                      <a:prstDash val="solid"/>
+                      <a:round/>
+                      <a:headEnd type="none" w="med" len="med"/>
+                      <a:tailEnd type="none" w="med" len="med"/>
+                    </a:lnT>
+                    <a:lnB w="6350" cap="flat" cmpd="sng" algn="ctr">
+                      <a:solidFill>
+                        <a:srgbClr val="1A2233"/>
+                      </a:solidFill>
+                      <a:prstDash val="solid"/>
+                      <a:round/>
+                      <a:headEnd type="none" w="med" len="med"/>
+                      <a:tailEnd type="none" w="med" len="med"/>
+                    </a:lnB>
+                    <a:solidFill>
+                      <a:srgbClr val="0B0F17"/>
+                    </a:solidFill>
+                  </a:tcPr>
+                </a:tc>
+                <a:tc>
+                  <a:txBody>
+                    <a:bodyPr/>
+                    <a:lstStyle/>
+                    <a:p>
+                      <a:pPr algn="r" indent="0" marL="0">
+                        <a:buNone/>
+                      </a:pPr>
+                      <a:r>
+                        <a:rPr lang="en-US" sz="1300" dirty="0">
+                          <a:solidFill>
+                            <a:srgbClr val="E6EDF7"/>
+                          </a:solidFill>
+                          <a:latin typeface="Calibri" pitchFamily="34" charset="0"/>
+                          <a:ea typeface="Calibri" pitchFamily="34" charset="-122"/>
+                          <a:cs typeface="Calibri" pitchFamily="34" charset="-120"/>
+                        </a:rPr>
+                        <a:t>−11.1%</a:t>
+                      </a:r>
+                      <a:endParaRPr lang="en-US" sz="1300" dirty="0">
+                        <a:latin typeface="Calibri" charset="0"/>
+                        <a:ea typeface="Calibri" charset="0"/>
+                        <a:cs typeface="Calibri" charset="0"/>
+                      </a:endParaRPr>
+                    </a:p>
+                  </a:txBody>
+                  <a:tcPr marL="73152" marR="73152" marT="36576" marB="36576">
+                    <a:lnL w="6350" cap="flat" cmpd="sng" algn="ctr">
+                      <a:solidFill>
+                        <a:srgbClr val="1A2233"/>
+                      </a:solidFill>
+                      <a:prstDash val="solid"/>
+                      <a:round/>
+                      <a:headEnd type="none" w="med" len="med"/>
+                      <a:tailEnd type="none" w="med" len="med"/>
+                    </a:lnL>
+                    <a:lnR w="6350" cap="flat" cmpd="sng" algn="ctr">
+                      <a:solidFill>
+                        <a:srgbClr val="1A2233"/>
+                      </a:solidFill>
+                      <a:prstDash val="solid"/>
+                      <a:round/>
+                      <a:headEnd type="none" w="med" len="med"/>
+                      <a:tailEnd type="none" w="med" len="med"/>
+                    </a:lnR>
+                    <a:lnT w="6350" cap="flat" cmpd="sng" algn="ctr">
+                      <a:solidFill>
+                        <a:srgbClr val="1A2233"/>
+                      </a:solidFill>
+                      <a:prstDash val="solid"/>
+                      <a:round/>
+                      <a:headEnd type="none" w="med" len="med"/>
+                      <a:tailEnd type="none" w="med" len="med"/>
+                    </a:lnT>
+                    <a:lnB w="6350" cap="flat" cmpd="sng" algn="ctr">
+                      <a:solidFill>
+                        <a:srgbClr val="1A2233"/>
+                      </a:solidFill>
+                      <a:prstDash val="solid"/>
+                      <a:round/>
+                      <a:headEnd type="none" w="med" len="med"/>
+                      <a:tailEnd type="none" w="med" len="med"/>
+                    </a:lnB>
+                    <a:solidFill>
+                      <a:srgbClr val="0B0F17"/>
+                    </a:solidFill>
+                  </a:tcPr>
+                </a:tc>
+                <a:tc>
+                  <a:txBody>
+                    <a:bodyPr/>
+                    <a:lstStyle/>
+                    <a:p>
+                      <a:pPr algn="r" indent="0" marL="0">
+                        <a:buNone/>
+                      </a:pPr>
+                      <a:r>
+                        <a:rPr lang="en-US" sz="1300" dirty="0">
+                          <a:solidFill>
+                            <a:srgbClr val="E6EDF7"/>
+                          </a:solidFill>
+                          <a:latin typeface="Calibri" pitchFamily="34" charset="0"/>
+                          <a:ea typeface="Calibri" pitchFamily="34" charset="-122"/>
+                          <a:cs typeface="Calibri" pitchFamily="34" charset="-120"/>
+                        </a:rPr>
+                        <a:t>−13.6%</a:t>
+                      </a:r>
+                      <a:endParaRPr lang="en-US" sz="1300" dirty="0">
+                        <a:latin typeface="Calibri" charset="0"/>
+                        <a:ea typeface="Calibri" charset="0"/>
+                        <a:cs typeface="Calibri" charset="0"/>
+                      </a:endParaRPr>
+                    </a:p>
+                  </a:txBody>
+                  <a:tcPr marL="73152" marR="73152" marT="36576" marB="36576">
+                    <a:lnL w="6350" cap="flat" cmpd="sng" algn="ctr">
+                      <a:solidFill>
+                        <a:srgbClr val="1A2233"/>
+                      </a:solidFill>
+                      <a:prstDash val="solid"/>
+                      <a:round/>
+                      <a:headEnd type="none" w="med" len="med"/>
+                      <a:tailEnd type="none" w="med" len="med"/>
+                    </a:lnL>
+                    <a:lnR w="6350" cap="flat" cmpd="sng" algn="ctr">
+                      <a:solidFill>
+                        <a:srgbClr val="1A2233"/>
+                      </a:solidFill>
+                      <a:prstDash val="solid"/>
+                      <a:round/>
+                      <a:headEnd type="none" w="med" len="med"/>
+                      <a:tailEnd type="none" w="med" len="med"/>
+                    </a:lnR>
+                    <a:lnT w="6350" cap="flat" cmpd="sng" algn="ctr">
+                      <a:solidFill>
+                        <a:srgbClr val="1A2233"/>
+                      </a:solidFill>
+                      <a:prstDash val="solid"/>
+                      <a:round/>
+                      <a:headEnd type="none" w="med" len="med"/>
+                      <a:tailEnd type="none" w="med" len="med"/>
+                    </a:lnT>
+                    <a:lnB w="6350" cap="flat" cmpd="sng" algn="ctr">
+                      <a:solidFill>
+                        <a:srgbClr val="1A2233"/>
+                      </a:solidFill>
+                      <a:prstDash val="solid"/>
+                      <a:round/>
+                      <a:headEnd type="none" w="med" len="med"/>
+                      <a:tailEnd type="none" w="med" len="med"/>
+                    </a:lnB>
+                    <a:solidFill>
+                      <a:srgbClr val="0B0F17"/>
+                    </a:solidFill>
+                  </a:tcPr>
+                </a:tc>
+              </a:tr>
+            </a:tbl>
+          </a:graphicData>
+        </a:graphic>
+      </p:graphicFrame>
+      <p:sp>
+        <p:nvSpPr>
+          <p:cNvPr id="8" name="Text 5"/>
+          <p:cNvSpPr txBox="1"/>
+          <p:nvPr/>
+        </p:nvSpPr>
+        <p:spPr>
+          <a:xfrm>
+            <a:off x="548640" y="4434840"/>
+            <a:ext cx="11094415" cy="1234440"/>
+          </a:xfrm>
+          <a:prstGeom prst="rect">
+            <a:avLst/>
+          </a:prstGeom>
+          <a:noFill/>
+          <a:ln/>
+        </p:spPr>
+        <p:txBody>
+          <a:bodyPr wrap="square" lIns="0" tIns="0" rIns="0" bIns="0" rtlCol="0" anchor="t"/>
+          <a:lstStyle/>
+          <a:p>
+            <a:pPr marL="342900" indent="-342900">
+              <a:spcAft>
+                <a:spcPts val="400"/>
+              </a:spcAft>
+              <a:buSzPct val="100000"/>
+              <a:buChar char="•"/>
+            </a:pPr>
+            <a:r>
+              <a:rPr lang="en-US" sz="1400" dirty="0">
+                <a:solidFill>
+                  <a:schemeClr val="bg1"/>
+                </a:solidFill>
+                <a:latin typeface="Calibri" pitchFamily="34" charset="0"/>
+                <a:ea typeface="Calibri" pitchFamily="34" charset="-122"/>
+                <a:cs typeface="Calibri" pitchFamily="34" charset="-120"/>
+              </a:rPr>
+              <a:t>SA vs Baseline on train (in-sample): −13.6%, so in-sample → held-out shrinkage is 2.5 percentage points</a:t>
             </a:r>
             <a:endParaRPr lang="en-US" sz="1400" dirty="0"/>
+          </a:p>
+          <a:p>
+            <a:pPr marL="342900" indent="-342900">
+              <a:spcAft>
+                <a:spcPts val="400"/>
+              </a:spcAft>
+              <a:buSzPct val="100000"/>
+              <a:buChar char="•"/>
+            </a:pPr>
+            <a:r>
+              <a:rPr lang="en-US" sz="1400" dirty="0">
+                <a:solidFill>
+                  <a:schemeClr val="bg1"/>
+                </a:solidFill>
+                <a:latin typeface="Calibri" pitchFamily="34" charset="0"/>
+                <a:ea typeface="Calibri" pitchFamily="34" charset="-122"/>
+                <a:cs typeface="Calibri" pitchFamily="34" charset="-120"/>
+              </a:rPr>
+              <a:t>Baseline vs Original, held-out: −3.9% (105.75 km → 101.67 km)</a:t>
+            </a:r>
+            <a:endParaRPr lang="en-US" sz="1400" dirty="0"/>
+          </a:p>
+          <a:p>
+            <a:pPr marL="342900" indent="-342900">
+              <a:spcAft>
+                <a:spcPts val="400"/>
+              </a:spcAft>
+              <a:buSzPct val="100000"/>
+              <a:buChar char="•"/>
+            </a:pPr>
+            <a:r>
+              <a:rPr lang="en-US" sz="1400" dirty="0">
+                <a:solidFill>
+                  <a:schemeClr val="bg1"/>
+                </a:solidFill>
+                <a:latin typeface="Calibri" pitchFamily="34" charset="0"/>
+                <a:ea typeface="Calibri" pitchFamily="34" charset="-122"/>
+                <a:cs typeface="Calibri" pitchFamily="34" charset="-120"/>
+              </a:rPr>
+              <a:t>SA over seeds 42, 43, 44, 45, 46: held-out Δ vs Baseline −10.0% ± 0.9 pp (mean ± sd)</a:t>
+            </a:r>
+            <a:endParaRPr lang="en-US" sz="1400" dirty="0"/>
+          </a:p>
+          <a:p>
+            <a:pPr marL="342900" indent="-342900">
+              <a:spcAft>
+                <a:spcPts val="400"/>
+              </a:spcAft>
+              <a:buSzPct val="100000"/>
+              <a:buChar char="•"/>
+            </a:pPr>
+            <a:r>
+              <a:rPr lang="en-US" sz="1400" dirty="0">
+                <a:solidFill>
+                  <a:schemeClr val="bg1"/>
+                </a:solidFill>
+                <a:latin typeface="Calibri" pitchFamily="34" charset="0"/>
+                <a:ea typeface="Calibri" pitchFamily="34" charset="-122"/>
+                <a:cs typeface="Calibri" pitchFamily="34" charset="-120"/>
+              </a:rPr>
+              <a:t>S-shape routing (ablation): Δ held-out vs Baseline (S-shape): −12.8%</a:t>
+            </a:r>
+            <a:endParaRPr lang="en-US" sz="1400" dirty="0"/>
+          </a:p>
+        </p:txBody>
+      </p:sp>
+      <p:sp>
+        <p:nvSpPr>
+          <p:cNvPr id="9" name="Text 6"/>
+          <p:cNvSpPr txBox="1"/>
+          <p:nvPr/>
+        </p:nvSpPr>
+        <p:spPr>
+          <a:xfrm>
+            <a:off x="548640" y="5760720"/>
+            <a:ext cx="11094415" cy="365760"/>
+          </a:xfrm>
+          <a:prstGeom prst="rect">
+            <a:avLst/>
+          </a:prstGeom>
+          <a:noFill/>
+          <a:ln/>
+        </p:spPr>
+        <p:txBody>
+          <a:bodyPr wrap="square" lIns="0" tIns="0" rIns="0" bIns="0" rtlCol="0" anchor="t"/>
+          <a:lstStyle/>
+          <a:p>
+            <a:pPr indent="0" marL="0">
+              <a:buNone/>
+            </a:pPr>
+            <a:r>
+              <a:rPr lang="en-US" sz="1100" i="1" dirty="0">
+                <a:solidFill>
+                  <a:schemeClr val="bg2"/>
+                </a:solidFill>
+                <a:latin typeface="Calibri" pitchFamily="34" charset="0"/>
+                <a:ea typeface="Calibri" pitchFamily="34" charset="-122"/>
+                <a:cs typeface="Calibri" pitchFamily="34" charset="-120"/>
+              </a:rPr>
+              <a:t>Copied from eval/results.md, produced by npm run eval with the same engine as the app. No number on this slide is typed by hand.</a:t>
+            </a:r>
+            <a:endParaRPr lang="en-US" sz="1100" dirty="0"/>
           </a:p>
         </p:txBody>
       </p:sp>

--- a/docs/pitch/Ghostwalk_pitch.pptx
+++ b/docs/pitch/Ghostwalk_pitch.pptx
@@ -118,14 +118,14 @@
   <p:extLst>
     <p:ext uri="{521415D9-36F7-43E2-AB2F-B90AF26B5E84}">
       <p14:sectionLst xmlns:p14="http://schemas.microsoft.com/office/powerpoint/2010/main">
-        <p14:section name="Problem" id="{54f7f4bf-2504-dd7f-81ef-d7ee17f3c9f3}">
+        <p14:section name="Problem" id="{8b9e4015-7b20-1162-0736-6ddc12ed28bf}">
           <p14:sldIdLst>
             <p14:sldId id="256"/>
             <p14:sldId id="257"/>
             <p14:sldId id="258"/>
           </p14:sldIdLst>
         </p14:section>
-        <p14:section name="Solution" id="{2baf3c19-d19d-31da-0801-3bdf2346172d}">
+        <p14:section name="Solution" id="{e633ba4b-c8e9-8498-3fc4-90b074436c19}">
           <p14:sldIdLst>
             <p14:sldId id="259"/>
             <p14:sldId id="260"/>
@@ -134,14 +134,14 @@
             <p14:sldId id="263"/>
           </p14:sldIdLst>
         </p14:section>
-        <p14:section name="Evidence" id="{6c2011a5-732b-9819-fc4b-b37209c61794}">
+        <p14:section name="Evidence" id="{9596606c-c448-4125-a059-10013d6df4e9}">
           <p14:sldIdLst>
             <p14:sldId id="264"/>
             <p14:sldId id="265"/>
             <p14:sldId id="266"/>
           </p14:sldIdLst>
         </p14:section>
-        <p14:section name="Close" id="{4452cb72-1316-5064-cf60-720b0125ceb0}">
+        <p14:section name="Close" id="{3774c6ce-7c0b-010c-ae97-0ab15fc15065}">
           <p14:sldIdLst>
             <p14:sldId id="267"/>
           </p14:sldIdLst>
@@ -583,307 +583,307 @@
                 <c:formatCode>General</c:formatCode>
                 <c:ptCount val="101"/>
                 <c:pt idx="0">
-                  <c:v>92.518</c:v>
+                  <c:v>92.2</c:v>
                 </c:pt>
                 <c:pt idx="1">
-                  <c:v>91.107</c:v>
+                  <c:v>91.799</c:v>
                 </c:pt>
                 <c:pt idx="2">
-                  <c:v>91.971</c:v>
+                  <c:v>90.929</c:v>
                 </c:pt>
                 <c:pt idx="3">
-                  <c:v>90.788</c:v>
+                  <c:v>91.085</c:v>
                 </c:pt>
                 <c:pt idx="4">
-                  <c:v>90.876</c:v>
+                  <c:v>90.48</c:v>
                 </c:pt>
                 <c:pt idx="5">
-                  <c:v>90.306</c:v>
+                  <c:v>89.86</c:v>
                 </c:pt>
                 <c:pt idx="6">
-                  <c:v>89.059</c:v>
+                  <c:v>88.002</c:v>
                 </c:pt>
                 <c:pt idx="7">
-                  <c:v>89.502</c:v>
+                  <c:v>89.408</c:v>
                 </c:pt>
                 <c:pt idx="8">
-                  <c:v>89.776</c:v>
+                  <c:v>89.027</c:v>
                 </c:pt>
                 <c:pt idx="9">
-                  <c:v>87.851</c:v>
+                  <c:v>88.317</c:v>
                 </c:pt>
                 <c:pt idx="10">
-                  <c:v>88.265</c:v>
+                  <c:v>86.832</c:v>
                 </c:pt>
                 <c:pt idx="11">
-                  <c:v>87.291</c:v>
+                  <c:v>85.997</c:v>
                 </c:pt>
                 <c:pt idx="12">
-                  <c:v>86.903</c:v>
+                  <c:v>85.946</c:v>
                 </c:pt>
                 <c:pt idx="13">
-                  <c:v>86.828</c:v>
+                  <c:v>84.449</c:v>
                 </c:pt>
                 <c:pt idx="14">
-                  <c:v>87.036</c:v>
+                  <c:v>84.859</c:v>
                 </c:pt>
                 <c:pt idx="15">
-                  <c:v>86.892</c:v>
+                  <c:v>84.839</c:v>
                 </c:pt>
                 <c:pt idx="16">
-                  <c:v>85.638</c:v>
+                  <c:v>84.49</c:v>
                 </c:pt>
                 <c:pt idx="17">
-                  <c:v>85.182</c:v>
+                  <c:v>84.249</c:v>
                 </c:pt>
                 <c:pt idx="18">
-                  <c:v>84.719</c:v>
+                  <c:v>84.056</c:v>
                 </c:pt>
                 <c:pt idx="19">
-                  <c:v>84.276</c:v>
+                  <c:v>83.944</c:v>
                 </c:pt>
                 <c:pt idx="20">
-                  <c:v>83.994</c:v>
+                  <c:v>83.476</c:v>
                 </c:pt>
                 <c:pt idx="21">
-                  <c:v>83.434</c:v>
+                  <c:v>83.549</c:v>
                 </c:pt>
                 <c:pt idx="22">
-                  <c:v>83.244</c:v>
+                  <c:v>83.264</c:v>
                 </c:pt>
                 <c:pt idx="23">
-                  <c:v>82.869</c:v>
+                  <c:v>83.086</c:v>
                 </c:pt>
                 <c:pt idx="24">
-                  <c:v>82.62</c:v>
+                  <c:v>82.6</c:v>
                 </c:pt>
                 <c:pt idx="25">
-                  <c:v>82.535</c:v>
+                  <c:v>82.24</c:v>
                 </c:pt>
                 <c:pt idx="26">
-                  <c:v>82.188</c:v>
+                  <c:v>82.172</c:v>
                 </c:pt>
                 <c:pt idx="27">
-                  <c:v>82.251</c:v>
+                  <c:v>82.267</c:v>
                 </c:pt>
                 <c:pt idx="28">
-                  <c:v>81.888</c:v>
+                  <c:v>82.128</c:v>
                 </c:pt>
                 <c:pt idx="29">
-                  <c:v>81.678</c:v>
+                  <c:v>81.807</c:v>
                 </c:pt>
                 <c:pt idx="30">
-                  <c:v>81.541</c:v>
+                  <c:v>81.61</c:v>
                 </c:pt>
                 <c:pt idx="31">
-                  <c:v>81.372</c:v>
+                  <c:v>81.41</c:v>
                 </c:pt>
                 <c:pt idx="32">
-                  <c:v>81.25</c:v>
+                  <c:v>81.374</c:v>
                 </c:pt>
                 <c:pt idx="33">
-                  <c:v>81.362</c:v>
+                  <c:v>81.26</c:v>
                 </c:pt>
                 <c:pt idx="34">
-                  <c:v>81.224</c:v>
+                  <c:v>81.208</c:v>
                 </c:pt>
                 <c:pt idx="35">
-                  <c:v>81.173</c:v>
+                  <c:v>81.19</c:v>
                 </c:pt>
                 <c:pt idx="36">
-                  <c:v>81.188</c:v>
+                  <c:v>81.183</c:v>
                 </c:pt>
                 <c:pt idx="37">
-                  <c:v>81.105</c:v>
+                  <c:v>81.159</c:v>
                 </c:pt>
                 <c:pt idx="38">
-                  <c:v>80.926</c:v>
+                  <c:v>81.1</c:v>
                 </c:pt>
                 <c:pt idx="39">
-                  <c:v>80.9</c:v>
+                  <c:v>81.028</c:v>
                 </c:pt>
                 <c:pt idx="40">
-                  <c:v>80.783</c:v>
+                  <c:v>80.894</c:v>
                 </c:pt>
                 <c:pt idx="41">
-                  <c:v>80.694</c:v>
+                  <c:v>80.86</c:v>
                 </c:pt>
                 <c:pt idx="42">
-                  <c:v>80.65</c:v>
+                  <c:v>80.743</c:v>
                 </c:pt>
                 <c:pt idx="43">
-                  <c:v>80.456</c:v>
+                  <c:v>80.647</c:v>
                 </c:pt>
                 <c:pt idx="44">
-                  <c:v>80.403</c:v>
+                  <c:v>80.588</c:v>
                 </c:pt>
                 <c:pt idx="45">
-                  <c:v>80.42</c:v>
+                  <c:v>80.528</c:v>
                 </c:pt>
                 <c:pt idx="46">
-                  <c:v>80.393</c:v>
+                  <c:v>80.516</c:v>
                 </c:pt>
                 <c:pt idx="47">
-                  <c:v>80.369</c:v>
+                  <c:v>80.517</c:v>
                 </c:pt>
                 <c:pt idx="48">
-                  <c:v>80.374</c:v>
+                  <c:v>80.481</c:v>
                 </c:pt>
                 <c:pt idx="49">
-                  <c:v>80.364</c:v>
+                  <c:v>80.454</c:v>
                 </c:pt>
                 <c:pt idx="50">
-                  <c:v>80.356</c:v>
+                  <c:v>80.439</c:v>
                 </c:pt>
                 <c:pt idx="51">
-                  <c:v>80.318</c:v>
+                  <c:v>80.409</c:v>
                 </c:pt>
                 <c:pt idx="52">
-                  <c:v>80.28</c:v>
+                  <c:v>80.358</c:v>
                 </c:pt>
                 <c:pt idx="53">
-                  <c:v>80.262</c:v>
+                  <c:v>80.338</c:v>
                 </c:pt>
                 <c:pt idx="54">
-                  <c:v>80.244</c:v>
+                  <c:v>80.328</c:v>
                 </c:pt>
                 <c:pt idx="55">
-                  <c:v>80.225</c:v>
+                  <c:v>80.311</c:v>
                 </c:pt>
                 <c:pt idx="56">
-                  <c:v>80.2</c:v>
+                  <c:v>80.306</c:v>
                 </c:pt>
                 <c:pt idx="57">
-                  <c:v>80.139</c:v>
+                  <c:v>80.301</c:v>
                 </c:pt>
                 <c:pt idx="58">
-                  <c:v>80.141</c:v>
+                  <c:v>80.296</c:v>
                 </c:pt>
                 <c:pt idx="59">
-                  <c:v>80.141</c:v>
+                  <c:v>80.296</c:v>
                 </c:pt>
                 <c:pt idx="60">
-                  <c:v>80.13</c:v>
+                  <c:v>80.299</c:v>
                 </c:pt>
                 <c:pt idx="61">
-                  <c:v>80.125</c:v>
+                  <c:v>80.294</c:v>
                 </c:pt>
                 <c:pt idx="62">
-                  <c:v>80.099</c:v>
+                  <c:v>80.294</c:v>
                 </c:pt>
                 <c:pt idx="63">
-                  <c:v>80.064</c:v>
+                  <c:v>80.277</c:v>
                 </c:pt>
                 <c:pt idx="64">
-                  <c:v>80.064</c:v>
+                  <c:v>80.253</c:v>
                 </c:pt>
                 <c:pt idx="65">
-                  <c:v>80.064</c:v>
+                  <c:v>80.226</c:v>
                 </c:pt>
                 <c:pt idx="66">
-                  <c:v>80.06</c:v>
+                  <c:v>80.226</c:v>
                 </c:pt>
                 <c:pt idx="67">
-                  <c:v>80.059</c:v>
+                  <c:v>80.205</c:v>
                 </c:pt>
                 <c:pt idx="68">
-                  <c:v>80.041</c:v>
+                  <c:v>80.155</c:v>
                 </c:pt>
                 <c:pt idx="69">
-                  <c:v>80.031</c:v>
+                  <c:v>80.138</c:v>
                 </c:pt>
                 <c:pt idx="70">
+                  <c:v>80.138</c:v>
+                </c:pt>
+                <c:pt idx="71">
+                  <c:v>80.1</c:v>
+                </c:pt>
+                <c:pt idx="72">
+                  <c:v>80.1</c:v>
+                </c:pt>
+                <c:pt idx="73">
+                  <c:v>80.086</c:v>
+                </c:pt>
+                <c:pt idx="74">
+                  <c:v>80.08</c:v>
+                </c:pt>
+                <c:pt idx="75">
+                  <c:v>80.05</c:v>
+                </c:pt>
+                <c:pt idx="76">
+                  <c:v>80.049</c:v>
+                </c:pt>
+                <c:pt idx="77">
                   <c:v>80.034</c:v>
                 </c:pt>
-                <c:pt idx="71">
-                  <c:v>80.017</c:v>
-                </c:pt>
-                <c:pt idx="72">
-                  <c:v>80.008</c:v>
-                </c:pt>
-                <c:pt idx="73">
-                  <c:v>80.008</c:v>
-                </c:pt>
-                <c:pt idx="74">
-                  <c:v>79.989</c:v>
-                </c:pt>
-                <c:pt idx="75">
-                  <c:v>79.989</c:v>
-                </c:pt>
-                <c:pt idx="76">
-                  <c:v>79.986</c:v>
-                </c:pt>
-                <c:pt idx="77">
-                  <c:v>79.979</c:v>
-                </c:pt>
                 <c:pt idx="78">
-                  <c:v>79.969</c:v>
+                  <c:v>80.025</c:v>
                 </c:pt>
                 <c:pt idx="79">
-                  <c:v>79.966</c:v>
+                  <c:v>80.025</c:v>
                 </c:pt>
                 <c:pt idx="80">
-                  <c:v>79.966</c:v>
+                  <c:v>80.024</c:v>
                 </c:pt>
                 <c:pt idx="81">
-                  <c:v>79.959</c:v>
+                  <c:v>80.018</c:v>
                 </c:pt>
                 <c:pt idx="82">
-                  <c:v>79.959</c:v>
+                  <c:v>80.018</c:v>
                 </c:pt>
                 <c:pt idx="83">
-                  <c:v>79.948</c:v>
+                  <c:v>80.006</c:v>
                 </c:pt>
                 <c:pt idx="84">
-                  <c:v>79.94</c:v>
+                  <c:v>79.972</c:v>
                 </c:pt>
                 <c:pt idx="85">
-                  <c:v>79.94</c:v>
+                  <c:v>79.972</c:v>
                 </c:pt>
                 <c:pt idx="86">
-                  <c:v>79.94</c:v>
+                  <c:v>79.931</c:v>
                 </c:pt>
                 <c:pt idx="87">
-                  <c:v>79.937</c:v>
+                  <c:v>79.931</c:v>
                 </c:pt>
                 <c:pt idx="88">
-                  <c:v>79.937</c:v>
+                  <c:v>79.931</c:v>
                 </c:pt>
                 <c:pt idx="89">
-                  <c:v>79.937</c:v>
+                  <c:v>79.931</c:v>
                 </c:pt>
                 <c:pt idx="90">
-                  <c:v>79.937</c:v>
+                  <c:v>79.929</c:v>
                 </c:pt>
                 <c:pt idx="91">
-                  <c:v>79.937</c:v>
+                  <c:v>79.929</c:v>
                 </c:pt>
                 <c:pt idx="92">
-                  <c:v>79.937</c:v>
+                  <c:v>79.929</c:v>
                 </c:pt>
                 <c:pt idx="93">
-                  <c:v>79.937</c:v>
+                  <c:v>79.93</c:v>
                 </c:pt>
                 <c:pt idx="94">
-                  <c:v>79.937</c:v>
+                  <c:v>79.93</c:v>
                 </c:pt>
                 <c:pt idx="95">
-                  <c:v>79.937</c:v>
+                  <c:v>79.92</c:v>
                 </c:pt>
                 <c:pt idx="96">
-                  <c:v>79.937</c:v>
+                  <c:v>79.92</c:v>
                 </c:pt>
                 <c:pt idx="97">
-                  <c:v>79.937</c:v>
+                  <c:v>79.92</c:v>
                 </c:pt>
                 <c:pt idx="98">
-                  <c:v>79.937</c:v>
+                  <c:v>79.92</c:v>
                 </c:pt>
                 <c:pt idx="99">
-                  <c:v>79.937</c:v>
+                  <c:v>79.92</c:v>
                 </c:pt>
                 <c:pt idx="100">
-                  <c:v>79.937</c:v>
+                  <c:v>79.914</c:v>
                 </c:pt>
               </c:numCache>
             </c:numRef>
@@ -1279,307 +1279,307 @@
                 <c:formatCode>General</c:formatCode>
                 <c:ptCount val="101"/>
                 <c:pt idx="0">
-                  <c:v>92.518</c:v>
+                  <c:v>92.2</c:v>
                 </c:pt>
                 <c:pt idx="1">
-                  <c:v>90.494</c:v>
+                  <c:v>90.792</c:v>
                 </c:pt>
                 <c:pt idx="2">
-                  <c:v>90.494</c:v>
+                  <c:v>90.46</c:v>
                 </c:pt>
                 <c:pt idx="3">
-                  <c:v>90.494</c:v>
+                  <c:v>90.278</c:v>
                 </c:pt>
                 <c:pt idx="4">
-                  <c:v>89.37</c:v>
+                  <c:v>89.389</c:v>
                 </c:pt>
                 <c:pt idx="5">
-                  <c:v>89.37</c:v>
+                  <c:v>88.491</c:v>
                 </c:pt>
                 <c:pt idx="6">
-                  <c:v>88.408</c:v>
+                  <c:v>87.351</c:v>
                 </c:pt>
                 <c:pt idx="7">
-                  <c:v>87.784</c:v>
+                  <c:v>87.351</c:v>
                 </c:pt>
                 <c:pt idx="8">
-                  <c:v>87.784</c:v>
+                  <c:v>87.351</c:v>
                 </c:pt>
                 <c:pt idx="9">
-                  <c:v>87.784</c:v>
+                  <c:v>87.351</c:v>
                 </c:pt>
                 <c:pt idx="10">
-                  <c:v>87.574</c:v>
+                  <c:v>86.651</c:v>
                 </c:pt>
                 <c:pt idx="11">
-                  <c:v>87.22</c:v>
+                  <c:v>85.767</c:v>
                 </c:pt>
                 <c:pt idx="12">
-                  <c:v>86.815</c:v>
+                  <c:v>85.559</c:v>
                 </c:pt>
                 <c:pt idx="13">
-                  <c:v>86.603</c:v>
+                  <c:v>84.402</c:v>
                 </c:pt>
                 <c:pt idx="14">
-                  <c:v>86.603</c:v>
+                  <c:v>83.936</c:v>
                 </c:pt>
                 <c:pt idx="15">
-                  <c:v>86.603</c:v>
+                  <c:v>83.936</c:v>
                 </c:pt>
                 <c:pt idx="16">
-                  <c:v>85.567</c:v>
+                  <c:v>83.936</c:v>
                 </c:pt>
                 <c:pt idx="17">
-                  <c:v>85.154</c:v>
+                  <c:v>83.936</c:v>
                 </c:pt>
                 <c:pt idx="18">
-                  <c:v>84.591</c:v>
+                  <c:v>83.936</c:v>
                 </c:pt>
                 <c:pt idx="19">
-                  <c:v>84.273</c:v>
+                  <c:v>83.851</c:v>
                 </c:pt>
                 <c:pt idx="20">
-                  <c:v>83.981</c:v>
+                  <c:v>83.476</c:v>
                 </c:pt>
                 <c:pt idx="21">
-                  <c:v>83.337</c:v>
+                  <c:v>83.18</c:v>
                 </c:pt>
                 <c:pt idx="22">
-                  <c:v>83.136</c:v>
+                  <c:v>83.135</c:v>
                 </c:pt>
                 <c:pt idx="23">
-                  <c:v>82.869</c:v>
+                  <c:v>83.017</c:v>
                 </c:pt>
                 <c:pt idx="24">
-                  <c:v>82.606</c:v>
+                  <c:v>82.6</c:v>
                 </c:pt>
                 <c:pt idx="25">
-                  <c:v>82.47</c:v>
+                  <c:v>82.198</c:v>
                 </c:pt>
                 <c:pt idx="26">
-                  <c:v>82.188</c:v>
+                  <c:v>82.172</c:v>
                 </c:pt>
                 <c:pt idx="27">
-                  <c:v>82.13</c:v>
+                  <c:v>82.138</c:v>
                 </c:pt>
                 <c:pt idx="28">
-                  <c:v>81.888</c:v>
+                  <c:v>82.128</c:v>
                 </c:pt>
                 <c:pt idx="29">
-                  <c:v>81.678</c:v>
+                  <c:v>81.807</c:v>
                 </c:pt>
                 <c:pt idx="30">
-                  <c:v>81.541</c:v>
+                  <c:v>81.61</c:v>
                 </c:pt>
                 <c:pt idx="31">
-                  <c:v>81.372</c:v>
+                  <c:v>81.389</c:v>
                 </c:pt>
                 <c:pt idx="32">
-                  <c:v>81.22</c:v>
+                  <c:v>81.357</c:v>
                 </c:pt>
                 <c:pt idx="33">
-                  <c:v>81.22</c:v>
+                  <c:v>81.238</c:v>
                 </c:pt>
                 <c:pt idx="34">
-                  <c:v>81.215</c:v>
+                  <c:v>81.208</c:v>
                 </c:pt>
                 <c:pt idx="35">
-                  <c:v>81.164</c:v>
+                  <c:v>81.174</c:v>
                 </c:pt>
                 <c:pt idx="36">
-                  <c:v>81.164</c:v>
+                  <c:v>81.174</c:v>
                 </c:pt>
                 <c:pt idx="37">
-                  <c:v>81.088</c:v>
+                  <c:v>81.142</c:v>
                 </c:pt>
                 <c:pt idx="38">
-                  <c:v>80.901</c:v>
+                  <c:v>81.085</c:v>
                 </c:pt>
                 <c:pt idx="39">
-                  <c:v>80.9</c:v>
+                  <c:v>81.028</c:v>
                 </c:pt>
                 <c:pt idx="40">
-                  <c:v>80.783</c:v>
+                  <c:v>80.894</c:v>
                 </c:pt>
                 <c:pt idx="41">
-                  <c:v>80.682</c:v>
+                  <c:v>80.86</c:v>
                 </c:pt>
                 <c:pt idx="42">
-                  <c:v>80.65</c:v>
+                  <c:v>80.743</c:v>
                 </c:pt>
                 <c:pt idx="43">
-                  <c:v>80.456</c:v>
+                  <c:v>80.644</c:v>
                 </c:pt>
                 <c:pt idx="44">
+                  <c:v>80.577</c:v>
+                </c:pt>
+                <c:pt idx="45">
+                  <c:v>80.516</c:v>
+                </c:pt>
+                <c:pt idx="46">
+                  <c:v>80.516</c:v>
+                </c:pt>
+                <c:pt idx="47">
+                  <c:v>80.514</c:v>
+                </c:pt>
+                <c:pt idx="48">
+                  <c:v>80.479</c:v>
+                </c:pt>
+                <c:pt idx="49">
+                  <c:v>80.443</c:v>
+                </c:pt>
+                <c:pt idx="50">
+                  <c:v>80.439</c:v>
+                </c:pt>
+                <c:pt idx="51">
                   <c:v>80.403</c:v>
                 </c:pt>
-                <c:pt idx="45">
-                  <c:v>80.403</c:v>
-                </c:pt>
-                <c:pt idx="46">
-                  <c:v>80.393</c:v>
-                </c:pt>
-                <c:pt idx="47">
-                  <c:v>80.357</c:v>
-                </c:pt>
-                <c:pt idx="48">
-                  <c:v>80.357</c:v>
-                </c:pt>
-                <c:pt idx="49">
-                  <c:v>80.357</c:v>
-                </c:pt>
-                <c:pt idx="50">
-                  <c:v>80.356</c:v>
-                </c:pt>
-                <c:pt idx="51">
-                  <c:v>80.304</c:v>
-                </c:pt>
                 <c:pt idx="52">
-                  <c:v>80.28</c:v>
+                  <c:v>80.358</c:v>
                 </c:pt>
                 <c:pt idx="53">
-                  <c:v>80.252</c:v>
+                  <c:v>80.331</c:v>
                 </c:pt>
                 <c:pt idx="54">
-                  <c:v>80.244</c:v>
+                  <c:v>80.328</c:v>
                 </c:pt>
                 <c:pt idx="55">
-                  <c:v>80.225</c:v>
+                  <c:v>80.308</c:v>
                 </c:pt>
                 <c:pt idx="56">
-                  <c:v>80.2</c:v>
+                  <c:v>80.306</c:v>
                 </c:pt>
                 <c:pt idx="57">
-                  <c:v>80.139</c:v>
+                  <c:v>80.301</c:v>
                 </c:pt>
                 <c:pt idx="58">
-                  <c:v>80.139</c:v>
+                  <c:v>80.296</c:v>
                 </c:pt>
                 <c:pt idx="59">
-                  <c:v>80.139</c:v>
+                  <c:v>80.296</c:v>
                 </c:pt>
                 <c:pt idx="60">
-                  <c:v>80.13</c:v>
+                  <c:v>80.296</c:v>
                 </c:pt>
                 <c:pt idx="61">
-                  <c:v>80.125</c:v>
+                  <c:v>80.294</c:v>
                 </c:pt>
                 <c:pt idx="62">
-                  <c:v>80.096</c:v>
+                  <c:v>80.294</c:v>
                 </c:pt>
                 <c:pt idx="63">
-                  <c:v>80.064</c:v>
+                  <c:v>80.277</c:v>
                 </c:pt>
                 <c:pt idx="64">
-                  <c:v>80.064</c:v>
+                  <c:v>80.253</c:v>
                 </c:pt>
                 <c:pt idx="65">
-                  <c:v>80.064</c:v>
+                  <c:v>80.226</c:v>
                 </c:pt>
                 <c:pt idx="66">
-                  <c:v>80.06</c:v>
+                  <c:v>80.226</c:v>
                 </c:pt>
                 <c:pt idx="67">
-                  <c:v>80.059</c:v>
+                  <c:v>80.205</c:v>
                 </c:pt>
                 <c:pt idx="68">
-                  <c:v>80.041</c:v>
+                  <c:v>80.155</c:v>
                 </c:pt>
                 <c:pt idx="69">
-                  <c:v>80.031</c:v>
+                  <c:v>80.138</c:v>
                 </c:pt>
                 <c:pt idx="70">
-                  <c:v>80.029</c:v>
+                  <c:v>80.138</c:v>
                 </c:pt>
                 <c:pt idx="71">
-                  <c:v>80.017</c:v>
+                  <c:v>80.1</c:v>
                 </c:pt>
                 <c:pt idx="72">
-                  <c:v>80.008</c:v>
+                  <c:v>80.1</c:v>
                 </c:pt>
                 <c:pt idx="73">
-                  <c:v>80.008</c:v>
+                  <c:v>80.086</c:v>
                 </c:pt>
                 <c:pt idx="74">
-                  <c:v>79.989</c:v>
+                  <c:v>80.08</c:v>
                 </c:pt>
                 <c:pt idx="75">
-                  <c:v>79.989</c:v>
+                  <c:v>80.05</c:v>
                 </c:pt>
                 <c:pt idx="76">
-                  <c:v>79.986</c:v>
+                  <c:v>80.049</c:v>
                 </c:pt>
                 <c:pt idx="77">
-                  <c:v>79.979</c:v>
+                  <c:v>80.034</c:v>
                 </c:pt>
                 <c:pt idx="78">
-                  <c:v>79.969</c:v>
+                  <c:v>80.025</c:v>
                 </c:pt>
                 <c:pt idx="79">
-                  <c:v>79.966</c:v>
+                  <c:v>80.025</c:v>
                 </c:pt>
                 <c:pt idx="80">
-                  <c:v>79.966</c:v>
+                  <c:v>80.024</c:v>
                 </c:pt>
                 <c:pt idx="81">
-                  <c:v>79.959</c:v>
+                  <c:v>80.018</c:v>
                 </c:pt>
                 <c:pt idx="82">
-                  <c:v>79.959</c:v>
+                  <c:v>80.018</c:v>
                 </c:pt>
                 <c:pt idx="83">
-                  <c:v>79.948</c:v>
+                  <c:v>80.006</c:v>
                 </c:pt>
                 <c:pt idx="84">
-                  <c:v>79.94</c:v>
+                  <c:v>79.972</c:v>
                 </c:pt>
                 <c:pt idx="85">
-                  <c:v>79.94</c:v>
+                  <c:v>79.972</c:v>
                 </c:pt>
                 <c:pt idx="86">
-                  <c:v>79.94</c:v>
+                  <c:v>79.931</c:v>
                 </c:pt>
                 <c:pt idx="87">
-                  <c:v>79.937</c:v>
+                  <c:v>79.931</c:v>
                 </c:pt>
                 <c:pt idx="88">
-                  <c:v>79.937</c:v>
+                  <c:v>79.931</c:v>
                 </c:pt>
                 <c:pt idx="89">
-                  <c:v>79.937</c:v>
+                  <c:v>79.931</c:v>
                 </c:pt>
                 <c:pt idx="90">
-                  <c:v>79.937</c:v>
+                  <c:v>79.929</c:v>
                 </c:pt>
                 <c:pt idx="91">
-                  <c:v>79.937</c:v>
+                  <c:v>79.929</c:v>
                 </c:pt>
                 <c:pt idx="92">
-                  <c:v>79.937</c:v>
+                  <c:v>79.929</c:v>
                 </c:pt>
                 <c:pt idx="93">
-                  <c:v>79.937</c:v>
+                  <c:v>79.929</c:v>
                 </c:pt>
                 <c:pt idx="94">
-                  <c:v>79.937</c:v>
+                  <c:v>79.929</c:v>
                 </c:pt>
                 <c:pt idx="95">
-                  <c:v>79.937</c:v>
+                  <c:v>79.92</c:v>
                 </c:pt>
                 <c:pt idx="96">
-                  <c:v>79.937</c:v>
+                  <c:v>79.92</c:v>
                 </c:pt>
                 <c:pt idx="97">
-                  <c:v>79.937</c:v>
+                  <c:v>79.92</c:v>
                 </c:pt>
                 <c:pt idx="98">
-                  <c:v>79.937</c:v>
+                  <c:v>79.92</c:v>
                 </c:pt>
                 <c:pt idx="99">
-                  <c:v>79.937</c:v>
+                  <c:v>79.92</c:v>
                 </c:pt>
                 <c:pt idx="100">
-                  <c:v>79.937</c:v>
+                  <c:v>79.914</c:v>
                 </c:pt>
               </c:numCache>
             </c:numRef>
@@ -13765,7 +13765,7 @@
                           <a:ea typeface="Calibri" pitchFamily="34" charset="-122"/>
                           <a:cs typeface="Calibri" pitchFamily="34" charset="-120"/>
                         </a:rPr>
-                        <a:t>+4.0%</a:t>
+                        <a:t>+4.3%</a:t>
                       </a:r>
                       <a:endParaRPr lang="en-US" sz="1300" dirty="0">
                         <a:latin typeface="Calibri" charset="0"/>
@@ -14243,7 +14243,7 @@
                           <a:ea typeface="Calibri" pitchFamily="34" charset="-122"/>
                           <a:cs typeface="Calibri" pitchFamily="34" charset="-120"/>
                         </a:rPr>
-                        <a:t>+8.0%</a:t>
+                        <a:t>+8.4%</a:t>
                       </a:r>
                       <a:endParaRPr lang="en-US" sz="1300" dirty="0">
                         <a:latin typeface="Calibri" charset="0"/>
@@ -14381,7 +14381,7 @@
                           <a:ea typeface="Calibri" pitchFamily="34" charset="-122"/>
                           <a:cs typeface="Calibri" pitchFamily="34" charset="-120"/>
                         </a:rPr>
-                        <a:t>92.52</a:t>
+                        <a:t>92.20</a:t>
                       </a:r>
                       <a:endParaRPr lang="en-US" sz="1300" dirty="0">
                         <a:latin typeface="Calibri" charset="0"/>
@@ -14449,7 +14449,7 @@
                           <a:ea typeface="Calibri" pitchFamily="34" charset="-122"/>
                           <a:cs typeface="Calibri" pitchFamily="34" charset="-120"/>
                         </a:rPr>
-                        <a:t>101.67</a:t>
+                        <a:t>101.71</a:t>
                       </a:r>
                       <a:endParaRPr lang="en-US" sz="1300" dirty="0">
                         <a:latin typeface="Calibri" charset="0"/>
@@ -14517,7 +14517,7 @@
                           <a:ea typeface="Calibri" pitchFamily="34" charset="-122"/>
                           <a:cs typeface="Calibri" pitchFamily="34" charset="-120"/>
                         </a:rPr>
-                        <a:t>125.2</a:t>
+                        <a:t>125.0</a:t>
                       </a:r>
                       <a:endParaRPr lang="en-US" sz="1300" dirty="0">
                         <a:latin typeface="Calibri" charset="0"/>
@@ -14585,7 +14585,7 @@
                           <a:ea typeface="Calibri" pitchFamily="34" charset="-122"/>
                           <a:cs typeface="Calibri" pitchFamily="34" charset="-120"/>
                         </a:rPr>
-                        <a:t>127.2</a:t>
+                        <a:t>127.3</a:t>
                       </a:r>
                       <a:endParaRPr lang="en-US" sz="1300" dirty="0">
                         <a:latin typeface="Calibri" charset="0"/>
@@ -14859,7 +14859,7 @@
                           <a:ea typeface="Calibri" pitchFamily="34" charset="-122"/>
                           <a:cs typeface="Calibri" pitchFamily="34" charset="-120"/>
                         </a:rPr>
-                        <a:t>79.94</a:t>
+                        <a:t>79.91</a:t>
                       </a:r>
                       <a:endParaRPr lang="en-US" sz="1300" dirty="0">
                         <a:latin typeface="Calibri" charset="0"/>
@@ -14927,7 +14927,7 @@
                           <a:ea typeface="Calibri" pitchFamily="34" charset="-122"/>
                           <a:cs typeface="Calibri" pitchFamily="34" charset="-120"/>
                         </a:rPr>
-                        <a:t>90.38</a:t>
+                        <a:t>90.40</a:t>
                       </a:r>
                       <a:endParaRPr lang="en-US" sz="1300" dirty="0">
                         <a:latin typeface="Calibri" charset="0"/>
@@ -15199,7 +15199,7 @@
                           <a:ea typeface="Calibri" pitchFamily="34" charset="-122"/>
                           <a:cs typeface="Calibri" pitchFamily="34" charset="-120"/>
                         </a:rPr>
-                        <a:t>−13.6%</a:t>
+                        <a:t>−13.3%</a:t>
                       </a:r>
                       <a:endParaRPr lang="en-US" sz="1300" dirty="0">
                         <a:latin typeface="Calibri" charset="0"/>
@@ -15292,7 +15292,7 @@
                 <a:ea typeface="Calibri" pitchFamily="34" charset="-122"/>
                 <a:cs typeface="Calibri" pitchFamily="34" charset="-120"/>
               </a:rPr>
-              <a:t>SA vs Baseline on train (in-sample): −13.6%, so in-sample → held-out shrinkage is 2.5 percentage points</a:t>
+              <a:t>SA vs Baseline on train (in-sample): −13.3%, so in-sample → held-out shrinkage is 2.2 percentage points</a:t>
             </a:r>
             <a:endParaRPr lang="en-US" sz="1400" dirty="0"/>
           </a:p>
@@ -15313,7 +15313,7 @@
                 <a:ea typeface="Calibri" pitchFamily="34" charset="-122"/>
                 <a:cs typeface="Calibri" pitchFamily="34" charset="-120"/>
               </a:rPr>
-              <a:t>Baseline vs Original, held-out: −3.9% (105.75 km → 101.67 km)</a:t>
+              <a:t>Baseline vs Original, held-out: −3.8% (105.75 km → 101.71 km)</a:t>
             </a:r>
             <a:endParaRPr lang="en-US" sz="1400" dirty="0"/>
           </a:p>
@@ -15334,7 +15334,7 @@
                 <a:ea typeface="Calibri" pitchFamily="34" charset="-122"/>
                 <a:cs typeface="Calibri" pitchFamily="34" charset="-120"/>
               </a:rPr>
-              <a:t>SA over seeds 42, 43, 44, 45, 46: held-out Δ vs Baseline −10.0% ± 0.9 pp (mean ± sd)</a:t>
+              <a:t>SA over seeds 42, 43, 44, 45, 46 (all at 30,000 iterations; seed 42 was fixed before the run): held-out Δ vs Baseline −10.0% ± 1.2 pp (mean ± sd)</a:t>
             </a:r>
             <a:endParaRPr lang="en-US" sz="1400" dirty="0"/>
           </a:p>
@@ -15355,7 +15355,7 @@
                 <a:ea typeface="Calibri" pitchFamily="34" charset="-122"/>
                 <a:cs typeface="Calibri" pitchFamily="34" charset="-120"/>
               </a:rPr>
-              <a:t>S-shape routing (ablation): Δ held-out vs Baseline (S-shape): −12.8%</a:t>
+              <a:t>S-shape routing (ablation): Δ held-out vs Baseline (S-shape): −11.8%</a:t>
             </a:r>
             <a:endParaRPr lang="en-US" sz="1400" dirty="0"/>
           </a:p>

--- a/docs/pitch/Ghostwalk_pitch.pptx
+++ b/docs/pitch/Ghostwalk_pitch.pptx
@@ -118,14 +118,14 @@
   <p:extLst>
     <p:ext uri="{521415D9-36F7-43E2-AB2F-B90AF26B5E84}">
       <p14:sectionLst xmlns:p14="http://schemas.microsoft.com/office/powerpoint/2010/main">
-        <p14:section name="Problem" id="{8b9e4015-7b20-1162-0736-6ddc12ed28bf}">
+        <p14:section name="Problem" id="{337044c1-f2fe-fdc9-ba7b-c860ea2f8b45}">
           <p14:sldIdLst>
             <p14:sldId id="256"/>
             <p14:sldId id="257"/>
             <p14:sldId id="258"/>
           </p14:sldIdLst>
         </p14:section>
-        <p14:section name="Solution" id="{e633ba4b-c8e9-8498-3fc4-90b074436c19}">
+        <p14:section name="Solution" id="{f34d8b61-6f6f-b797-811c-cd990afb1b6f}">
           <p14:sldIdLst>
             <p14:sldId id="259"/>
             <p14:sldId id="260"/>
@@ -134,14 +134,14 @@
             <p14:sldId id="263"/>
           </p14:sldIdLst>
         </p14:section>
-        <p14:section name="Evidence" id="{9596606c-c448-4125-a059-10013d6df4e9}">
+        <p14:section name="Evidence" id="{a46b3f44-222b-3f9e-bcef-f36ae170af80}">
           <p14:sldIdLst>
             <p14:sldId id="264"/>
             <p14:sldId id="265"/>
             <p14:sldId id="266"/>
           </p14:sldIdLst>
         </p14:section>
-        <p14:section name="Close" id="{3774c6ce-7c0b-010c-ae97-0ab15fc15065}">
+        <p14:section name="Close" id="{a4e3dfe9-b064-5dfb-e3db-0c3ac15b1e44}">
           <p14:sldIdLst>
             <p14:sldId id="267"/>
           </p14:sldIdLst>
@@ -5542,15 +5542,22 @@
               <a:buNone/>
             </a:pPr>
             <a:r>
-              <a:rPr lang="en-US" sz="1700" b="1" dirty="0">
-                <a:solidFill>
-                  <a:schemeClr val="bg1"/>
+              <a:rPr lang="en-US" sz="1700" b="1" u="sng" dirty="0">
+                <a:solidFill>
+                  <a:schemeClr val="accent2"/>
                 </a:solidFill>
                 <a:latin typeface="Calibri" pitchFamily="34" charset="0"/>
                 <a:ea typeface="Calibri" pitchFamily="34" charset="-122"/>
                 <a:cs typeface="Calibri" pitchFamily="34" charset="-120"/>
+                <a:hlinkClick r:id="rId2" invalidUrl="" action="" tgtFrame="" tooltip="" history="1" highlightClick="0" endSnd="0">
+                  <a:extLst>
+                    <a:ext uri="{A12FA001-AC4F-418D-AE19-62706E023703}">
+                      <ahyp:hlinkClr xmlns:ahyp="http://schemas.microsoft.com/office/drawing/2018/hyperlinkcolor" val="tx"/>
+                    </a:ext>
+                  </a:extLst>
+                </a:hlinkClick>
               </a:rPr>
-              <a:t>pending deploy</a:t>
+              <a:t>ghostwalk-tau.vercel.app</a:t>
             </a:r>
             <a:endParaRPr lang="en-US" sz="1700" dirty="0"/>
           </a:p>
@@ -5919,7 +5926,7 @@
           <p:nvPr/>
         </p:nvPicPr>
         <p:blipFill>
-          <a:blip r:embed="rId2"/>
+          <a:blip r:embed="rId3"/>
           <a:stretch>
             <a:fillRect/>
           </a:stretch>
